--- a/public/wedding-mentor-files/S5_Proposta_Pricing.pptx
+++ b/public/wedding-mentor-files/S5_Proposta_Pricing.pptx
@@ -2637,7 +2637,7 @@
     <p:bg>
       <p:bgPr>
         <a:solidFill>
-          <a:srgbClr val="0B1D33"/>
+          <a:srgbClr val="F8F6F3"/>
         </a:solidFill>
       </p:bgPr>
     </p:bg>
@@ -2655,223 +2655,164 @@
           <a:chExt cx="0" cy="0"/>
         </a:xfrm>
       </p:grpSpPr>
-      <p:sp>
-        <p:nvSpPr>
-          <p:cNvPr id="2" name="Shape 0"/>
-          <p:cNvSpPr/>
-          <p:nvPr/>
-        </p:nvSpPr>
-        <p:spPr>
-          <a:xfrm>
-            <a:off x="8046720" y="-1645920"/>
-            <a:ext cx="5943600" cy="5943600"/>
-          </a:xfrm>
-          <a:prstGeom prst="ellipse">
-            <a:avLst/>
-          </a:prstGeom>
-          <a:solidFill>
-            <a:srgbClr val="4A9EFF">
-              <a:alpha val="14000"/>
-            </a:srgbClr>
-          </a:solidFill>
-          <a:ln/>
-        </p:spPr>
-      </p:sp>
-      <p:sp>
-        <p:nvSpPr>
-          <p:cNvPr id="3" name="Shape 1"/>
-          <p:cNvSpPr/>
-          <p:nvPr/>
-        </p:nvSpPr>
-        <p:spPr>
-          <a:xfrm>
-            <a:off x="-1828800" y="4389120"/>
-            <a:ext cx="5029200" cy="5029200"/>
-          </a:xfrm>
-          <a:prstGeom prst="ellipse">
-            <a:avLst/>
-          </a:prstGeom>
-          <a:solidFill>
-            <a:srgbClr val="C9A961">
-              <a:alpha val="10000"/>
-            </a:srgbClr>
-          </a:solidFill>
-          <a:ln/>
-        </p:spPr>
-      </p:sp>
-      <p:sp>
-        <p:nvSpPr>
-          <p:cNvPr id="4" name="Text 2"/>
-          <p:cNvSpPr/>
-          <p:nvPr/>
-        </p:nvSpPr>
-        <p:spPr>
-          <a:xfrm>
-            <a:off x="640080" y="548640"/>
-            <a:ext cx="7315200" cy="365760"/>
-          </a:xfrm>
-          <a:prstGeom prst="rect">
-            <a:avLst/>
-          </a:prstGeom>
-          <a:noFill/>
-          <a:ln/>
-        </p:spPr>
-        <p:txBody>
-          <a:bodyPr wrap="square" lIns="0" tIns="0" rIns="0" bIns="0" rtlCol="0" anchor="ctr"/>
-          <a:lstStyle/>
-          <a:p>
-            <a:pPr indent="0" marL="0">
-              <a:buNone/>
-            </a:pPr>
-            <a:r>
-              <a:rPr lang="en-US" sz="1300" b="1" spc="500" kern="0" dirty="0">
-                <a:solidFill>
-                  <a:srgbClr val="9FB2C9"/>
+      <p:pic>
+        <p:nvPicPr>
+          <p:cNvPr id="2" name="Image 0" descr="preencoded.png">    </p:cNvPr>
+          <p:cNvPicPr>
+            <a:picLocks noChangeAspect="1"/>
+          </p:cNvPicPr>
+          <p:nvPr/>
+        </p:nvPicPr>
+        <p:blipFill>
+          <a:blip r:embed="rId1"/>
+          <a:stretch>
+            <a:fillRect/>
+          </a:stretch>
+        </p:blipFill>
+        <p:spPr>
+          <a:xfrm>
+            <a:off x="603504" y="457200"/>
+            <a:ext cx="1371600" cy="1415143"/>
+          </a:xfrm>
+          <a:prstGeom prst="rect">
+            <a:avLst/>
+          </a:prstGeom>
+        </p:spPr>
+      </p:pic>
+      <p:sp>
+        <p:nvSpPr>
+          <p:cNvPr id="3" name="Text 0"/>
+          <p:cNvSpPr/>
+          <p:nvPr/>
+        </p:nvSpPr>
+        <p:spPr>
+          <a:xfrm>
+            <a:off x="640080" y="2286000"/>
+            <a:ext cx="5486400" cy="457200"/>
+          </a:xfrm>
+          <a:prstGeom prst="rect">
+            <a:avLst/>
+          </a:prstGeom>
+          <a:noFill/>
+          <a:ln/>
+        </p:spPr>
+        <p:txBody>
+          <a:bodyPr wrap="square" lIns="0" tIns="0" rIns="0" bIns="0" rtlCol="0" anchor="ctr"/>
+          <a:lstStyle/>
+          <a:p>
+            <a:pPr indent="0" marL="0">
+              <a:buNone/>
+            </a:pPr>
+            <a:r>
+              <a:rPr lang="en-US" sz="1500" b="1" spc="600" kern="0" dirty="0">
+                <a:solidFill>
+                  <a:srgbClr val="B1937E"/>
                 </a:solidFill>
                 <a:latin typeface="Calibri" pitchFamily="34" charset="0"/>
                 <a:ea typeface="Calibri" pitchFamily="34" charset="-122"/>
                 <a:cs typeface="Calibri" pitchFamily="34" charset="-120"/>
               </a:rPr>
-              <a:t>MENTORIA · RL</a:t>
-            </a:r>
-            <a:endParaRPr lang="en-US" sz="1300" dirty="0"/>
-          </a:p>
-        </p:txBody>
-      </p:sp>
-      <p:sp>
-        <p:nvSpPr>
-          <p:cNvPr id="5" name="Text 3"/>
-          <p:cNvSpPr/>
-          <p:nvPr/>
-        </p:nvSpPr>
-        <p:spPr>
-          <a:xfrm>
-            <a:off x="640080" y="2286000"/>
-            <a:ext cx="5486400" cy="457200"/>
-          </a:xfrm>
-          <a:prstGeom prst="rect">
-            <a:avLst/>
-          </a:prstGeom>
-          <a:noFill/>
-          <a:ln/>
-        </p:spPr>
-        <p:txBody>
-          <a:bodyPr wrap="square" lIns="0" tIns="0" rIns="0" bIns="0" rtlCol="0" anchor="ctr"/>
-          <a:lstStyle/>
-          <a:p>
-            <a:pPr indent="0" marL="0">
-              <a:buNone/>
-            </a:pPr>
-            <a:r>
-              <a:rPr lang="en-US" sz="1500" b="1" spc="600" kern="0" dirty="0">
-                <a:solidFill>
-                  <a:srgbClr val="C9A961"/>
+              <a:t>SESSÃO 05</a:t>
+            </a:r>
+            <a:endParaRPr lang="en-US" sz="1500" dirty="0"/>
+          </a:p>
+        </p:txBody>
+      </p:sp>
+      <p:sp>
+        <p:nvSpPr>
+          <p:cNvPr id="4" name="Text 1"/>
+          <p:cNvSpPr/>
+          <p:nvPr/>
+        </p:nvSpPr>
+        <p:spPr>
+          <a:xfrm>
+            <a:off x="603504" y="2724912"/>
+            <a:ext cx="10058400" cy="2011680"/>
+          </a:xfrm>
+          <a:prstGeom prst="rect">
+            <a:avLst/>
+          </a:prstGeom>
+          <a:noFill/>
+          <a:ln/>
+        </p:spPr>
+        <p:txBody>
+          <a:bodyPr wrap="square" lIns="0" tIns="0" rIns="0" bIns="0" rtlCol="0" anchor="ctr"/>
+          <a:lstStyle/>
+          <a:p>
+            <a:pPr indent="0" marL="0">
+              <a:lnSpc>
+                <a:spcPct val="100000"/>
+              </a:lnSpc>
+              <a:buNone/>
+            </a:pPr>
+            <a:r>
+              <a:rPr lang="en-US" sz="4400" b="1" dirty="0">
+                <a:solidFill>
+                  <a:srgbClr val="33302B"/>
+                </a:solidFill>
+                <a:latin typeface="Georgia" pitchFamily="34" charset="0"/>
+                <a:ea typeface="Georgia" pitchFamily="34" charset="-122"/>
+                <a:cs typeface="Georgia" pitchFamily="34" charset="-120"/>
+              </a:rPr>
+              <a:t>Proposta</a:t>
+            </a:r>
+            <a:endParaRPr lang="en-US" sz="4400" dirty="0"/>
+          </a:p>
+          <a:p>
+            <a:pPr indent="0" marL="0">
+              <a:lnSpc>
+                <a:spcPct val="100000"/>
+              </a:lnSpc>
+              <a:buNone/>
+            </a:pPr>
+            <a:r>
+              <a:rPr lang="en-US" sz="4400" b="1" dirty="0">
+                <a:solidFill>
+                  <a:srgbClr val="33302B"/>
+                </a:solidFill>
+                <a:latin typeface="Georgia" pitchFamily="34" charset="0"/>
+                <a:ea typeface="Georgia" pitchFamily="34" charset="-122"/>
+                <a:cs typeface="Georgia" pitchFamily="34" charset="-120"/>
+              </a:rPr>
+              <a:t>e Pricing</a:t>
+            </a:r>
+            <a:endParaRPr lang="en-US" sz="4400" dirty="0"/>
+          </a:p>
+        </p:txBody>
+      </p:sp>
+      <p:sp>
+        <p:nvSpPr>
+          <p:cNvPr id="5" name="Text 2"/>
+          <p:cNvSpPr/>
+          <p:nvPr/>
+        </p:nvSpPr>
+        <p:spPr>
+          <a:xfrm>
+            <a:off x="640080" y="4983480"/>
+            <a:ext cx="8229600" cy="822960"/>
+          </a:xfrm>
+          <a:prstGeom prst="rect">
+            <a:avLst/>
+          </a:prstGeom>
+          <a:noFill/>
+          <a:ln/>
+        </p:spPr>
+        <p:txBody>
+          <a:bodyPr wrap="square" lIns="0" tIns="0" rIns="0" bIns="0" rtlCol="0" anchor="ctr"/>
+          <a:lstStyle/>
+          <a:p>
+            <a:pPr indent="0" marL="0">
+              <a:buNone/>
+            </a:pPr>
+            <a:r>
+              <a:rPr lang="en-US" sz="1700" dirty="0">
+                <a:solidFill>
+                  <a:srgbClr val="8A7E72"/>
                 </a:solidFill>
                 <a:latin typeface="Calibri" pitchFamily="34" charset="0"/>
                 <a:ea typeface="Calibri" pitchFamily="34" charset="-122"/>
                 <a:cs typeface="Calibri" pitchFamily="34" charset="-120"/>
               </a:rPr>
-              <a:t>SESSÃO 05</a:t>
-            </a:r>
-            <a:endParaRPr lang="en-US" sz="1500" dirty="0"/>
-          </a:p>
-        </p:txBody>
-      </p:sp>
-      <p:sp>
-        <p:nvSpPr>
-          <p:cNvPr id="6" name="Text 4"/>
-          <p:cNvSpPr/>
-          <p:nvPr/>
-        </p:nvSpPr>
-        <p:spPr>
-          <a:xfrm>
-            <a:off x="603504" y="2724912"/>
-            <a:ext cx="10058400" cy="2011680"/>
-          </a:xfrm>
-          <a:prstGeom prst="rect">
-            <a:avLst/>
-          </a:prstGeom>
-          <a:noFill/>
-          <a:ln/>
-        </p:spPr>
-        <p:txBody>
-          <a:bodyPr wrap="square" lIns="0" tIns="0" rIns="0" bIns="0" rtlCol="0" anchor="ctr"/>
-          <a:lstStyle/>
-          <a:p>
-            <a:pPr indent="0" marL="0">
-              <a:lnSpc>
-                <a:spcPct val="100000"/>
-              </a:lnSpc>
-              <a:buNone/>
-            </a:pPr>
-            <a:r>
-              <a:rPr lang="en-US" sz="5000" b="1" dirty="0">
-                <a:solidFill>
-                  <a:srgbClr val="EAF1FA"/>
-                </a:solidFill>
-                <a:latin typeface="Bookman Old Style" pitchFamily="34" charset="0"/>
-                <a:ea typeface="Bookman Old Style" pitchFamily="34" charset="-122"/>
-                <a:cs typeface="Bookman Old Style" pitchFamily="34" charset="-120"/>
-              </a:rPr>
-              <a:t>Proposta</a:t>
-            </a:r>
-            <a:endParaRPr lang="en-US" sz="5000" dirty="0"/>
-          </a:p>
-          <a:p>
-            <a:pPr indent="0" marL="0">
-              <a:lnSpc>
-                <a:spcPct val="100000"/>
-              </a:lnSpc>
-              <a:buNone/>
-            </a:pPr>
-            <a:r>
-              <a:rPr lang="en-US" sz="5000" b="1" dirty="0">
-                <a:solidFill>
-                  <a:srgbClr val="EAF1FA"/>
-                </a:solidFill>
-                <a:latin typeface="Bookman Old Style" pitchFamily="34" charset="0"/>
-                <a:ea typeface="Bookman Old Style" pitchFamily="34" charset="-122"/>
-                <a:cs typeface="Bookman Old Style" pitchFamily="34" charset="-120"/>
-              </a:rPr>
-              <a:t>e Pricing</a:t>
-            </a:r>
-            <a:endParaRPr lang="en-US" sz="5000" dirty="0"/>
-          </a:p>
-        </p:txBody>
-      </p:sp>
-      <p:sp>
-        <p:nvSpPr>
-          <p:cNvPr id="7" name="Text 5"/>
-          <p:cNvSpPr/>
-          <p:nvPr/>
-        </p:nvSpPr>
-        <p:spPr>
-          <a:xfrm>
-            <a:off x="640080" y="4983480"/>
-            <a:ext cx="8229600" cy="822960"/>
-          </a:xfrm>
-          <a:prstGeom prst="rect">
-            <a:avLst/>
-          </a:prstGeom>
-          <a:noFill/>
-          <a:ln/>
-        </p:spPr>
-        <p:txBody>
-          <a:bodyPr wrap="square" lIns="0" tIns="0" rIns="0" bIns="0" rtlCol="0" anchor="ctr"/>
-          <a:lstStyle/>
-          <a:p>
-            <a:pPr indent="0" marL="0">
-              <a:buNone/>
-            </a:pPr>
-            <a:r>
-              <a:rPr lang="en-US" sz="1700" dirty="0">
-                <a:solidFill>
-                  <a:srgbClr val="9FB2C9"/>
-                </a:solidFill>
-                <a:latin typeface="Calibri" pitchFamily="34" charset="0"/>
-                <a:ea typeface="Calibri" pitchFamily="34" charset="-122"/>
-                <a:cs typeface="Calibri" pitchFamily="34" charset="-120"/>
-              </a:rPr>
               <a:t>Estruturar packs e apresentar a proposta de forma premium, para fechar a preço cheio, sem desconto.</a:t>
             </a:r>
             <a:endParaRPr lang="en-US" sz="1700" dirty="0"/>
@@ -2880,7 +2821,7 @@
       </p:sp>
       <p:sp>
         <p:nvSpPr>
-          <p:cNvPr id="8" name="Text 6"/>
+          <p:cNvPr id="6" name="Text 3"/>
           <p:cNvSpPr/>
           <p:nvPr/>
         </p:nvSpPr>
@@ -2905,11 +2846,11 @@
             <a:r>
               <a:rPr lang="en-US" sz="12000" b="1" dirty="0">
                 <a:solidFill>
-                  <a:srgbClr val="16314F"/>
-                </a:solidFill>
-                <a:latin typeface="Bookman Old Style" pitchFamily="34" charset="0"/>
-                <a:ea typeface="Bookman Old Style" pitchFamily="34" charset="-122"/>
-                <a:cs typeface="Bookman Old Style" pitchFamily="34" charset="-120"/>
+                  <a:srgbClr val="EADFD0"/>
+                </a:solidFill>
+                <a:latin typeface="Georgia" pitchFamily="34" charset="0"/>
+                <a:ea typeface="Georgia" pitchFamily="34" charset="-122"/>
+                <a:cs typeface="Georgia" pitchFamily="34" charset="-120"/>
               </a:rPr>
               <a:t>05</a:t>
             </a:r>
@@ -2919,7 +2860,7 @@
       </p:sp>
       <p:sp>
         <p:nvSpPr>
-          <p:cNvPr id="9" name="Shape 7"/>
+          <p:cNvPr id="7" name="Shape 4"/>
           <p:cNvSpPr/>
           <p:nvPr/>
         </p:nvSpPr>
@@ -2934,7 +2875,7 @@
           <a:noFill/>
           <a:ln w="31750">
             <a:solidFill>
-              <a:srgbClr val="C9A961"/>
+              <a:srgbClr val="B1937E"/>
             </a:solidFill>
             <a:prstDash val="solid"/>
           </a:ln>
@@ -2954,7 +2895,7 @@
     <p:bg>
       <p:bgPr>
         <a:solidFill>
-          <a:srgbClr val="0B1D33"/>
+          <a:srgbClr val="F8F6F3"/>
         </a:solidFill>
       </p:bgPr>
     </p:bg>
@@ -2974,51 +2915,7 @@
       </p:grpSpPr>
       <p:sp>
         <p:nvSpPr>
-          <p:cNvPr id="2" name="Shape 0"/>
-          <p:cNvSpPr/>
-          <p:nvPr/>
-        </p:nvSpPr>
-        <p:spPr>
-          <a:xfrm>
-            <a:off x="8229600" y="-1463040"/>
-            <a:ext cx="5486400" cy="5486400"/>
-          </a:xfrm>
-          <a:prstGeom prst="ellipse">
-            <a:avLst/>
-          </a:prstGeom>
-          <a:solidFill>
-            <a:srgbClr val="4A9EFF">
-              <a:alpha val="10000"/>
-            </a:srgbClr>
-          </a:solidFill>
-          <a:ln/>
-        </p:spPr>
-      </p:sp>
-      <p:sp>
-        <p:nvSpPr>
-          <p:cNvPr id="3" name="Shape 1"/>
-          <p:cNvSpPr/>
-          <p:nvPr/>
-        </p:nvSpPr>
-        <p:spPr>
-          <a:xfrm>
-            <a:off x="-1463040" y="4206240"/>
-            <a:ext cx="4572000" cy="4572000"/>
-          </a:xfrm>
-          <a:prstGeom prst="ellipse">
-            <a:avLst/>
-          </a:prstGeom>
-          <a:solidFill>
-            <a:srgbClr val="C9A961">
-              <a:alpha val="8000"/>
-            </a:srgbClr>
-          </a:solidFill>
-          <a:ln/>
-        </p:spPr>
-      </p:sp>
-      <p:sp>
-        <p:nvSpPr>
-          <p:cNvPr id="4" name="Text 2"/>
+          <p:cNvPr id="2" name="Text 0"/>
           <p:cNvSpPr/>
           <p:nvPr/>
         </p:nvSpPr>
@@ -3043,7 +2940,7 @@
             <a:r>
               <a:rPr lang="en-US" sz="1200" b="1" spc="300" kern="0" dirty="0">
                 <a:solidFill>
-                  <a:srgbClr val="4A9EFF"/>
+                  <a:srgbClr val="9A7B66"/>
                 </a:solidFill>
                 <a:latin typeface="Calibri" pitchFamily="34" charset="0"/>
                 <a:ea typeface="Calibri" pitchFamily="34" charset="-122"/>
@@ -3057,7 +2954,7 @@
       </p:sp>
       <p:sp>
         <p:nvSpPr>
-          <p:cNvPr id="5" name="Shape 3"/>
+          <p:cNvPr id="3" name="Shape 1"/>
           <p:cNvSpPr/>
           <p:nvPr/>
         </p:nvSpPr>
@@ -3070,14 +2967,19 @@
             <a:avLst/>
           </a:prstGeom>
           <a:solidFill>
-            <a:srgbClr val="16314F"/>
+            <a:srgbClr val="EADFD0"/>
           </a:solidFill>
-          <a:ln/>
+          <a:ln w="9525">
+            <a:solidFill>
+              <a:srgbClr val="E3D9CC"/>
+            </a:solidFill>
+            <a:prstDash val="solid"/>
+          </a:ln>
         </p:spPr>
       </p:sp>
       <p:pic>
         <p:nvPicPr>
-          <p:cNvPr id="6" name="Image 0" descr="preencoded.png">    </p:cNvPr>
+          <p:cNvPr id="4" name="Image 0" descr="preencoded.png">    </p:cNvPr>
           <p:cNvPicPr>
             <a:picLocks noChangeAspect="1"/>
           </p:cNvPicPr>
@@ -3101,7 +3003,7 @@
       </p:pic>
       <p:sp>
         <p:nvSpPr>
-          <p:cNvPr id="7" name="Text 4"/>
+          <p:cNvPr id="5" name="Text 2"/>
           <p:cNvSpPr/>
           <p:nvPr/>
         </p:nvSpPr>
@@ -3129,11 +3031,11 @@
             <a:r>
               <a:rPr lang="en-US" sz="3000" b="1" i="1" dirty="0">
                 <a:solidFill>
-                  <a:srgbClr val="EAF1FA"/>
-                </a:solidFill>
-                <a:latin typeface="Bookman Old Style" pitchFamily="34" charset="0"/>
-                <a:ea typeface="Bookman Old Style" pitchFamily="34" charset="-122"/>
-                <a:cs typeface="Bookman Old Style" pitchFamily="34" charset="-120"/>
+                  <a:srgbClr val="33302B"/>
+                </a:solidFill>
+                <a:latin typeface="Georgia" pitchFamily="34" charset="0"/>
+                <a:ea typeface="Georgia" pitchFamily="34" charset="-122"/>
+                <a:cs typeface="Georgia" pitchFamily="34" charset="-120"/>
               </a:rPr>
               <a:t>O preço só assusta quando aparece antes do valor.</a:t>
             </a:r>
@@ -3143,7 +3045,7 @@
       </p:sp>
       <p:sp>
         <p:nvSpPr>
-          <p:cNvPr id="8" name="Text 5"/>
+          <p:cNvPr id="6" name="Text 3"/>
           <p:cNvSpPr/>
           <p:nvPr/>
         </p:nvSpPr>
@@ -3168,7 +3070,7 @@
             <a:r>
               <a:rPr lang="en-US" sz="1600" dirty="0">
                 <a:solidFill>
-                  <a:srgbClr val="9FB2C9"/>
+                  <a:srgbClr val="8A7E72"/>
                 </a:solidFill>
                 <a:latin typeface="Calibri" pitchFamily="34" charset="0"/>
                 <a:ea typeface="Calibri" pitchFamily="34" charset="-122"/>
@@ -3182,7 +3084,7 @@
       </p:sp>
       <p:sp>
         <p:nvSpPr>
-          <p:cNvPr id="9" name="Shape 6"/>
+          <p:cNvPr id="7" name="Shape 4"/>
           <p:cNvSpPr/>
           <p:nvPr/>
         </p:nvSpPr>
@@ -3197,7 +3099,7 @@
           <a:noFill/>
           <a:ln w="9525">
             <a:solidFill>
-              <a:srgbClr val="5C708A">
+              <a:srgbClr val="A89A86">
                 <a:alpha val="60000"/>
               </a:srgbClr>
             </a:solidFill>
@@ -3207,7 +3109,7 @@
       </p:sp>
       <p:sp>
         <p:nvSpPr>
-          <p:cNvPr id="10" name="Text 7"/>
+          <p:cNvPr id="8" name="Text 5"/>
           <p:cNvSpPr/>
           <p:nvPr/>
         </p:nvSpPr>
@@ -3232,7 +3134,7 @@
             <a:r>
               <a:rPr lang="en-US" sz="900" dirty="0">
                 <a:solidFill>
-                  <a:srgbClr val="5C708A"/>
+                  <a:srgbClr val="A89A86"/>
                 </a:solidFill>
                 <a:latin typeface="Calibri" pitchFamily="34" charset="0"/>
                 <a:ea typeface="Calibri" pitchFamily="34" charset="-122"/>
@@ -3246,7 +3148,7 @@
       </p:sp>
       <p:sp>
         <p:nvSpPr>
-          <p:cNvPr id="11" name="Text 8"/>
+          <p:cNvPr id="9" name="Text 6"/>
           <p:cNvSpPr/>
           <p:nvPr/>
         </p:nvSpPr>
@@ -3271,7 +3173,7 @@
             <a:r>
               <a:rPr lang="en-US" sz="900" dirty="0">
                 <a:solidFill>
-                  <a:srgbClr val="5C708A"/>
+                  <a:srgbClr val="A89A86"/>
                 </a:solidFill>
                 <a:latin typeface="Calibri" pitchFamily="34" charset="0"/>
                 <a:ea typeface="Calibri" pitchFamily="34" charset="-122"/>
@@ -3297,7 +3199,7 @@
     <p:bg>
       <p:bgPr>
         <a:solidFill>
-          <a:srgbClr val="102844"/>
+          <a:srgbClr val="EFE7DE"/>
         </a:solidFill>
       </p:bgPr>
     </p:bg>
@@ -3342,7 +3244,7 @@
             <a:r>
               <a:rPr lang="en-US" sz="1200" b="1" spc="300" kern="0" dirty="0">
                 <a:solidFill>
-                  <a:srgbClr val="C9A961"/>
+                  <a:srgbClr val="B1937E"/>
                 </a:solidFill>
                 <a:latin typeface="Calibri" pitchFamily="34" charset="0"/>
                 <a:ea typeface="Calibri" pitchFamily="34" charset="-122"/>
@@ -3384,11 +3286,11 @@
             <a:r>
               <a:rPr lang="en-US" sz="3400" b="1" dirty="0">
                 <a:solidFill>
-                  <a:srgbClr val="EAF1FA"/>
-                </a:solidFill>
-                <a:latin typeface="Bookman Old Style" pitchFamily="34" charset="0"/>
-                <a:ea typeface="Bookman Old Style" pitchFamily="34" charset="-122"/>
-                <a:cs typeface="Bookman Old Style" pitchFamily="34" charset="-120"/>
+                  <a:srgbClr val="33302B"/>
+                </a:solidFill>
+                <a:latin typeface="Georgia" pitchFamily="34" charset="0"/>
+                <a:ea typeface="Georgia" pitchFamily="34" charset="-122"/>
+                <a:cs typeface="Georgia" pitchFamily="34" charset="-120"/>
               </a:rPr>
               <a:t>Email vs. proposta premium</a:t>
             </a:r>
@@ -3413,20 +3315,20 @@
             </a:avLst>
           </a:prstGeom>
           <a:solidFill>
-            <a:srgbClr val="13283F"/>
+            <a:srgbClr val="FFFFFF"/>
           </a:solidFill>
           <a:ln w="9525">
             <a:solidFill>
-              <a:srgbClr val="9FB2C9">
+              <a:srgbClr val="8A7E72">
                 <a:alpha val="50000"/>
               </a:srgbClr>
             </a:solidFill>
             <a:prstDash val="solid"/>
           </a:ln>
           <a:effectLst>
-            <a:outerShdw sx="100000" sy="100000" kx="0" ky="0" algn="bl" rotWithShape="0" blurRad="127000" dist="38100" dir="5400000">
-              <a:srgbClr val="000000">
-                <a:alpha val="28000"/>
+            <a:outerShdw sx="100000" sy="100000" kx="0" ky="0" algn="bl" rotWithShape="0" blurRad="114300" dist="38100" dir="5400000">
+              <a:srgbClr val="7A6A55">
+                <a:alpha val="12000"/>
               </a:srgbClr>
             </a:outerShdw>
           </a:effectLst>
@@ -3459,7 +3361,7 @@
             <a:r>
               <a:rPr lang="en-US" sz="1300" b="1" spc="300" kern="0" dirty="0">
                 <a:solidFill>
-                  <a:srgbClr val="9FB2C9"/>
+                  <a:srgbClr val="8A7E72"/>
                 </a:solidFill>
                 <a:latin typeface="Calibri" pitchFamily="34" charset="0"/>
                 <a:ea typeface="Calibri" pitchFamily="34" charset="-122"/>
@@ -3501,7 +3403,7 @@
             <a:r>
               <a:rPr lang="en-US" sz="1600" b="1" i="1" dirty="0">
                 <a:solidFill>
-                  <a:srgbClr val="9FB2C9"/>
+                  <a:srgbClr val="8A7E72"/>
                 </a:solidFill>
                 <a:latin typeface="Calibri" pitchFamily="34" charset="0"/>
                 <a:ea typeface="Calibri" pitchFamily="34" charset="-122"/>
@@ -3521,7 +3423,7 @@
             <a:r>
               <a:rPr lang="en-US" sz="1500" dirty="0">
                 <a:solidFill>
-                  <a:srgbClr val="9FB2C9"/>
+                  <a:srgbClr val="8A7E72"/>
                 </a:solidFill>
                 <a:latin typeface="Calibri" pitchFamily="34" charset="0"/>
                 <a:ea typeface="Calibri" pitchFamily="34" charset="-122"/>
@@ -3541,7 +3443,7 @@
             <a:r>
               <a:rPr lang="en-US" sz="1500" dirty="0">
                 <a:solidFill>
-                  <a:srgbClr val="9FB2C9"/>
+                  <a:srgbClr val="8A7E72"/>
                 </a:solidFill>
                 <a:latin typeface="Calibri" pitchFamily="34" charset="0"/>
                 <a:ea typeface="Calibri" pitchFamily="34" charset="-122"/>
@@ -3558,7 +3460,7 @@
             <a:r>
               <a:rPr lang="en-US" sz="1400" i="1" dirty="0">
                 <a:solidFill>
-                  <a:srgbClr val="9FB2C9"/>
+                  <a:srgbClr val="8A7E72"/>
                 </a:solidFill>
                 <a:latin typeface="Calibri" pitchFamily="34" charset="0"/>
                 <a:ea typeface="Calibri" pitchFamily="34" charset="-122"/>
@@ -3587,18 +3489,18 @@
             </a:avLst>
           </a:prstGeom>
           <a:solidFill>
-            <a:srgbClr val="16314F"/>
+            <a:srgbClr val="EADFD0"/>
           </a:solidFill>
           <a:ln w="19050">
             <a:solidFill>
-              <a:srgbClr val="C9A961"/>
+              <a:srgbClr val="B1937E"/>
             </a:solidFill>
             <a:prstDash val="solid"/>
           </a:ln>
           <a:effectLst>
-            <a:outerShdw sx="100000" sy="100000" kx="0" ky="0" algn="bl" rotWithShape="0" blurRad="127000" dist="38100" dir="5400000">
-              <a:srgbClr val="000000">
-                <a:alpha val="28000"/>
+            <a:outerShdw sx="100000" sy="100000" kx="0" ky="0" algn="bl" rotWithShape="0" blurRad="114300" dist="38100" dir="5400000">
+              <a:srgbClr val="7A6A55">
+                <a:alpha val="12000"/>
               </a:srgbClr>
             </a:outerShdw>
           </a:effectLst>
@@ -3631,7 +3533,7 @@
             <a:r>
               <a:rPr lang="en-US" sz="1300" b="1" spc="300" kern="0" dirty="0">
                 <a:solidFill>
-                  <a:srgbClr val="C9A961"/>
+                  <a:srgbClr val="B1937E"/>
                 </a:solidFill>
                 <a:latin typeface="Calibri" pitchFamily="34" charset="0"/>
                 <a:ea typeface="Calibri" pitchFamily="34" charset="-122"/>
@@ -3673,7 +3575,7 @@
             <a:r>
               <a:rPr lang="en-US" sz="1500" b="1" dirty="0">
                 <a:solidFill>
-                  <a:srgbClr val="EAF1FA"/>
+                  <a:srgbClr val="33302B"/>
                 </a:solidFill>
                 <a:latin typeface="Calibri" pitchFamily="34" charset="0"/>
                 <a:ea typeface="Calibri" pitchFamily="34" charset="-122"/>
@@ -3693,7 +3595,7 @@
             <a:r>
               <a:rPr lang="en-US" sz="1500" dirty="0">
                 <a:solidFill>
-                  <a:srgbClr val="EAF1FA"/>
+                  <a:srgbClr val="33302B"/>
                 </a:solidFill>
                 <a:latin typeface="Calibri" pitchFamily="34" charset="0"/>
                 <a:ea typeface="Calibri" pitchFamily="34" charset="-122"/>
@@ -3713,7 +3615,7 @@
             <a:r>
               <a:rPr lang="en-US" sz="1500" dirty="0">
                 <a:solidFill>
-                  <a:srgbClr val="EAF1FA"/>
+                  <a:srgbClr val="33302B"/>
                 </a:solidFill>
                 <a:latin typeface="Calibri" pitchFamily="34" charset="0"/>
                 <a:ea typeface="Calibri" pitchFamily="34" charset="-122"/>
@@ -3730,7 +3632,7 @@
             <a:r>
               <a:rPr lang="en-US" sz="1350" i="1" dirty="0">
                 <a:solidFill>
-                  <a:srgbClr val="C9A961"/>
+                  <a:srgbClr val="B1937E"/>
                 </a:solidFill>
                 <a:latin typeface="Calibri" pitchFamily="34" charset="0"/>
                 <a:ea typeface="Calibri" pitchFamily="34" charset="-122"/>
@@ -3759,7 +3661,7 @@
           <a:noFill/>
           <a:ln w="9525">
             <a:solidFill>
-              <a:srgbClr val="5C708A">
+              <a:srgbClr val="A89A86">
                 <a:alpha val="60000"/>
               </a:srgbClr>
             </a:solidFill>
@@ -3794,7 +3696,7 @@
             <a:r>
               <a:rPr lang="en-US" sz="900" dirty="0">
                 <a:solidFill>
-                  <a:srgbClr val="5C708A"/>
+                  <a:srgbClr val="A89A86"/>
                 </a:solidFill>
                 <a:latin typeface="Calibri" pitchFamily="34" charset="0"/>
                 <a:ea typeface="Calibri" pitchFamily="34" charset="-122"/>
@@ -3833,7 +3735,7 @@
             <a:r>
               <a:rPr lang="en-US" sz="900" dirty="0">
                 <a:solidFill>
-                  <a:srgbClr val="5C708A"/>
+                  <a:srgbClr val="A89A86"/>
                 </a:solidFill>
                 <a:latin typeface="Calibri" pitchFamily="34" charset="0"/>
                 <a:ea typeface="Calibri" pitchFamily="34" charset="-122"/>
@@ -3859,7 +3761,7 @@
     <p:bg>
       <p:bgPr>
         <a:solidFill>
-          <a:srgbClr val="0B1D33"/>
+          <a:srgbClr val="F8F6F3"/>
         </a:solidFill>
       </p:bgPr>
     </p:bg>
@@ -3904,7 +3806,7 @@
             <a:r>
               <a:rPr lang="en-US" sz="1200" b="1" spc="300" kern="0" dirty="0">
                 <a:solidFill>
-                  <a:srgbClr val="4A9EFF"/>
+                  <a:srgbClr val="9A7B66"/>
                 </a:solidFill>
                 <a:latin typeface="Calibri" pitchFamily="34" charset="0"/>
                 <a:ea typeface="Calibri" pitchFamily="34" charset="-122"/>
@@ -3946,11 +3848,11 @@
             <a:r>
               <a:rPr lang="en-US" sz="3200" b="1" dirty="0">
                 <a:solidFill>
-                  <a:srgbClr val="EAF1FA"/>
-                </a:solidFill>
-                <a:latin typeface="Bookman Old Style" pitchFamily="34" charset="0"/>
-                <a:ea typeface="Bookman Old Style" pitchFamily="34" charset="-122"/>
-                <a:cs typeface="Bookman Old Style" pitchFamily="34" charset="-120"/>
+                  <a:srgbClr val="33302B"/>
+                </a:solidFill>
+                <a:latin typeface="Georgia" pitchFamily="34" charset="0"/>
+                <a:ea typeface="Georgia" pitchFamily="34" charset="-122"/>
+                <a:cs typeface="Georgia" pitchFamily="34" charset="-120"/>
               </a:rPr>
               <a:t>O que uma proposta premium contém</a:t>
             </a:r>
@@ -3975,13 +3877,18 @@
             </a:avLst>
           </a:prstGeom>
           <a:solidFill>
-            <a:srgbClr val="13283F"/>
+            <a:srgbClr val="FFFFFF"/>
           </a:solidFill>
-          <a:ln/>
+          <a:ln w="12700">
+            <a:solidFill>
+              <a:srgbClr val="E3D9CC"/>
+            </a:solidFill>
+            <a:prstDash val="solid"/>
+          </a:ln>
           <a:effectLst>
-            <a:outerShdw sx="100000" sy="100000" kx="0" ky="0" algn="bl" rotWithShape="0" blurRad="127000" dist="38100" dir="5400000">
-              <a:srgbClr val="000000">
-                <a:alpha val="28000"/>
+            <a:outerShdw sx="100000" sy="100000" kx="0" ky="0" algn="bl" rotWithShape="0" blurRad="114300" dist="38100" dir="5400000">
+              <a:srgbClr val="7A6A55">
+                <a:alpha val="12000"/>
               </a:srgbClr>
             </a:outerShdw>
           </a:effectLst>
@@ -4002,9 +3909,14 @@
             <a:avLst/>
           </a:prstGeom>
           <a:solidFill>
-            <a:srgbClr val="16314F"/>
+            <a:srgbClr val="EADFD0"/>
           </a:solidFill>
-          <a:ln/>
+          <a:ln w="9525">
+            <a:solidFill>
+              <a:srgbClr val="E3D9CC"/>
+            </a:solidFill>
+            <a:prstDash val="solid"/>
+          </a:ln>
         </p:spPr>
       </p:sp>
       <p:pic>
@@ -4058,11 +3970,11 @@
             <a:r>
               <a:rPr lang="en-US" sz="1800" b="1" dirty="0">
                 <a:solidFill>
-                  <a:srgbClr val="C9A961"/>
-                </a:solidFill>
-                <a:latin typeface="Bookman Old Style" pitchFamily="34" charset="0"/>
-                <a:ea typeface="Bookman Old Style" pitchFamily="34" charset="-122"/>
-                <a:cs typeface="Bookman Old Style" pitchFamily="34" charset="-120"/>
+                  <a:srgbClr val="B1937E"/>
+                </a:solidFill>
+                <a:latin typeface="Georgia" pitchFamily="34" charset="0"/>
+                <a:ea typeface="Georgia" pitchFamily="34" charset="-122"/>
+                <a:cs typeface="Georgia" pitchFamily="34" charset="-120"/>
               </a:rPr>
               <a:t>A história do casal</a:t>
             </a:r>
@@ -4097,7 +4009,7 @@
             <a:r>
               <a:rPr lang="en-US" sz="1350" dirty="0">
                 <a:solidFill>
-                  <a:srgbClr val="9FB2C9"/>
+                  <a:srgbClr val="8A7E72"/>
                 </a:solidFill>
                 <a:latin typeface="Calibri" pitchFamily="34" charset="0"/>
                 <a:ea typeface="Calibri" pitchFamily="34" charset="-122"/>
@@ -4126,13 +4038,18 @@
             </a:avLst>
           </a:prstGeom>
           <a:solidFill>
-            <a:srgbClr val="13283F"/>
+            <a:srgbClr val="FFFFFF"/>
           </a:solidFill>
-          <a:ln/>
+          <a:ln w="12700">
+            <a:solidFill>
+              <a:srgbClr val="E3D9CC"/>
+            </a:solidFill>
+            <a:prstDash val="solid"/>
+          </a:ln>
           <a:effectLst>
-            <a:outerShdw sx="100000" sy="100000" kx="0" ky="0" algn="bl" rotWithShape="0" blurRad="127000" dist="38100" dir="5400000">
-              <a:srgbClr val="000000">
-                <a:alpha val="28000"/>
+            <a:outerShdw sx="100000" sy="100000" kx="0" ky="0" algn="bl" rotWithShape="0" blurRad="114300" dist="38100" dir="5400000">
+              <a:srgbClr val="7A6A55">
+                <a:alpha val="12000"/>
               </a:srgbClr>
             </a:outerShdw>
           </a:effectLst>
@@ -4153,9 +4070,14 @@
             <a:avLst/>
           </a:prstGeom>
           <a:solidFill>
-            <a:srgbClr val="16314F"/>
+            <a:srgbClr val="EADFD0"/>
           </a:solidFill>
-          <a:ln/>
+          <a:ln w="9525">
+            <a:solidFill>
+              <a:srgbClr val="E3D9CC"/>
+            </a:solidFill>
+            <a:prstDash val="solid"/>
+          </a:ln>
         </p:spPr>
       </p:sp>
       <p:pic>
@@ -4209,11 +4131,11 @@
             <a:r>
               <a:rPr lang="en-US" sz="1800" b="1" dirty="0">
                 <a:solidFill>
-                  <a:srgbClr val="C9A961"/>
-                </a:solidFill>
-                <a:latin typeface="Bookman Old Style" pitchFamily="34" charset="0"/>
-                <a:ea typeface="Bookman Old Style" pitchFamily="34" charset="-122"/>
-                <a:cs typeface="Bookman Old Style" pitchFamily="34" charset="-120"/>
+                  <a:srgbClr val="B1937E"/>
+                </a:solidFill>
+                <a:latin typeface="Georgia" pitchFamily="34" charset="0"/>
+                <a:ea typeface="Georgia" pitchFamily="34" charset="-122"/>
+                <a:cs typeface="Georgia" pitchFamily="34" charset="-120"/>
               </a:rPr>
               <a:t>Mockups e exemplos</a:t>
             </a:r>
@@ -4248,7 +4170,7 @@
             <a:r>
               <a:rPr lang="en-US" sz="1350" dirty="0">
                 <a:solidFill>
-                  <a:srgbClr val="9FB2C9"/>
+                  <a:srgbClr val="8A7E72"/>
                 </a:solidFill>
                 <a:latin typeface="Calibri" pitchFamily="34" charset="0"/>
                 <a:ea typeface="Calibri" pitchFamily="34" charset="-122"/>
@@ -4277,13 +4199,18 @@
             </a:avLst>
           </a:prstGeom>
           <a:solidFill>
-            <a:srgbClr val="13283F"/>
+            <a:srgbClr val="FFFFFF"/>
           </a:solidFill>
-          <a:ln/>
+          <a:ln w="12700">
+            <a:solidFill>
+              <a:srgbClr val="E3D9CC"/>
+            </a:solidFill>
+            <a:prstDash val="solid"/>
+          </a:ln>
           <a:effectLst>
-            <a:outerShdw sx="100000" sy="100000" kx="0" ky="0" algn="bl" rotWithShape="0" blurRad="127000" dist="38100" dir="5400000">
-              <a:srgbClr val="000000">
-                <a:alpha val="28000"/>
+            <a:outerShdw sx="100000" sy="100000" kx="0" ky="0" algn="bl" rotWithShape="0" blurRad="114300" dist="38100" dir="5400000">
+              <a:srgbClr val="7A6A55">
+                <a:alpha val="12000"/>
               </a:srgbClr>
             </a:outerShdw>
           </a:effectLst>
@@ -4304,9 +4231,14 @@
             <a:avLst/>
           </a:prstGeom>
           <a:solidFill>
-            <a:srgbClr val="16314F"/>
+            <a:srgbClr val="EADFD0"/>
           </a:solidFill>
-          <a:ln/>
+          <a:ln w="9525">
+            <a:solidFill>
+              <a:srgbClr val="E3D9CC"/>
+            </a:solidFill>
+            <a:prstDash val="solid"/>
+          </a:ln>
         </p:spPr>
       </p:sp>
       <p:pic>
@@ -4360,11 +4292,11 @@
             <a:r>
               <a:rPr lang="en-US" sz="1800" b="1" dirty="0">
                 <a:solidFill>
-                  <a:srgbClr val="C9A961"/>
-                </a:solidFill>
-                <a:latin typeface="Bookman Old Style" pitchFamily="34" charset="0"/>
-                <a:ea typeface="Bookman Old Style" pitchFamily="34" charset="-122"/>
-                <a:cs typeface="Bookman Old Style" pitchFamily="34" charset="-120"/>
+                  <a:srgbClr val="B1937E"/>
+                </a:solidFill>
+                <a:latin typeface="Georgia" pitchFamily="34" charset="0"/>
+                <a:ea typeface="Georgia" pitchFamily="34" charset="-122"/>
+                <a:cs typeface="Georgia" pitchFamily="34" charset="-120"/>
               </a:rPr>
               <a:t>Depoimentos</a:t>
             </a:r>
@@ -4399,7 +4331,7 @@
             <a:r>
               <a:rPr lang="en-US" sz="1350" dirty="0">
                 <a:solidFill>
-                  <a:srgbClr val="9FB2C9"/>
+                  <a:srgbClr val="8A7E72"/>
                 </a:solidFill>
                 <a:latin typeface="Calibri" pitchFamily="34" charset="0"/>
                 <a:ea typeface="Calibri" pitchFamily="34" charset="-122"/>
@@ -4428,13 +4360,18 @@
             </a:avLst>
           </a:prstGeom>
           <a:solidFill>
-            <a:srgbClr val="13283F"/>
+            <a:srgbClr val="FFFFFF"/>
           </a:solidFill>
-          <a:ln/>
+          <a:ln w="12700">
+            <a:solidFill>
+              <a:srgbClr val="E3D9CC"/>
+            </a:solidFill>
+            <a:prstDash val="solid"/>
+          </a:ln>
           <a:effectLst>
-            <a:outerShdw sx="100000" sy="100000" kx="0" ky="0" algn="bl" rotWithShape="0" blurRad="127000" dist="38100" dir="5400000">
-              <a:srgbClr val="000000">
-                <a:alpha val="28000"/>
+            <a:outerShdw sx="100000" sy="100000" kx="0" ky="0" algn="bl" rotWithShape="0" blurRad="114300" dist="38100" dir="5400000">
+              <a:srgbClr val="7A6A55">
+                <a:alpha val="12000"/>
               </a:srgbClr>
             </a:outerShdw>
           </a:effectLst>
@@ -4455,9 +4392,14 @@
             <a:avLst/>
           </a:prstGeom>
           <a:solidFill>
-            <a:srgbClr val="16314F"/>
+            <a:srgbClr val="EADFD0"/>
           </a:solidFill>
-          <a:ln/>
+          <a:ln w="9525">
+            <a:solidFill>
+              <a:srgbClr val="E3D9CC"/>
+            </a:solidFill>
+            <a:prstDash val="solid"/>
+          </a:ln>
         </p:spPr>
       </p:sp>
       <p:pic>
@@ -4511,11 +4453,11 @@
             <a:r>
               <a:rPr lang="en-US" sz="1800" b="1" dirty="0">
                 <a:solidFill>
-                  <a:srgbClr val="C9A961"/>
-                </a:solidFill>
-                <a:latin typeface="Bookman Old Style" pitchFamily="34" charset="0"/>
-                <a:ea typeface="Bookman Old Style" pitchFamily="34" charset="-122"/>
-                <a:cs typeface="Bookman Old Style" pitchFamily="34" charset="-120"/>
+                  <a:srgbClr val="B1937E"/>
+                </a:solidFill>
+                <a:latin typeface="Georgia" pitchFamily="34" charset="0"/>
+                <a:ea typeface="Georgia" pitchFamily="34" charset="-122"/>
+                <a:cs typeface="Georgia" pitchFamily="34" charset="-120"/>
               </a:rPr>
               <a:t>O teu processo</a:t>
             </a:r>
@@ -4550,7 +4492,7 @@
             <a:r>
               <a:rPr lang="en-US" sz="1350" dirty="0">
                 <a:solidFill>
-                  <a:srgbClr val="9FB2C9"/>
+                  <a:srgbClr val="8A7E72"/>
                 </a:solidFill>
                 <a:latin typeface="Calibri" pitchFamily="34" charset="0"/>
                 <a:ea typeface="Calibri" pitchFamily="34" charset="-122"/>
@@ -4579,7 +4521,7 @@
           <a:noFill/>
           <a:ln w="9525">
             <a:solidFill>
-              <a:srgbClr val="5C708A">
+              <a:srgbClr val="A89A86">
                 <a:alpha val="60000"/>
               </a:srgbClr>
             </a:solidFill>
@@ -4614,7 +4556,7 @@
             <a:r>
               <a:rPr lang="en-US" sz="900" dirty="0">
                 <a:solidFill>
-                  <a:srgbClr val="5C708A"/>
+                  <a:srgbClr val="A89A86"/>
                 </a:solidFill>
                 <a:latin typeface="Calibri" pitchFamily="34" charset="0"/>
                 <a:ea typeface="Calibri" pitchFamily="34" charset="-122"/>
@@ -4653,7 +4595,7 @@
             <a:r>
               <a:rPr lang="en-US" sz="900" dirty="0">
                 <a:solidFill>
-                  <a:srgbClr val="5C708A"/>
+                  <a:srgbClr val="A89A86"/>
                 </a:solidFill>
                 <a:latin typeface="Calibri" pitchFamily="34" charset="0"/>
                 <a:ea typeface="Calibri" pitchFamily="34" charset="-122"/>
@@ -4679,7 +4621,7 @@
     <p:bg>
       <p:bgPr>
         <a:solidFill>
-          <a:srgbClr val="0B1D33"/>
+          <a:srgbClr val="F8F6F3"/>
         </a:solidFill>
       </p:bgPr>
     </p:bg>
@@ -4724,7 +4666,7 @@
             <a:r>
               <a:rPr lang="en-US" sz="1200" b="1" spc="300" kern="0" dirty="0">
                 <a:solidFill>
-                  <a:srgbClr val="4A9EFF"/>
+                  <a:srgbClr val="9A7B66"/>
                 </a:solidFill>
                 <a:latin typeface="Calibri" pitchFamily="34" charset="0"/>
                 <a:ea typeface="Calibri" pitchFamily="34" charset="-122"/>
@@ -4766,11 +4708,11 @@
             <a:r>
               <a:rPr lang="en-US" sz="3200" b="1" dirty="0">
                 <a:solidFill>
-                  <a:srgbClr val="EAF1FA"/>
-                </a:solidFill>
-                <a:latin typeface="Bookman Old Style" pitchFamily="34" charset="0"/>
-                <a:ea typeface="Bookman Old Style" pitchFamily="34" charset="-122"/>
-                <a:cs typeface="Bookman Old Style" pitchFamily="34" charset="-120"/>
+                  <a:srgbClr val="33302B"/>
+                </a:solidFill>
+                <a:latin typeface="Georgia" pitchFamily="34" charset="0"/>
+                <a:ea typeface="Georgia" pitchFamily="34" charset="-122"/>
+                <a:cs typeface="Georgia" pitchFamily="34" charset="-120"/>
               </a:rPr>
               <a:t>Comunicar valor antes do número</a:t>
             </a:r>
@@ -4795,13 +4737,18 @@
             </a:avLst>
           </a:prstGeom>
           <a:solidFill>
-            <a:srgbClr val="13283F"/>
+            <a:srgbClr val="FFFFFF"/>
           </a:solidFill>
-          <a:ln/>
+          <a:ln w="12700">
+            <a:solidFill>
+              <a:srgbClr val="E3D9CC"/>
+            </a:solidFill>
+            <a:prstDash val="solid"/>
+          </a:ln>
           <a:effectLst>
-            <a:outerShdw sx="100000" sy="100000" kx="0" ky="0" algn="bl" rotWithShape="0" blurRad="127000" dist="38100" dir="5400000">
-              <a:srgbClr val="000000">
-                <a:alpha val="28000"/>
+            <a:outerShdw sx="100000" sy="100000" kx="0" ky="0" algn="bl" rotWithShape="0" blurRad="114300" dist="38100" dir="5400000">
+              <a:srgbClr val="7A6A55">
+                <a:alpha val="12000"/>
               </a:srgbClr>
             </a:outerShdw>
           </a:effectLst>
@@ -4822,9 +4769,14 @@
             <a:avLst/>
           </a:prstGeom>
           <a:solidFill>
-            <a:srgbClr val="16314F"/>
+            <a:srgbClr val="EADFD0"/>
           </a:solidFill>
-          <a:ln/>
+          <a:ln w="9525">
+            <a:solidFill>
+              <a:srgbClr val="E3D9CC"/>
+            </a:solidFill>
+            <a:prstDash val="solid"/>
+          </a:ln>
         </p:spPr>
       </p:sp>
       <p:pic>
@@ -4878,11 +4830,11 @@
             <a:r>
               <a:rPr lang="en-US" sz="1900" b="1" dirty="0">
                 <a:solidFill>
-                  <a:srgbClr val="C9A961"/>
-                </a:solidFill>
-                <a:latin typeface="Bookman Old Style" pitchFamily="34" charset="0"/>
-                <a:ea typeface="Bookman Old Style" pitchFamily="34" charset="-122"/>
-                <a:cs typeface="Bookman Old Style" pitchFamily="34" charset="-120"/>
+                  <a:srgbClr val="B1937E"/>
+                </a:solidFill>
+                <a:latin typeface="Georgia" pitchFamily="34" charset="0"/>
+                <a:ea typeface="Georgia" pitchFamily="34" charset="-122"/>
+                <a:cs typeface="Georgia" pitchFamily="34" charset="-120"/>
               </a:rPr>
               <a:t>Recapitula o valor</a:t>
             </a:r>
@@ -4917,7 +4869,7 @@
             <a:r>
               <a:rPr lang="en-US" sz="1400" dirty="0">
                 <a:solidFill>
-                  <a:srgbClr val="9FB2C9"/>
+                  <a:srgbClr val="8A7E72"/>
                 </a:solidFill>
                 <a:latin typeface="Calibri" pitchFamily="34" charset="0"/>
                 <a:ea typeface="Calibri" pitchFamily="34" charset="-122"/>
@@ -4946,13 +4898,18 @@
             </a:avLst>
           </a:prstGeom>
           <a:solidFill>
-            <a:srgbClr val="13283F"/>
+            <a:srgbClr val="FFFFFF"/>
           </a:solidFill>
-          <a:ln/>
+          <a:ln w="12700">
+            <a:solidFill>
+              <a:srgbClr val="E3D9CC"/>
+            </a:solidFill>
+            <a:prstDash val="solid"/>
+          </a:ln>
           <a:effectLst>
-            <a:outerShdw sx="100000" sy="100000" kx="0" ky="0" algn="bl" rotWithShape="0" blurRad="127000" dist="38100" dir="5400000">
-              <a:srgbClr val="000000">
-                <a:alpha val="28000"/>
+            <a:outerShdw sx="100000" sy="100000" kx="0" ky="0" algn="bl" rotWithShape="0" blurRad="114300" dist="38100" dir="5400000">
+              <a:srgbClr val="7A6A55">
+                <a:alpha val="12000"/>
               </a:srgbClr>
             </a:outerShdw>
           </a:effectLst>
@@ -4973,9 +4930,14 @@
             <a:avLst/>
           </a:prstGeom>
           <a:solidFill>
-            <a:srgbClr val="16314F"/>
+            <a:srgbClr val="EADFD0"/>
           </a:solidFill>
-          <a:ln/>
+          <a:ln w="9525">
+            <a:solidFill>
+              <a:srgbClr val="E3D9CC"/>
+            </a:solidFill>
+            <a:prstDash val="solid"/>
+          </a:ln>
         </p:spPr>
       </p:sp>
       <p:pic>
@@ -5029,11 +4991,11 @@
             <a:r>
               <a:rPr lang="en-US" sz="1900" b="1" dirty="0">
                 <a:solidFill>
-                  <a:srgbClr val="C9A961"/>
-                </a:solidFill>
-                <a:latin typeface="Bookman Old Style" pitchFamily="34" charset="0"/>
-                <a:ea typeface="Bookman Old Style" pitchFamily="34" charset="-122"/>
-                <a:cs typeface="Bookman Old Style" pitchFamily="34" charset="-120"/>
+                  <a:srgbClr val="B1937E"/>
+                </a:solidFill>
+                <a:latin typeface="Georgia" pitchFamily="34" charset="0"/>
+                <a:ea typeface="Georgia" pitchFamily="34" charset="-122"/>
+                <a:cs typeface="Georgia" pitchFamily="34" charset="-120"/>
               </a:rPr>
               <a:t>Apresenta com confiança</a:t>
             </a:r>
@@ -5068,7 +5030,7 @@
             <a:r>
               <a:rPr lang="en-US" sz="1400" dirty="0">
                 <a:solidFill>
-                  <a:srgbClr val="9FB2C9"/>
+                  <a:srgbClr val="8A7E72"/>
                 </a:solidFill>
                 <a:latin typeface="Calibri" pitchFamily="34" charset="0"/>
                 <a:ea typeface="Calibri" pitchFamily="34" charset="-122"/>
@@ -5097,13 +5059,18 @@
             </a:avLst>
           </a:prstGeom>
           <a:solidFill>
-            <a:srgbClr val="13283F"/>
+            <a:srgbClr val="FFFFFF"/>
           </a:solidFill>
-          <a:ln/>
+          <a:ln w="12700">
+            <a:solidFill>
+              <a:srgbClr val="E3D9CC"/>
+            </a:solidFill>
+            <a:prstDash val="solid"/>
+          </a:ln>
           <a:effectLst>
-            <a:outerShdw sx="100000" sy="100000" kx="0" ky="0" algn="bl" rotWithShape="0" blurRad="127000" dist="38100" dir="5400000">
-              <a:srgbClr val="000000">
-                <a:alpha val="28000"/>
+            <a:outerShdw sx="100000" sy="100000" kx="0" ky="0" algn="bl" rotWithShape="0" blurRad="114300" dist="38100" dir="5400000">
+              <a:srgbClr val="7A6A55">
+                <a:alpha val="12000"/>
               </a:srgbClr>
             </a:outerShdw>
           </a:effectLst>
@@ -5124,9 +5091,14 @@
             <a:avLst/>
           </a:prstGeom>
           <a:solidFill>
-            <a:srgbClr val="16314F"/>
+            <a:srgbClr val="EADFD0"/>
           </a:solidFill>
-          <a:ln/>
+          <a:ln w="9525">
+            <a:solidFill>
+              <a:srgbClr val="E3D9CC"/>
+            </a:solidFill>
+            <a:prstDash val="solid"/>
+          </a:ln>
         </p:spPr>
       </p:sp>
       <p:pic>
@@ -5180,11 +5152,11 @@
             <a:r>
               <a:rPr lang="en-US" sz="1900" b="1" dirty="0">
                 <a:solidFill>
-                  <a:srgbClr val="C9A961"/>
-                </a:solidFill>
-                <a:latin typeface="Bookman Old Style" pitchFamily="34" charset="0"/>
-                <a:ea typeface="Bookman Old Style" pitchFamily="34" charset="-122"/>
-                <a:cs typeface="Bookman Old Style" pitchFamily="34" charset="-120"/>
+                  <a:srgbClr val="B1937E"/>
+                </a:solidFill>
+                <a:latin typeface="Georgia" pitchFamily="34" charset="0"/>
+                <a:ea typeface="Georgia" pitchFamily="34" charset="-122"/>
+                <a:cs typeface="Georgia" pitchFamily="34" charset="-120"/>
               </a:rPr>
               <a:t>Cala-te depois</a:t>
             </a:r>
@@ -5219,7 +5191,7 @@
             <a:r>
               <a:rPr lang="en-US" sz="1400" dirty="0">
                 <a:solidFill>
-                  <a:srgbClr val="9FB2C9"/>
+                  <a:srgbClr val="8A7E72"/>
                 </a:solidFill>
                 <a:latin typeface="Calibri" pitchFamily="34" charset="0"/>
                 <a:ea typeface="Calibri" pitchFamily="34" charset="-122"/>
@@ -5248,7 +5220,7 @@
           <a:noFill/>
           <a:ln w="9525">
             <a:solidFill>
-              <a:srgbClr val="5C708A">
+              <a:srgbClr val="A89A86">
                 <a:alpha val="60000"/>
               </a:srgbClr>
             </a:solidFill>
@@ -5283,7 +5255,7 @@
             <a:r>
               <a:rPr lang="en-US" sz="900" dirty="0">
                 <a:solidFill>
-                  <a:srgbClr val="5C708A"/>
+                  <a:srgbClr val="A89A86"/>
                 </a:solidFill>
                 <a:latin typeface="Calibri" pitchFamily="34" charset="0"/>
                 <a:ea typeface="Calibri" pitchFamily="34" charset="-122"/>
@@ -5322,7 +5294,7 @@
             <a:r>
               <a:rPr lang="en-US" sz="900" dirty="0">
                 <a:solidFill>
-                  <a:srgbClr val="5C708A"/>
+                  <a:srgbClr val="A89A86"/>
                 </a:solidFill>
                 <a:latin typeface="Calibri" pitchFamily="34" charset="0"/>
                 <a:ea typeface="Calibri" pitchFamily="34" charset="-122"/>
@@ -5348,7 +5320,7 @@
     <p:bg>
       <p:bgPr>
         <a:solidFill>
-          <a:srgbClr val="102844"/>
+          <a:srgbClr val="EFE7DE"/>
         </a:solidFill>
       </p:bgPr>
     </p:bg>
@@ -5393,7 +5365,7 @@
             <a:r>
               <a:rPr lang="en-US" sz="1200" b="1" spc="300" kern="0" dirty="0">
                 <a:solidFill>
-                  <a:srgbClr val="C9A961"/>
+                  <a:srgbClr val="B1937E"/>
                 </a:solidFill>
                 <a:latin typeface="Calibri" pitchFamily="34" charset="0"/>
                 <a:ea typeface="Calibri" pitchFamily="34" charset="-122"/>
@@ -5435,11 +5407,11 @@
             <a:r>
               <a:rPr lang="en-US" sz="3400" b="1" dirty="0">
                 <a:solidFill>
-                  <a:srgbClr val="EAF1FA"/>
-                </a:solidFill>
-                <a:latin typeface="Bookman Old Style" pitchFamily="34" charset="0"/>
-                <a:ea typeface="Bookman Old Style" pitchFamily="34" charset="-122"/>
-                <a:cs typeface="Bookman Old Style" pitchFamily="34" charset="-120"/>
+                  <a:srgbClr val="33302B"/>
+                </a:solidFill>
+                <a:latin typeface="Georgia" pitchFamily="34" charset="0"/>
+                <a:ea typeface="Georgia" pitchFamily="34" charset="-122"/>
+                <a:cs typeface="Georgia" pitchFamily="34" charset="-120"/>
               </a:rPr>
               <a:t>'Está acima do nosso orçamento'</a:t>
             </a:r>
@@ -5464,20 +5436,20 @@
             </a:avLst>
           </a:prstGeom>
           <a:solidFill>
-            <a:srgbClr val="13283F"/>
+            <a:srgbClr val="FFFFFF"/>
           </a:solidFill>
           <a:ln w="9525">
             <a:solidFill>
-              <a:srgbClr val="9FB2C9">
+              <a:srgbClr val="8A7E72">
                 <a:alpha val="50000"/>
               </a:srgbClr>
             </a:solidFill>
             <a:prstDash val="solid"/>
           </a:ln>
           <a:effectLst>
-            <a:outerShdw sx="100000" sy="100000" kx="0" ky="0" algn="bl" rotWithShape="0" blurRad="127000" dist="38100" dir="5400000">
-              <a:srgbClr val="000000">
-                <a:alpha val="28000"/>
+            <a:outerShdw sx="100000" sy="100000" kx="0" ky="0" algn="bl" rotWithShape="0" blurRad="114300" dist="38100" dir="5400000">
+              <a:srgbClr val="7A6A55">
+                <a:alpha val="12000"/>
               </a:srgbClr>
             </a:outerShdw>
           </a:effectLst>
@@ -5510,7 +5482,7 @@
             <a:r>
               <a:rPr lang="en-US" sz="1300" b="1" spc="300" kern="0" dirty="0">
                 <a:solidFill>
-                  <a:srgbClr val="9FB2C9"/>
+                  <a:srgbClr val="8A7E72"/>
                 </a:solidFill>
                 <a:latin typeface="Calibri" pitchFamily="34" charset="0"/>
                 <a:ea typeface="Calibri" pitchFamily="34" charset="-122"/>
@@ -5552,7 +5524,7 @@
             <a:r>
               <a:rPr lang="en-US" sz="1600" b="1" dirty="0">
                 <a:solidFill>
-                  <a:srgbClr val="9FB2C9"/>
+                  <a:srgbClr val="8A7E72"/>
                 </a:solidFill>
                 <a:latin typeface="Calibri" pitchFamily="34" charset="0"/>
                 <a:ea typeface="Calibri" pitchFamily="34" charset="-122"/>
@@ -5572,7 +5544,7 @@
             <a:r>
               <a:rPr lang="en-US" sz="1500" dirty="0">
                 <a:solidFill>
-                  <a:srgbClr val="9FB2C9"/>
+                  <a:srgbClr val="8A7E72"/>
                 </a:solidFill>
                 <a:latin typeface="Calibri" pitchFamily="34" charset="0"/>
                 <a:ea typeface="Calibri" pitchFamily="34" charset="-122"/>
@@ -5592,7 +5564,7 @@
             <a:r>
               <a:rPr lang="en-US" sz="1500" dirty="0">
                 <a:solidFill>
-                  <a:srgbClr val="9FB2C9"/>
+                  <a:srgbClr val="8A7E72"/>
                 </a:solidFill>
                 <a:latin typeface="Calibri" pitchFamily="34" charset="0"/>
                 <a:ea typeface="Calibri" pitchFamily="34" charset="-122"/>
@@ -5609,7 +5581,7 @@
             <a:r>
               <a:rPr lang="en-US" sz="1400" i="1" dirty="0">
                 <a:solidFill>
-                  <a:srgbClr val="9FB2C9"/>
+                  <a:srgbClr val="8A7E72"/>
                 </a:solidFill>
                 <a:latin typeface="Calibri" pitchFamily="34" charset="0"/>
                 <a:ea typeface="Calibri" pitchFamily="34" charset="-122"/>
@@ -5638,18 +5610,18 @@
             </a:avLst>
           </a:prstGeom>
           <a:solidFill>
-            <a:srgbClr val="16314F"/>
+            <a:srgbClr val="EADFD0"/>
           </a:solidFill>
           <a:ln w="19050">
             <a:solidFill>
-              <a:srgbClr val="C9A961"/>
+              <a:srgbClr val="B1937E"/>
             </a:solidFill>
             <a:prstDash val="solid"/>
           </a:ln>
           <a:effectLst>
-            <a:outerShdw sx="100000" sy="100000" kx="0" ky="0" algn="bl" rotWithShape="0" blurRad="127000" dist="38100" dir="5400000">
-              <a:srgbClr val="000000">
-                <a:alpha val="28000"/>
+            <a:outerShdw sx="100000" sy="100000" kx="0" ky="0" algn="bl" rotWithShape="0" blurRad="114300" dist="38100" dir="5400000">
+              <a:srgbClr val="7A6A55">
+                <a:alpha val="12000"/>
               </a:srgbClr>
             </a:outerShdw>
           </a:effectLst>
@@ -5682,7 +5654,7 @@
             <a:r>
               <a:rPr lang="en-US" sz="1300" b="1" spc="300" kern="0" dirty="0">
                 <a:solidFill>
-                  <a:srgbClr val="C9A961"/>
+                  <a:srgbClr val="B1937E"/>
                 </a:solidFill>
                 <a:latin typeface="Calibri" pitchFamily="34" charset="0"/>
                 <a:ea typeface="Calibri" pitchFamily="34" charset="-122"/>
@@ -5724,7 +5696,7 @@
             <a:r>
               <a:rPr lang="en-US" sz="1500" b="1" dirty="0">
                 <a:solidFill>
-                  <a:srgbClr val="EAF1FA"/>
+                  <a:srgbClr val="33302B"/>
                 </a:solidFill>
                 <a:latin typeface="Calibri" pitchFamily="34" charset="0"/>
                 <a:ea typeface="Calibri" pitchFamily="34" charset="-122"/>
@@ -5744,7 +5716,7 @@
             <a:r>
               <a:rPr lang="en-US" sz="1500" dirty="0">
                 <a:solidFill>
-                  <a:srgbClr val="EAF1FA"/>
+                  <a:srgbClr val="33302B"/>
                 </a:solidFill>
                 <a:latin typeface="Calibri" pitchFamily="34" charset="0"/>
                 <a:ea typeface="Calibri" pitchFamily="34" charset="-122"/>
@@ -5764,7 +5736,7 @@
             <a:r>
               <a:rPr lang="en-US" sz="1500" dirty="0">
                 <a:solidFill>
-                  <a:srgbClr val="EAF1FA"/>
+                  <a:srgbClr val="33302B"/>
                 </a:solidFill>
                 <a:latin typeface="Calibri" pitchFamily="34" charset="0"/>
                 <a:ea typeface="Calibri" pitchFamily="34" charset="-122"/>
@@ -5781,7 +5753,7 @@
             <a:r>
               <a:rPr lang="en-US" sz="1400" i="1" dirty="0">
                 <a:solidFill>
-                  <a:srgbClr val="C9A961"/>
+                  <a:srgbClr val="B1937E"/>
                 </a:solidFill>
                 <a:latin typeface="Calibri" pitchFamily="34" charset="0"/>
                 <a:ea typeface="Calibri" pitchFamily="34" charset="-122"/>
@@ -5810,7 +5782,7 @@
           <a:noFill/>
           <a:ln w="9525">
             <a:solidFill>
-              <a:srgbClr val="5C708A">
+              <a:srgbClr val="A89A86">
                 <a:alpha val="60000"/>
               </a:srgbClr>
             </a:solidFill>
@@ -5845,7 +5817,7 @@
             <a:r>
               <a:rPr lang="en-US" sz="900" dirty="0">
                 <a:solidFill>
-                  <a:srgbClr val="5C708A"/>
+                  <a:srgbClr val="A89A86"/>
                 </a:solidFill>
                 <a:latin typeface="Calibri" pitchFamily="34" charset="0"/>
                 <a:ea typeface="Calibri" pitchFamily="34" charset="-122"/>
@@ -5884,7 +5856,7 @@
             <a:r>
               <a:rPr lang="en-US" sz="900" dirty="0">
                 <a:solidFill>
-                  <a:srgbClr val="5C708A"/>
+                  <a:srgbClr val="A89A86"/>
                 </a:solidFill>
                 <a:latin typeface="Calibri" pitchFamily="34" charset="0"/>
                 <a:ea typeface="Calibri" pitchFamily="34" charset="-122"/>
@@ -5910,7 +5882,7 @@
     <p:bg>
       <p:bgPr>
         <a:solidFill>
-          <a:srgbClr val="0B1D33"/>
+          <a:srgbClr val="F8F6F3"/>
         </a:solidFill>
       </p:bgPr>
     </p:bg>
@@ -5955,7 +5927,7 @@
             <a:r>
               <a:rPr lang="en-US" sz="1200" b="1" spc="300" kern="0" dirty="0">
                 <a:solidFill>
-                  <a:srgbClr val="4A9EFF"/>
+                  <a:srgbClr val="9A7B66"/>
                 </a:solidFill>
                 <a:latin typeface="Calibri" pitchFamily="34" charset="0"/>
                 <a:ea typeface="Calibri" pitchFamily="34" charset="-122"/>
@@ -5997,11 +5969,11 @@
             <a:r>
               <a:rPr lang="en-US" sz="3200" b="1" dirty="0">
                 <a:solidFill>
-                  <a:srgbClr val="EAF1FA"/>
-                </a:solidFill>
-                <a:latin typeface="Bookman Old Style" pitchFamily="34" charset="0"/>
-                <a:ea typeface="Bookman Old Style" pitchFamily="34" charset="-122"/>
-                <a:cs typeface="Bookman Old Style" pitchFamily="34" charset="-120"/>
+                  <a:srgbClr val="33302B"/>
+                </a:solidFill>
+                <a:latin typeface="Georgia" pitchFamily="34" charset="0"/>
+                <a:ea typeface="Georgia" pitchFamily="34" charset="-122"/>
+                <a:cs typeface="Georgia" pitchFamily="34" charset="-120"/>
               </a:rPr>
               <a:t>Responder com valor, não com desconto</a:t>
             </a:r>
@@ -6026,13 +5998,18 @@
             </a:avLst>
           </a:prstGeom>
           <a:solidFill>
-            <a:srgbClr val="13283F"/>
+            <a:srgbClr val="FFFFFF"/>
           </a:solidFill>
-          <a:ln/>
+          <a:ln w="12700">
+            <a:solidFill>
+              <a:srgbClr val="E3D9CC"/>
+            </a:solidFill>
+            <a:prstDash val="solid"/>
+          </a:ln>
           <a:effectLst>
-            <a:outerShdw sx="100000" sy="100000" kx="0" ky="0" algn="bl" rotWithShape="0" blurRad="127000" dist="38100" dir="5400000">
-              <a:srgbClr val="000000">
-                <a:alpha val="28000"/>
+            <a:outerShdw sx="100000" sy="100000" kx="0" ky="0" algn="bl" rotWithShape="0" blurRad="114300" dist="38100" dir="5400000">
+              <a:srgbClr val="7A6A55">
+                <a:alpha val="12000"/>
               </a:srgbClr>
             </a:outerShdw>
           </a:effectLst>
@@ -6053,9 +6030,14 @@
             <a:avLst/>
           </a:prstGeom>
           <a:solidFill>
-            <a:srgbClr val="16314F"/>
+            <a:srgbClr val="EADFD0"/>
           </a:solidFill>
-          <a:ln/>
+          <a:ln w="9525">
+            <a:solidFill>
+              <a:srgbClr val="E3D9CC"/>
+            </a:solidFill>
+            <a:prstDash val="solid"/>
+          </a:ln>
         </p:spPr>
       </p:sp>
       <p:pic>
@@ -6109,11 +6091,11 @@
             <a:r>
               <a:rPr lang="en-US" sz="1900" b="1" dirty="0">
                 <a:solidFill>
-                  <a:srgbClr val="C9A961"/>
-                </a:solidFill>
-                <a:latin typeface="Bookman Old Style" pitchFamily="34" charset="0"/>
-                <a:ea typeface="Bookman Old Style" pitchFamily="34" charset="-122"/>
-                <a:cs typeface="Bookman Old Style" pitchFamily="34" charset="-120"/>
+                  <a:srgbClr val="B1937E"/>
+                </a:solidFill>
+                <a:latin typeface="Georgia" pitchFamily="34" charset="0"/>
+                <a:ea typeface="Georgia" pitchFamily="34" charset="-122"/>
+                <a:cs typeface="Georgia" pitchFamily="34" charset="-120"/>
               </a:rPr>
               <a:t>Reorganiza, não baixes</a:t>
             </a:r>
@@ -6148,7 +6130,7 @@
             <a:r>
               <a:rPr lang="en-US" sz="1400" dirty="0">
                 <a:solidFill>
-                  <a:srgbClr val="9FB2C9"/>
+                  <a:srgbClr val="8A7E72"/>
                 </a:solidFill>
                 <a:latin typeface="Calibri" pitchFamily="34" charset="0"/>
                 <a:ea typeface="Calibri" pitchFamily="34" charset="-122"/>
@@ -6177,13 +6159,18 @@
             </a:avLst>
           </a:prstGeom>
           <a:solidFill>
-            <a:srgbClr val="13283F"/>
+            <a:srgbClr val="FFFFFF"/>
           </a:solidFill>
-          <a:ln/>
+          <a:ln w="12700">
+            <a:solidFill>
+              <a:srgbClr val="E3D9CC"/>
+            </a:solidFill>
+            <a:prstDash val="solid"/>
+          </a:ln>
           <a:effectLst>
-            <a:outerShdw sx="100000" sy="100000" kx="0" ky="0" algn="bl" rotWithShape="0" blurRad="127000" dist="38100" dir="5400000">
-              <a:srgbClr val="000000">
-                <a:alpha val="28000"/>
+            <a:outerShdw sx="100000" sy="100000" kx="0" ky="0" algn="bl" rotWithShape="0" blurRad="114300" dist="38100" dir="5400000">
+              <a:srgbClr val="7A6A55">
+                <a:alpha val="12000"/>
               </a:srgbClr>
             </a:outerShdw>
           </a:effectLst>
@@ -6204,9 +6191,14 @@
             <a:avLst/>
           </a:prstGeom>
           <a:solidFill>
-            <a:srgbClr val="16314F"/>
+            <a:srgbClr val="EADFD0"/>
           </a:solidFill>
-          <a:ln/>
+          <a:ln w="9525">
+            <a:solidFill>
+              <a:srgbClr val="E3D9CC"/>
+            </a:solidFill>
+            <a:prstDash val="solid"/>
+          </a:ln>
         </p:spPr>
       </p:sp>
       <p:pic>
@@ -6260,11 +6252,11 @@
             <a:r>
               <a:rPr lang="en-US" sz="1900" b="1" dirty="0">
                 <a:solidFill>
-                  <a:srgbClr val="C9A961"/>
-                </a:solidFill>
-                <a:latin typeface="Bookman Old Style" pitchFamily="34" charset="0"/>
-                <a:ea typeface="Bookman Old Style" pitchFamily="34" charset="-122"/>
-                <a:cs typeface="Bookman Old Style" pitchFamily="34" charset="-120"/>
+                  <a:srgbClr val="B1937E"/>
+                </a:solidFill>
+                <a:latin typeface="Georgia" pitchFamily="34" charset="0"/>
+                <a:ea typeface="Georgia" pitchFamily="34" charset="-122"/>
+                <a:cs typeface="Georgia" pitchFamily="34" charset="-120"/>
               </a:rPr>
               <a:t>Oferece flexibilidade</a:t>
             </a:r>
@@ -6299,7 +6291,7 @@
             <a:r>
               <a:rPr lang="en-US" sz="1400" dirty="0">
                 <a:solidFill>
-                  <a:srgbClr val="9FB2C9"/>
+                  <a:srgbClr val="8A7E72"/>
                 </a:solidFill>
                 <a:latin typeface="Calibri" pitchFamily="34" charset="0"/>
                 <a:ea typeface="Calibri" pitchFamily="34" charset="-122"/>
@@ -6328,13 +6320,18 @@
             </a:avLst>
           </a:prstGeom>
           <a:solidFill>
-            <a:srgbClr val="13283F"/>
+            <a:srgbClr val="FFFFFF"/>
           </a:solidFill>
-          <a:ln/>
+          <a:ln w="12700">
+            <a:solidFill>
+              <a:srgbClr val="E3D9CC"/>
+            </a:solidFill>
+            <a:prstDash val="solid"/>
+          </a:ln>
           <a:effectLst>
-            <a:outerShdw sx="100000" sy="100000" kx="0" ky="0" algn="bl" rotWithShape="0" blurRad="127000" dist="38100" dir="5400000">
-              <a:srgbClr val="000000">
-                <a:alpha val="28000"/>
+            <a:outerShdw sx="100000" sy="100000" kx="0" ky="0" algn="bl" rotWithShape="0" blurRad="114300" dist="38100" dir="5400000">
+              <a:srgbClr val="7A6A55">
+                <a:alpha val="12000"/>
               </a:srgbClr>
             </a:outerShdw>
           </a:effectLst>
@@ -6355,9 +6352,14 @@
             <a:avLst/>
           </a:prstGeom>
           <a:solidFill>
-            <a:srgbClr val="16314F"/>
+            <a:srgbClr val="EADFD0"/>
           </a:solidFill>
-          <a:ln/>
+          <a:ln w="9525">
+            <a:solidFill>
+              <a:srgbClr val="E3D9CC"/>
+            </a:solidFill>
+            <a:prstDash val="solid"/>
+          </a:ln>
         </p:spPr>
       </p:sp>
       <p:pic>
@@ -6411,11 +6413,11 @@
             <a:r>
               <a:rPr lang="en-US" sz="1900" b="1" dirty="0">
                 <a:solidFill>
-                  <a:srgbClr val="C9A961"/>
-                </a:solidFill>
-                <a:latin typeface="Bookman Old Style" pitchFamily="34" charset="0"/>
-                <a:ea typeface="Bookman Old Style" pitchFamily="34" charset="-122"/>
-                <a:cs typeface="Bookman Old Style" pitchFamily="34" charset="-120"/>
+                  <a:srgbClr val="B1937E"/>
+                </a:solidFill>
+                <a:latin typeface="Georgia" pitchFamily="34" charset="0"/>
+                <a:ea typeface="Georgia" pitchFamily="34" charset="-122"/>
+                <a:cs typeface="Georgia" pitchFamily="34" charset="-120"/>
               </a:rPr>
               <a:t>Mantém-te firme</a:t>
             </a:r>
@@ -6450,7 +6452,7 @@
             <a:r>
               <a:rPr lang="en-US" sz="1400" dirty="0">
                 <a:solidFill>
-                  <a:srgbClr val="9FB2C9"/>
+                  <a:srgbClr val="8A7E72"/>
                 </a:solidFill>
                 <a:latin typeface="Calibri" pitchFamily="34" charset="0"/>
                 <a:ea typeface="Calibri" pitchFamily="34" charset="-122"/>
@@ -6479,7 +6481,7 @@
           <a:noFill/>
           <a:ln w="9525">
             <a:solidFill>
-              <a:srgbClr val="5C708A">
+              <a:srgbClr val="A89A86">
                 <a:alpha val="60000"/>
               </a:srgbClr>
             </a:solidFill>
@@ -6514,7 +6516,7 @@
             <a:r>
               <a:rPr lang="en-US" sz="900" dirty="0">
                 <a:solidFill>
-                  <a:srgbClr val="5C708A"/>
+                  <a:srgbClr val="A89A86"/>
                 </a:solidFill>
                 <a:latin typeface="Calibri" pitchFamily="34" charset="0"/>
                 <a:ea typeface="Calibri" pitchFamily="34" charset="-122"/>
@@ -6553,7 +6555,7 @@
             <a:r>
               <a:rPr lang="en-US" sz="900" dirty="0">
                 <a:solidFill>
-                  <a:srgbClr val="5C708A"/>
+                  <a:srgbClr val="A89A86"/>
                 </a:solidFill>
                 <a:latin typeface="Calibri" pitchFamily="34" charset="0"/>
                 <a:ea typeface="Calibri" pitchFamily="34" charset="-122"/>
@@ -6579,7 +6581,7 @@
     <p:bg>
       <p:bgPr>
         <a:solidFill>
-          <a:srgbClr val="0B1D33"/>
+          <a:srgbClr val="F8F6F3"/>
         </a:solidFill>
       </p:bgPr>
     </p:bg>
@@ -6624,7 +6626,7 @@
             <a:r>
               <a:rPr lang="en-US" sz="1200" b="1" spc="300" kern="0" dirty="0">
                 <a:solidFill>
-                  <a:srgbClr val="4A9EFF"/>
+                  <a:srgbClr val="9A7B66"/>
                 </a:solidFill>
                 <a:latin typeface="Calibri" pitchFamily="34" charset="0"/>
                 <a:ea typeface="Calibri" pitchFamily="34" charset="-122"/>
@@ -6666,11 +6668,11 @@
             <a:r>
               <a:rPr lang="en-US" sz="3200" b="1" dirty="0">
                 <a:solidFill>
-                  <a:srgbClr val="EAF1FA"/>
-                </a:solidFill>
-                <a:latin typeface="Bookman Old Style" pitchFamily="34" charset="0"/>
-                <a:ea typeface="Bookman Old Style" pitchFamily="34" charset="-122"/>
-                <a:cs typeface="Bookman Old Style" pitchFamily="34" charset="-120"/>
+                  <a:srgbClr val="33302B"/>
+                </a:solidFill>
+                <a:latin typeface="Georgia" pitchFamily="34" charset="0"/>
+                <a:ea typeface="Georgia" pitchFamily="34" charset="-122"/>
+                <a:cs typeface="Georgia" pitchFamily="34" charset="-120"/>
               </a:rPr>
               <a:t>Porque descontar te custa caro</a:t>
             </a:r>
@@ -6695,13 +6697,18 @@
             </a:avLst>
           </a:prstGeom>
           <a:solidFill>
-            <a:srgbClr val="13283F"/>
+            <a:srgbClr val="FFFFFF"/>
           </a:solidFill>
-          <a:ln/>
+          <a:ln w="12700">
+            <a:solidFill>
+              <a:srgbClr val="E3D9CC"/>
+            </a:solidFill>
+            <a:prstDash val="solid"/>
+          </a:ln>
           <a:effectLst>
-            <a:outerShdw sx="100000" sy="100000" kx="0" ky="0" algn="bl" rotWithShape="0" blurRad="127000" dist="38100" dir="5400000">
-              <a:srgbClr val="000000">
-                <a:alpha val="28000"/>
+            <a:outerShdw sx="100000" sy="100000" kx="0" ky="0" algn="bl" rotWithShape="0" blurRad="114300" dist="38100" dir="5400000">
+              <a:srgbClr val="7A6A55">
+                <a:alpha val="12000"/>
               </a:srgbClr>
             </a:outerShdw>
           </a:effectLst>
@@ -6734,11 +6741,11 @@
             <a:r>
               <a:rPr lang="en-US" sz="4600" b="1" dirty="0">
                 <a:solidFill>
-                  <a:srgbClr val="C9A961"/>
-                </a:solidFill>
-                <a:latin typeface="Bookman Old Style" pitchFamily="34" charset="0"/>
-                <a:ea typeface="Bookman Old Style" pitchFamily="34" charset="-122"/>
-                <a:cs typeface="Bookman Old Style" pitchFamily="34" charset="-120"/>
+                  <a:srgbClr val="B1937E"/>
+                </a:solidFill>
+                <a:latin typeface="Georgia" pitchFamily="34" charset="0"/>
+                <a:ea typeface="Georgia" pitchFamily="34" charset="-122"/>
+                <a:cs typeface="Georgia" pitchFamily="34" charset="-120"/>
               </a:rPr>
               <a:t>1×</a:t>
             </a:r>
@@ -6773,7 +6780,7 @@
             <a:r>
               <a:rPr lang="en-US" sz="1500" b="1" dirty="0">
                 <a:solidFill>
-                  <a:srgbClr val="EAF1FA"/>
+                  <a:srgbClr val="33302B"/>
                 </a:solidFill>
                 <a:latin typeface="Calibri" pitchFamily="34" charset="0"/>
                 <a:ea typeface="Calibri" pitchFamily="34" charset="-122"/>
@@ -6802,7 +6809,7 @@
           <a:noFill/>
           <a:ln w="9525">
             <a:solidFill>
-              <a:srgbClr val="5C708A">
+              <a:srgbClr val="A89A86">
                 <a:alpha val="60000"/>
               </a:srgbClr>
             </a:solidFill>
@@ -6837,7 +6844,7 @@
             <a:r>
               <a:rPr lang="en-US" sz="1300" dirty="0">
                 <a:solidFill>
-                  <a:srgbClr val="9FB2C9"/>
+                  <a:srgbClr val="8A7E72"/>
                 </a:solidFill>
                 <a:latin typeface="Calibri" pitchFamily="34" charset="0"/>
                 <a:ea typeface="Calibri" pitchFamily="34" charset="-122"/>
@@ -6866,13 +6873,18 @@
             </a:avLst>
           </a:prstGeom>
           <a:solidFill>
-            <a:srgbClr val="13283F"/>
+            <a:srgbClr val="FFFFFF"/>
           </a:solidFill>
-          <a:ln/>
+          <a:ln w="12700">
+            <a:solidFill>
+              <a:srgbClr val="E3D9CC"/>
+            </a:solidFill>
+            <a:prstDash val="solid"/>
+          </a:ln>
           <a:effectLst>
-            <a:outerShdw sx="100000" sy="100000" kx="0" ky="0" algn="bl" rotWithShape="0" blurRad="127000" dist="38100" dir="5400000">
-              <a:srgbClr val="000000">
-                <a:alpha val="28000"/>
+            <a:outerShdw sx="100000" sy="100000" kx="0" ky="0" algn="bl" rotWithShape="0" blurRad="114300" dist="38100" dir="5400000">
+              <a:srgbClr val="7A6A55">
+                <a:alpha val="12000"/>
               </a:srgbClr>
             </a:outerShdw>
           </a:effectLst>
@@ -6905,11 +6917,11 @@
             <a:r>
               <a:rPr lang="en-US" sz="4600" b="1" dirty="0">
                 <a:solidFill>
-                  <a:srgbClr val="4A9EFF"/>
-                </a:solidFill>
-                <a:latin typeface="Bookman Old Style" pitchFamily="34" charset="0"/>
-                <a:ea typeface="Bookman Old Style" pitchFamily="34" charset="-122"/>
-                <a:cs typeface="Bookman Old Style" pitchFamily="34" charset="-120"/>
+                  <a:srgbClr val="9A7B66"/>
+                </a:solidFill>
+                <a:latin typeface="Georgia" pitchFamily="34" charset="0"/>
+                <a:ea typeface="Georgia" pitchFamily="34" charset="-122"/>
+                <a:cs typeface="Georgia" pitchFamily="34" charset="-120"/>
               </a:rPr>
               <a:t>-margem</a:t>
             </a:r>
@@ -6944,7 +6956,7 @@
             <a:r>
               <a:rPr lang="en-US" sz="1500" b="1" dirty="0">
                 <a:solidFill>
-                  <a:srgbClr val="EAF1FA"/>
+                  <a:srgbClr val="33302B"/>
                 </a:solidFill>
                 <a:latin typeface="Calibri" pitchFamily="34" charset="0"/>
                 <a:ea typeface="Calibri" pitchFamily="34" charset="-122"/>
@@ -6973,7 +6985,7 @@
           <a:noFill/>
           <a:ln w="9525">
             <a:solidFill>
-              <a:srgbClr val="5C708A">
+              <a:srgbClr val="A89A86">
                 <a:alpha val="60000"/>
               </a:srgbClr>
             </a:solidFill>
@@ -7008,7 +7020,7 @@
             <a:r>
               <a:rPr lang="en-US" sz="1300" dirty="0">
                 <a:solidFill>
-                  <a:srgbClr val="9FB2C9"/>
+                  <a:srgbClr val="8A7E72"/>
                 </a:solidFill>
                 <a:latin typeface="Calibri" pitchFamily="34" charset="0"/>
                 <a:ea typeface="Calibri" pitchFamily="34" charset="-122"/>
@@ -7037,13 +7049,18 @@
             </a:avLst>
           </a:prstGeom>
           <a:solidFill>
-            <a:srgbClr val="13283F"/>
+            <a:srgbClr val="FFFFFF"/>
           </a:solidFill>
-          <a:ln/>
+          <a:ln w="12700">
+            <a:solidFill>
+              <a:srgbClr val="E3D9CC"/>
+            </a:solidFill>
+            <a:prstDash val="solid"/>
+          </a:ln>
           <a:effectLst>
-            <a:outerShdw sx="100000" sy="100000" kx="0" ky="0" algn="bl" rotWithShape="0" blurRad="127000" dist="38100" dir="5400000">
-              <a:srgbClr val="000000">
-                <a:alpha val="28000"/>
+            <a:outerShdw sx="100000" sy="100000" kx="0" ky="0" algn="bl" rotWithShape="0" blurRad="114300" dist="38100" dir="5400000">
+              <a:srgbClr val="7A6A55">
+                <a:alpha val="12000"/>
               </a:srgbClr>
             </a:outerShdw>
           </a:effectLst>
@@ -7076,11 +7093,11 @@
             <a:r>
               <a:rPr lang="en-US" sz="4600" b="1" dirty="0">
                 <a:solidFill>
-                  <a:srgbClr val="4A9EFF"/>
-                </a:solidFill>
-                <a:latin typeface="Bookman Old Style" pitchFamily="34" charset="0"/>
-                <a:ea typeface="Bookman Old Style" pitchFamily="34" charset="-122"/>
-                <a:cs typeface="Bookman Old Style" pitchFamily="34" charset="-120"/>
+                  <a:srgbClr val="9A7B66"/>
+                </a:solidFill>
+                <a:latin typeface="Georgia" pitchFamily="34" charset="0"/>
+                <a:ea typeface="Georgia" pitchFamily="34" charset="-122"/>
+                <a:cs typeface="Georgia" pitchFamily="34" charset="-120"/>
               </a:rPr>
               <a:t>-valor</a:t>
             </a:r>
@@ -7115,7 +7132,7 @@
             <a:r>
               <a:rPr lang="en-US" sz="1500" b="1" dirty="0">
                 <a:solidFill>
-                  <a:srgbClr val="EAF1FA"/>
+                  <a:srgbClr val="33302B"/>
                 </a:solidFill>
                 <a:latin typeface="Calibri" pitchFamily="34" charset="0"/>
                 <a:ea typeface="Calibri" pitchFamily="34" charset="-122"/>
@@ -7144,7 +7161,7 @@
           <a:noFill/>
           <a:ln w="9525">
             <a:solidFill>
-              <a:srgbClr val="5C708A">
+              <a:srgbClr val="A89A86">
                 <a:alpha val="60000"/>
               </a:srgbClr>
             </a:solidFill>
@@ -7179,7 +7196,7 @@
             <a:r>
               <a:rPr lang="en-US" sz="1300" dirty="0">
                 <a:solidFill>
-                  <a:srgbClr val="9FB2C9"/>
+                  <a:srgbClr val="8A7E72"/>
                 </a:solidFill>
                 <a:latin typeface="Calibri" pitchFamily="34" charset="0"/>
                 <a:ea typeface="Calibri" pitchFamily="34" charset="-122"/>
@@ -7218,7 +7235,7 @@
             <a:r>
               <a:rPr lang="en-US" sz="1500" i="1" dirty="0">
                 <a:solidFill>
-                  <a:srgbClr val="C9A961"/>
+                  <a:srgbClr val="B1937E"/>
                 </a:solidFill>
                 <a:latin typeface="Calibri" pitchFamily="34" charset="0"/>
                 <a:ea typeface="Calibri" pitchFamily="34" charset="-122"/>
@@ -7247,7 +7264,7 @@
           <a:noFill/>
           <a:ln w="9525">
             <a:solidFill>
-              <a:srgbClr val="5C708A">
+              <a:srgbClr val="A89A86">
                 <a:alpha val="60000"/>
               </a:srgbClr>
             </a:solidFill>
@@ -7282,7 +7299,7 @@
             <a:r>
               <a:rPr lang="en-US" sz="900" dirty="0">
                 <a:solidFill>
-                  <a:srgbClr val="5C708A"/>
+                  <a:srgbClr val="A89A86"/>
                 </a:solidFill>
                 <a:latin typeface="Calibri" pitchFamily="34" charset="0"/>
                 <a:ea typeface="Calibri" pitchFamily="34" charset="-122"/>
@@ -7321,7 +7338,7 @@
             <a:r>
               <a:rPr lang="en-US" sz="900" dirty="0">
                 <a:solidFill>
-                  <a:srgbClr val="5C708A"/>
+                  <a:srgbClr val="A89A86"/>
                 </a:solidFill>
                 <a:latin typeface="Calibri" pitchFamily="34" charset="0"/>
                 <a:ea typeface="Calibri" pitchFamily="34" charset="-122"/>
@@ -7347,7 +7364,7 @@
     <p:bg>
       <p:bgPr>
         <a:solidFill>
-          <a:srgbClr val="0B1D33"/>
+          <a:srgbClr val="F8F6F3"/>
         </a:solidFill>
       </p:bgPr>
     </p:bg>
@@ -7392,7 +7409,7 @@
             <a:r>
               <a:rPr lang="en-US" sz="1200" b="1" spc="300" kern="0" dirty="0">
                 <a:solidFill>
-                  <a:srgbClr val="4A9EFF"/>
+                  <a:srgbClr val="9A7B66"/>
                 </a:solidFill>
                 <a:latin typeface="Calibri" pitchFamily="34" charset="0"/>
                 <a:ea typeface="Calibri" pitchFamily="34" charset="-122"/>
@@ -7434,11 +7451,11 @@
             <a:r>
               <a:rPr lang="en-US" sz="3200" b="1" dirty="0">
                 <a:solidFill>
-                  <a:srgbClr val="EAF1FA"/>
-                </a:solidFill>
-                <a:latin typeface="Bookman Old Style" pitchFamily="34" charset="0"/>
-                <a:ea typeface="Bookman Old Style" pitchFamily="34" charset="-122"/>
-                <a:cs typeface="Bookman Old Style" pitchFamily="34" charset="-120"/>
+                  <a:srgbClr val="33302B"/>
+                </a:solidFill>
+                <a:latin typeface="Georgia" pitchFamily="34" charset="0"/>
+                <a:ea typeface="Georgia" pitchFamily="34" charset="-122"/>
+                <a:cs typeface="Georgia" pitchFamily="34" charset="-120"/>
               </a:rPr>
               <a:t>Erros comuns no pricing</a:t>
             </a:r>
@@ -7463,13 +7480,18 @@
             </a:avLst>
           </a:prstGeom>
           <a:solidFill>
-            <a:srgbClr val="13283F"/>
+            <a:srgbClr val="FFFFFF"/>
           </a:solidFill>
-          <a:ln/>
+          <a:ln w="12700">
+            <a:solidFill>
+              <a:srgbClr val="E3D9CC"/>
+            </a:solidFill>
+            <a:prstDash val="solid"/>
+          </a:ln>
           <a:effectLst>
-            <a:outerShdw sx="100000" sy="100000" kx="0" ky="0" algn="bl" rotWithShape="0" blurRad="127000" dist="38100" dir="5400000">
-              <a:srgbClr val="000000">
-                <a:alpha val="28000"/>
+            <a:outerShdw sx="100000" sy="100000" kx="0" ky="0" algn="bl" rotWithShape="0" blurRad="114300" dist="38100" dir="5400000">
+              <a:srgbClr val="7A6A55">
+                <a:alpha val="12000"/>
               </a:srgbClr>
             </a:outerShdw>
           </a:effectLst>
@@ -7490,9 +7512,14 @@
             <a:avLst/>
           </a:prstGeom>
           <a:solidFill>
-            <a:srgbClr val="16314F"/>
+            <a:srgbClr val="EADFD0"/>
           </a:solidFill>
-          <a:ln/>
+          <a:ln w="9525">
+            <a:solidFill>
+              <a:srgbClr val="E3D9CC"/>
+            </a:solidFill>
+            <a:prstDash val="solid"/>
+          </a:ln>
         </p:spPr>
       </p:sp>
       <p:pic>
@@ -7546,11 +7573,11 @@
             <a:r>
               <a:rPr lang="en-US" sz="1800" b="1" dirty="0">
                 <a:solidFill>
-                  <a:srgbClr val="C9A961"/>
-                </a:solidFill>
-                <a:latin typeface="Bookman Old Style" pitchFamily="34" charset="0"/>
-                <a:ea typeface="Bookman Old Style" pitchFamily="34" charset="-122"/>
-                <a:cs typeface="Bookman Old Style" pitchFamily="34" charset="-120"/>
+                  <a:srgbClr val="B1937E"/>
+                </a:solidFill>
+                <a:latin typeface="Georgia" pitchFamily="34" charset="0"/>
+                <a:ea typeface="Georgia" pitchFamily="34" charset="-122"/>
+                <a:cs typeface="Georgia" pitchFamily="34" charset="-120"/>
               </a:rPr>
               <a:t>Preço único</a:t>
             </a:r>
@@ -7585,7 +7612,7 @@
             <a:r>
               <a:rPr lang="en-US" sz="1350" dirty="0">
                 <a:solidFill>
-                  <a:srgbClr val="9FB2C9"/>
+                  <a:srgbClr val="8A7E72"/>
                 </a:solidFill>
                 <a:latin typeface="Calibri" pitchFamily="34" charset="0"/>
                 <a:ea typeface="Calibri" pitchFamily="34" charset="-122"/>
@@ -7614,13 +7641,18 @@
             </a:avLst>
           </a:prstGeom>
           <a:solidFill>
-            <a:srgbClr val="13283F"/>
+            <a:srgbClr val="FFFFFF"/>
           </a:solidFill>
-          <a:ln/>
+          <a:ln w="12700">
+            <a:solidFill>
+              <a:srgbClr val="E3D9CC"/>
+            </a:solidFill>
+            <a:prstDash val="solid"/>
+          </a:ln>
           <a:effectLst>
-            <a:outerShdw sx="100000" sy="100000" kx="0" ky="0" algn="bl" rotWithShape="0" blurRad="127000" dist="38100" dir="5400000">
-              <a:srgbClr val="000000">
-                <a:alpha val="28000"/>
+            <a:outerShdw sx="100000" sy="100000" kx="0" ky="0" algn="bl" rotWithShape="0" blurRad="114300" dist="38100" dir="5400000">
+              <a:srgbClr val="7A6A55">
+                <a:alpha val="12000"/>
               </a:srgbClr>
             </a:outerShdw>
           </a:effectLst>
@@ -7641,9 +7673,14 @@
             <a:avLst/>
           </a:prstGeom>
           <a:solidFill>
-            <a:srgbClr val="16314F"/>
+            <a:srgbClr val="EADFD0"/>
           </a:solidFill>
-          <a:ln/>
+          <a:ln w="9525">
+            <a:solidFill>
+              <a:srgbClr val="E3D9CC"/>
+            </a:solidFill>
+            <a:prstDash val="solid"/>
+          </a:ln>
         </p:spPr>
       </p:sp>
       <p:pic>
@@ -7697,11 +7734,11 @@
             <a:r>
               <a:rPr lang="en-US" sz="1800" b="1" dirty="0">
                 <a:solidFill>
-                  <a:srgbClr val="C9A961"/>
-                </a:solidFill>
-                <a:latin typeface="Bookman Old Style" pitchFamily="34" charset="0"/>
-                <a:ea typeface="Bookman Old Style" pitchFamily="34" charset="-122"/>
-                <a:cs typeface="Bookman Old Style" pitchFamily="34" charset="-120"/>
+                  <a:srgbClr val="B1937E"/>
+                </a:solidFill>
+                <a:latin typeface="Georgia" pitchFamily="34" charset="0"/>
+                <a:ea typeface="Georgia" pitchFamily="34" charset="-122"/>
+                <a:cs typeface="Georgia" pitchFamily="34" charset="-120"/>
               </a:rPr>
               <a:t>Preço antes do valor</a:t>
             </a:r>
@@ -7736,7 +7773,7 @@
             <a:r>
               <a:rPr lang="en-US" sz="1350" dirty="0">
                 <a:solidFill>
-                  <a:srgbClr val="9FB2C9"/>
+                  <a:srgbClr val="8A7E72"/>
                 </a:solidFill>
                 <a:latin typeface="Calibri" pitchFamily="34" charset="0"/>
                 <a:ea typeface="Calibri" pitchFamily="34" charset="-122"/>
@@ -7765,13 +7802,18 @@
             </a:avLst>
           </a:prstGeom>
           <a:solidFill>
-            <a:srgbClr val="13283F"/>
+            <a:srgbClr val="FFFFFF"/>
           </a:solidFill>
-          <a:ln/>
+          <a:ln w="12700">
+            <a:solidFill>
+              <a:srgbClr val="E3D9CC"/>
+            </a:solidFill>
+            <a:prstDash val="solid"/>
+          </a:ln>
           <a:effectLst>
-            <a:outerShdw sx="100000" sy="100000" kx="0" ky="0" algn="bl" rotWithShape="0" blurRad="127000" dist="38100" dir="5400000">
-              <a:srgbClr val="000000">
-                <a:alpha val="28000"/>
+            <a:outerShdw sx="100000" sy="100000" kx="0" ky="0" algn="bl" rotWithShape="0" blurRad="114300" dist="38100" dir="5400000">
+              <a:srgbClr val="7A6A55">
+                <a:alpha val="12000"/>
               </a:srgbClr>
             </a:outerShdw>
           </a:effectLst>
@@ -7792,9 +7834,14 @@
             <a:avLst/>
           </a:prstGeom>
           <a:solidFill>
-            <a:srgbClr val="16314F"/>
+            <a:srgbClr val="EADFD0"/>
           </a:solidFill>
-          <a:ln/>
+          <a:ln w="9525">
+            <a:solidFill>
+              <a:srgbClr val="E3D9CC"/>
+            </a:solidFill>
+            <a:prstDash val="solid"/>
+          </a:ln>
         </p:spPr>
       </p:sp>
       <p:pic>
@@ -7848,11 +7895,11 @@
             <a:r>
               <a:rPr lang="en-US" sz="1800" b="1" dirty="0">
                 <a:solidFill>
-                  <a:srgbClr val="C9A961"/>
-                </a:solidFill>
-                <a:latin typeface="Bookman Old Style" pitchFamily="34" charset="0"/>
-                <a:ea typeface="Bookman Old Style" pitchFamily="34" charset="-122"/>
-                <a:cs typeface="Bookman Old Style" pitchFamily="34" charset="-120"/>
+                  <a:srgbClr val="B1937E"/>
+                </a:solidFill>
+                <a:latin typeface="Georgia" pitchFamily="34" charset="0"/>
+                <a:ea typeface="Georgia" pitchFamily="34" charset="-122"/>
+                <a:cs typeface="Georgia" pitchFamily="34" charset="-120"/>
               </a:rPr>
               <a:t>Proposta por email seco</a:t>
             </a:r>
@@ -7887,7 +7934,7 @@
             <a:r>
               <a:rPr lang="en-US" sz="1350" dirty="0">
                 <a:solidFill>
-                  <a:srgbClr val="9FB2C9"/>
+                  <a:srgbClr val="8A7E72"/>
                 </a:solidFill>
                 <a:latin typeface="Calibri" pitchFamily="34" charset="0"/>
                 <a:ea typeface="Calibri" pitchFamily="34" charset="-122"/>
@@ -7916,13 +7963,18 @@
             </a:avLst>
           </a:prstGeom>
           <a:solidFill>
-            <a:srgbClr val="13283F"/>
+            <a:srgbClr val="FFFFFF"/>
           </a:solidFill>
-          <a:ln/>
+          <a:ln w="12700">
+            <a:solidFill>
+              <a:srgbClr val="E3D9CC"/>
+            </a:solidFill>
+            <a:prstDash val="solid"/>
+          </a:ln>
           <a:effectLst>
-            <a:outerShdw sx="100000" sy="100000" kx="0" ky="0" algn="bl" rotWithShape="0" blurRad="127000" dist="38100" dir="5400000">
-              <a:srgbClr val="000000">
-                <a:alpha val="28000"/>
+            <a:outerShdw sx="100000" sy="100000" kx="0" ky="0" algn="bl" rotWithShape="0" blurRad="114300" dist="38100" dir="5400000">
+              <a:srgbClr val="7A6A55">
+                <a:alpha val="12000"/>
               </a:srgbClr>
             </a:outerShdw>
           </a:effectLst>
@@ -7943,9 +7995,14 @@
             <a:avLst/>
           </a:prstGeom>
           <a:solidFill>
-            <a:srgbClr val="16314F"/>
+            <a:srgbClr val="EADFD0"/>
           </a:solidFill>
-          <a:ln/>
+          <a:ln w="9525">
+            <a:solidFill>
+              <a:srgbClr val="E3D9CC"/>
+            </a:solidFill>
+            <a:prstDash val="solid"/>
+          </a:ln>
         </p:spPr>
       </p:sp>
       <p:pic>
@@ -7999,11 +8056,11 @@
             <a:r>
               <a:rPr lang="en-US" sz="1800" b="1" dirty="0">
                 <a:solidFill>
-                  <a:srgbClr val="C9A961"/>
-                </a:solidFill>
-                <a:latin typeface="Bookman Old Style" pitchFamily="34" charset="0"/>
-                <a:ea typeface="Bookman Old Style" pitchFamily="34" charset="-122"/>
-                <a:cs typeface="Bookman Old Style" pitchFamily="34" charset="-120"/>
+                  <a:srgbClr val="B1937E"/>
+                </a:solidFill>
+                <a:latin typeface="Georgia" pitchFamily="34" charset="0"/>
+                <a:ea typeface="Georgia" pitchFamily="34" charset="-122"/>
+                <a:cs typeface="Georgia" pitchFamily="34" charset="-120"/>
               </a:rPr>
               <a:t>Descontar à primeira</a:t>
             </a:r>
@@ -8038,7 +8095,7 @@
             <a:r>
               <a:rPr lang="en-US" sz="1350" dirty="0">
                 <a:solidFill>
-                  <a:srgbClr val="9FB2C9"/>
+                  <a:srgbClr val="8A7E72"/>
                 </a:solidFill>
                 <a:latin typeface="Calibri" pitchFamily="34" charset="0"/>
                 <a:ea typeface="Calibri" pitchFamily="34" charset="-122"/>
@@ -8067,7 +8124,7 @@
           <a:noFill/>
           <a:ln w="9525">
             <a:solidFill>
-              <a:srgbClr val="5C708A">
+              <a:srgbClr val="A89A86">
                 <a:alpha val="60000"/>
               </a:srgbClr>
             </a:solidFill>
@@ -8102,7 +8159,7 @@
             <a:r>
               <a:rPr lang="en-US" sz="900" dirty="0">
                 <a:solidFill>
-                  <a:srgbClr val="5C708A"/>
+                  <a:srgbClr val="A89A86"/>
                 </a:solidFill>
                 <a:latin typeface="Calibri" pitchFamily="34" charset="0"/>
                 <a:ea typeface="Calibri" pitchFamily="34" charset="-122"/>
@@ -8141,7 +8198,7 @@
             <a:r>
               <a:rPr lang="en-US" sz="900" dirty="0">
                 <a:solidFill>
-                  <a:srgbClr val="5C708A"/>
+                  <a:srgbClr val="A89A86"/>
                 </a:solidFill>
                 <a:latin typeface="Calibri" pitchFamily="34" charset="0"/>
                 <a:ea typeface="Calibri" pitchFamily="34" charset="-122"/>
@@ -8167,7 +8224,7 @@
     <p:bg>
       <p:bgPr>
         <a:solidFill>
-          <a:srgbClr val="0B1D33"/>
+          <a:srgbClr val="F8F6F3"/>
         </a:solidFill>
       </p:bgPr>
     </p:bg>
@@ -8187,51 +8244,7 @@
       </p:grpSpPr>
       <p:sp>
         <p:nvSpPr>
-          <p:cNvPr id="2" name="Shape 0"/>
-          <p:cNvSpPr/>
-          <p:nvPr/>
-        </p:nvSpPr>
-        <p:spPr>
-          <a:xfrm>
-            <a:off x="7772400" y="-1371600"/>
-            <a:ext cx="5486400" cy="5486400"/>
-          </a:xfrm>
-          <a:prstGeom prst="ellipse">
-            <a:avLst/>
-          </a:prstGeom>
-          <a:solidFill>
-            <a:srgbClr val="4A9EFF">
-              <a:alpha val="10000"/>
-            </a:srgbClr>
-          </a:solidFill>
-          <a:ln/>
-        </p:spPr>
-      </p:sp>
-      <p:sp>
-        <p:nvSpPr>
-          <p:cNvPr id="3" name="Shape 1"/>
-          <p:cNvSpPr/>
-          <p:nvPr/>
-        </p:nvSpPr>
-        <p:spPr>
-          <a:xfrm>
-            <a:off x="-1371600" y="4114800"/>
-            <a:ext cx="4572000" cy="4572000"/>
-          </a:xfrm>
-          <a:prstGeom prst="ellipse">
-            <a:avLst/>
-          </a:prstGeom>
-          <a:solidFill>
-            <a:srgbClr val="C9A961">
-              <a:alpha val="8000"/>
-            </a:srgbClr>
-          </a:solidFill>
-          <a:ln/>
-        </p:spPr>
-      </p:sp>
-      <p:sp>
-        <p:nvSpPr>
-          <p:cNvPr id="4" name="Text 2"/>
+          <p:cNvPr id="2" name="Text 0"/>
           <p:cNvSpPr/>
           <p:nvPr/>
         </p:nvSpPr>
@@ -8256,11 +8269,11 @@
             <a:r>
               <a:rPr lang="en-US" sz="15000" b="1" dirty="0">
                 <a:solidFill>
-                  <a:srgbClr val="16314F"/>
-                </a:solidFill>
-                <a:latin typeface="Bookman Old Style" pitchFamily="34" charset="0"/>
-                <a:ea typeface="Bookman Old Style" pitchFamily="34" charset="-122"/>
-                <a:cs typeface="Bookman Old Style" pitchFamily="34" charset="-120"/>
+                  <a:srgbClr val="EADFD0"/>
+                </a:solidFill>
+                <a:latin typeface="Georgia" pitchFamily="34" charset="0"/>
+                <a:ea typeface="Georgia" pitchFamily="34" charset="-122"/>
+                <a:cs typeface="Georgia" pitchFamily="34" charset="-120"/>
               </a:rPr>
               <a:t>C</a:t>
             </a:r>
@@ -8270,7 +8283,7 @@
       </p:sp>
       <p:sp>
         <p:nvSpPr>
-          <p:cNvPr id="5" name="Text 3"/>
+          <p:cNvPr id="3" name="Text 1"/>
           <p:cNvSpPr/>
           <p:nvPr/>
         </p:nvSpPr>
@@ -8295,7 +8308,7 @@
             <a:r>
               <a:rPr lang="en-US" sz="1300" b="1" spc="400" kern="0" dirty="0">
                 <a:solidFill>
-                  <a:srgbClr val="C9A961"/>
+                  <a:srgbClr val="B1937E"/>
                 </a:solidFill>
                 <a:latin typeface="Calibri" pitchFamily="34" charset="0"/>
                 <a:ea typeface="Calibri" pitchFamily="34" charset="-122"/>
@@ -8309,7 +8322,7 @@
       </p:sp>
       <p:sp>
         <p:nvSpPr>
-          <p:cNvPr id="6" name="Text 4"/>
+          <p:cNvPr id="4" name="Text 2"/>
           <p:cNvSpPr/>
           <p:nvPr/>
         </p:nvSpPr>
@@ -8335,23 +8348,23 @@
               <a:buNone/>
             </a:pPr>
             <a:r>
-              <a:rPr lang="en-US" sz="4400" b="1" dirty="0">
-                <a:solidFill>
-                  <a:srgbClr val="EAF1FA"/>
-                </a:solidFill>
-                <a:latin typeface="Bookman Old Style" pitchFamily="34" charset="0"/>
-                <a:ea typeface="Bookman Old Style" pitchFamily="34" charset="-122"/>
-                <a:cs typeface="Bookman Old Style" pitchFamily="34" charset="-120"/>
+              <a:rPr lang="en-US" sz="4000" b="1" dirty="0">
+                <a:solidFill>
+                  <a:srgbClr val="33302B"/>
+                </a:solidFill>
+                <a:latin typeface="Georgia" pitchFamily="34" charset="0"/>
+                <a:ea typeface="Georgia" pitchFamily="34" charset="-122"/>
+                <a:cs typeface="Georgia" pitchFamily="34" charset="-120"/>
               </a:rPr>
               <a:t>O Trabalho desta Semana</a:t>
             </a:r>
-            <a:endParaRPr lang="en-US" sz="4400" dirty="0"/>
-          </a:p>
-        </p:txBody>
-      </p:sp>
-      <p:sp>
-        <p:nvSpPr>
-          <p:cNvPr id="7" name="Text 5"/>
+            <a:endParaRPr lang="en-US" sz="4000" dirty="0"/>
+          </a:p>
+        </p:txBody>
+      </p:sp>
+      <p:sp>
+        <p:nvSpPr>
+          <p:cNvPr id="5" name="Text 3"/>
           <p:cNvSpPr/>
           <p:nvPr/>
         </p:nvSpPr>
@@ -8376,7 +8389,7 @@
             <a:r>
               <a:rPr lang="en-US" sz="1600" dirty="0">
                 <a:solidFill>
-                  <a:srgbClr val="9FB2C9"/>
+                  <a:srgbClr val="8A7E72"/>
                 </a:solidFill>
                 <a:latin typeface="Calibri" pitchFamily="34" charset="0"/>
                 <a:ea typeface="Calibri" pitchFamily="34" charset="-122"/>
@@ -8390,7 +8403,7 @@
       </p:sp>
       <p:sp>
         <p:nvSpPr>
-          <p:cNvPr id="8" name="Shape 6"/>
+          <p:cNvPr id="6" name="Shape 4"/>
           <p:cNvSpPr/>
           <p:nvPr/>
         </p:nvSpPr>
@@ -8405,7 +8418,7 @@
           <a:noFill/>
           <a:ln w="9525">
             <a:solidFill>
-              <a:srgbClr val="5C708A">
+              <a:srgbClr val="A89A86">
                 <a:alpha val="60000"/>
               </a:srgbClr>
             </a:solidFill>
@@ -8415,7 +8428,7 @@
       </p:sp>
       <p:sp>
         <p:nvSpPr>
-          <p:cNvPr id="9" name="Text 7"/>
+          <p:cNvPr id="7" name="Text 5"/>
           <p:cNvSpPr/>
           <p:nvPr/>
         </p:nvSpPr>
@@ -8440,7 +8453,7 @@
             <a:r>
               <a:rPr lang="en-US" sz="900" dirty="0">
                 <a:solidFill>
-                  <a:srgbClr val="5C708A"/>
+                  <a:srgbClr val="A89A86"/>
                 </a:solidFill>
                 <a:latin typeface="Calibri" pitchFamily="34" charset="0"/>
                 <a:ea typeface="Calibri" pitchFamily="34" charset="-122"/>
@@ -8454,7 +8467,7 @@
       </p:sp>
       <p:sp>
         <p:nvSpPr>
-          <p:cNvPr id="10" name="Text 8"/>
+          <p:cNvPr id="8" name="Text 6"/>
           <p:cNvSpPr/>
           <p:nvPr/>
         </p:nvSpPr>
@@ -8479,7 +8492,7 @@
             <a:r>
               <a:rPr lang="en-US" sz="900" dirty="0">
                 <a:solidFill>
-                  <a:srgbClr val="5C708A"/>
+                  <a:srgbClr val="A89A86"/>
                 </a:solidFill>
                 <a:latin typeface="Calibri" pitchFamily="34" charset="0"/>
                 <a:ea typeface="Calibri" pitchFamily="34" charset="-122"/>
@@ -8505,7 +8518,7 @@
     <p:bg>
       <p:bgPr>
         <a:solidFill>
-          <a:srgbClr val="0B1D33"/>
+          <a:srgbClr val="F8F6F3"/>
         </a:solidFill>
       </p:bgPr>
     </p:bg>
@@ -8550,7 +8563,7 @@
             <a:r>
               <a:rPr lang="en-US" sz="1200" b="1" spc="300" kern="0" dirty="0">
                 <a:solidFill>
-                  <a:srgbClr val="4A9EFF"/>
+                  <a:srgbClr val="9A7B66"/>
                 </a:solidFill>
                 <a:latin typeface="Calibri" pitchFamily="34" charset="0"/>
                 <a:ea typeface="Calibri" pitchFamily="34" charset="-122"/>
@@ -8592,11 +8605,11 @@
             <a:r>
               <a:rPr lang="en-US" sz="3400" b="1" dirty="0">
                 <a:solidFill>
-                  <a:srgbClr val="EAF1FA"/>
-                </a:solidFill>
-                <a:latin typeface="Bookman Old Style" pitchFamily="34" charset="0"/>
-                <a:ea typeface="Bookman Old Style" pitchFamily="34" charset="-122"/>
-                <a:cs typeface="Bookman Old Style" pitchFamily="34" charset="-120"/>
+                  <a:srgbClr val="33302B"/>
+                </a:solidFill>
+                <a:latin typeface="Georgia" pitchFamily="34" charset="0"/>
+                <a:ea typeface="Georgia" pitchFamily="34" charset="-122"/>
+                <a:cs typeface="Georgia" pitchFamily="34" charset="-120"/>
               </a:rPr>
               <a:t>Três peças, preço cheio</a:t>
             </a:r>
@@ -8621,13 +8634,18 @@
             </a:avLst>
           </a:prstGeom>
           <a:solidFill>
-            <a:srgbClr val="13283F"/>
+            <a:srgbClr val="FFFFFF"/>
           </a:solidFill>
-          <a:ln/>
+          <a:ln w="12700">
+            <a:solidFill>
+              <a:srgbClr val="E3D9CC"/>
+            </a:solidFill>
+            <a:prstDash val="solid"/>
+          </a:ln>
           <a:effectLst>
-            <a:outerShdw sx="100000" sy="100000" kx="0" ky="0" algn="bl" rotWithShape="0" blurRad="127000" dist="38100" dir="5400000">
-              <a:srgbClr val="000000">
-                <a:alpha val="28000"/>
+            <a:outerShdw sx="100000" sy="100000" kx="0" ky="0" algn="bl" rotWithShape="0" blurRad="114300" dist="38100" dir="5400000">
+              <a:srgbClr val="7A6A55">
+                <a:alpha val="12000"/>
               </a:srgbClr>
             </a:outerShdw>
           </a:effectLst>
@@ -8660,11 +8678,11 @@
             <a:r>
               <a:rPr lang="en-US" sz="3600" b="1" dirty="0">
                 <a:solidFill>
-                  <a:srgbClr val="C9A961"/>
-                </a:solidFill>
-                <a:latin typeface="Bookman Old Style" pitchFamily="34" charset="0"/>
-                <a:ea typeface="Bookman Old Style" pitchFamily="34" charset="-122"/>
-                <a:cs typeface="Bookman Old Style" pitchFamily="34" charset="-120"/>
+                  <a:srgbClr val="B1937E"/>
+                </a:solidFill>
+                <a:latin typeface="Georgia" pitchFamily="34" charset="0"/>
+                <a:ea typeface="Georgia" pitchFamily="34" charset="-122"/>
+                <a:cs typeface="Georgia" pitchFamily="34" charset="-120"/>
               </a:rPr>
               <a:t>01</a:t>
             </a:r>
@@ -8687,9 +8705,14 @@
             <a:avLst/>
           </a:prstGeom>
           <a:solidFill>
-            <a:srgbClr val="16314F"/>
+            <a:srgbClr val="EADFD0"/>
           </a:solidFill>
-          <a:ln/>
+          <a:ln w="9525">
+            <a:solidFill>
+              <a:srgbClr val="E3D9CC"/>
+            </a:solidFill>
+            <a:prstDash val="solid"/>
+          </a:ln>
         </p:spPr>
       </p:sp>
       <p:pic>
@@ -8743,11 +8766,11 @@
             <a:r>
               <a:rPr lang="en-US" sz="1900" b="1" dirty="0">
                 <a:solidFill>
-                  <a:srgbClr val="EAF1FA"/>
-                </a:solidFill>
-                <a:latin typeface="Bookman Old Style" pitchFamily="34" charset="0"/>
-                <a:ea typeface="Bookman Old Style" pitchFamily="34" charset="-122"/>
-                <a:cs typeface="Bookman Old Style" pitchFamily="34" charset="-120"/>
+                  <a:srgbClr val="33302B"/>
+                </a:solidFill>
+                <a:latin typeface="Georgia" pitchFamily="34" charset="0"/>
+                <a:ea typeface="Georgia" pitchFamily="34" charset="-122"/>
+                <a:cs typeface="Georgia" pitchFamily="34" charset="-120"/>
               </a:rPr>
               <a:t>Redesenha os packs</a:t>
             </a:r>
@@ -8782,7 +8805,7 @@
             <a:r>
               <a:rPr lang="en-US" sz="1300" dirty="0">
                 <a:solidFill>
-                  <a:srgbClr val="9FB2C9"/>
+                  <a:srgbClr val="8A7E72"/>
                 </a:solidFill>
                 <a:latin typeface="Calibri" pitchFamily="34" charset="0"/>
                 <a:ea typeface="Calibri" pitchFamily="34" charset="-122"/>
@@ -8811,13 +8834,18 @@
             </a:avLst>
           </a:prstGeom>
           <a:solidFill>
-            <a:srgbClr val="13283F"/>
+            <a:srgbClr val="FFFFFF"/>
           </a:solidFill>
-          <a:ln/>
+          <a:ln w="12700">
+            <a:solidFill>
+              <a:srgbClr val="E3D9CC"/>
+            </a:solidFill>
+            <a:prstDash val="solid"/>
+          </a:ln>
           <a:effectLst>
-            <a:outerShdw sx="100000" sy="100000" kx="0" ky="0" algn="bl" rotWithShape="0" blurRad="127000" dist="38100" dir="5400000">
-              <a:srgbClr val="000000">
-                <a:alpha val="28000"/>
+            <a:outerShdw sx="100000" sy="100000" kx="0" ky="0" algn="bl" rotWithShape="0" blurRad="114300" dist="38100" dir="5400000">
+              <a:srgbClr val="7A6A55">
+                <a:alpha val="12000"/>
               </a:srgbClr>
             </a:outerShdw>
           </a:effectLst>
@@ -8850,11 +8878,11 @@
             <a:r>
               <a:rPr lang="en-US" sz="3600" b="1" dirty="0">
                 <a:solidFill>
-                  <a:srgbClr val="C9A961"/>
-                </a:solidFill>
-                <a:latin typeface="Bookman Old Style" pitchFamily="34" charset="0"/>
-                <a:ea typeface="Bookman Old Style" pitchFamily="34" charset="-122"/>
-                <a:cs typeface="Bookman Old Style" pitchFamily="34" charset="-120"/>
+                  <a:srgbClr val="B1937E"/>
+                </a:solidFill>
+                <a:latin typeface="Georgia" pitchFamily="34" charset="0"/>
+                <a:ea typeface="Georgia" pitchFamily="34" charset="-122"/>
+                <a:cs typeface="Georgia" pitchFamily="34" charset="-120"/>
               </a:rPr>
               <a:t>02</a:t>
             </a:r>
@@ -8877,9 +8905,14 @@
             <a:avLst/>
           </a:prstGeom>
           <a:solidFill>
-            <a:srgbClr val="16314F"/>
+            <a:srgbClr val="EADFD0"/>
           </a:solidFill>
-          <a:ln/>
+          <a:ln w="9525">
+            <a:solidFill>
+              <a:srgbClr val="E3D9CC"/>
+            </a:solidFill>
+            <a:prstDash val="solid"/>
+          </a:ln>
         </p:spPr>
       </p:sp>
       <p:pic>
@@ -8933,11 +8966,11 @@
             <a:r>
               <a:rPr lang="en-US" sz="1900" b="1" dirty="0">
                 <a:solidFill>
-                  <a:srgbClr val="EAF1FA"/>
-                </a:solidFill>
-                <a:latin typeface="Bookman Old Style" pitchFamily="34" charset="0"/>
-                <a:ea typeface="Bookman Old Style" pitchFamily="34" charset="-122"/>
-                <a:cs typeface="Bookman Old Style" pitchFamily="34" charset="-120"/>
+                  <a:srgbClr val="33302B"/>
+                </a:solidFill>
+                <a:latin typeface="Georgia" pitchFamily="34" charset="0"/>
+                <a:ea typeface="Georgia" pitchFamily="34" charset="-122"/>
+                <a:cs typeface="Georgia" pitchFamily="34" charset="-120"/>
               </a:rPr>
               <a:t>Monta a proposta premium</a:t>
             </a:r>
@@ -8972,7 +9005,7 @@
             <a:r>
               <a:rPr lang="en-US" sz="1300" dirty="0">
                 <a:solidFill>
-                  <a:srgbClr val="9FB2C9"/>
+                  <a:srgbClr val="8A7E72"/>
                 </a:solidFill>
                 <a:latin typeface="Calibri" pitchFamily="34" charset="0"/>
                 <a:ea typeface="Calibri" pitchFamily="34" charset="-122"/>
@@ -9001,13 +9034,18 @@
             </a:avLst>
           </a:prstGeom>
           <a:solidFill>
-            <a:srgbClr val="13283F"/>
+            <a:srgbClr val="FFFFFF"/>
           </a:solidFill>
-          <a:ln/>
+          <a:ln w="12700">
+            <a:solidFill>
+              <a:srgbClr val="E3D9CC"/>
+            </a:solidFill>
+            <a:prstDash val="solid"/>
+          </a:ln>
           <a:effectLst>
-            <a:outerShdw sx="100000" sy="100000" kx="0" ky="0" algn="bl" rotWithShape="0" blurRad="127000" dist="38100" dir="5400000">
-              <a:srgbClr val="000000">
-                <a:alpha val="28000"/>
+            <a:outerShdw sx="100000" sy="100000" kx="0" ky="0" algn="bl" rotWithShape="0" blurRad="114300" dist="38100" dir="5400000">
+              <a:srgbClr val="7A6A55">
+                <a:alpha val="12000"/>
               </a:srgbClr>
             </a:outerShdw>
           </a:effectLst>
@@ -9040,11 +9078,11 @@
             <a:r>
               <a:rPr lang="en-US" sz="3600" b="1" dirty="0">
                 <a:solidFill>
-                  <a:srgbClr val="C9A961"/>
-                </a:solidFill>
-                <a:latin typeface="Bookman Old Style" pitchFamily="34" charset="0"/>
-                <a:ea typeface="Bookman Old Style" pitchFamily="34" charset="-122"/>
-                <a:cs typeface="Bookman Old Style" pitchFamily="34" charset="-120"/>
+                  <a:srgbClr val="B1937E"/>
+                </a:solidFill>
+                <a:latin typeface="Georgia" pitchFamily="34" charset="0"/>
+                <a:ea typeface="Georgia" pitchFamily="34" charset="-122"/>
+                <a:cs typeface="Georgia" pitchFamily="34" charset="-120"/>
               </a:rPr>
               <a:t>03</a:t>
             </a:r>
@@ -9067,9 +9105,14 @@
             <a:avLst/>
           </a:prstGeom>
           <a:solidFill>
-            <a:srgbClr val="16314F"/>
+            <a:srgbClr val="EADFD0"/>
           </a:solidFill>
-          <a:ln/>
+          <a:ln w="9525">
+            <a:solidFill>
+              <a:srgbClr val="E3D9CC"/>
+            </a:solidFill>
+            <a:prstDash val="solid"/>
+          </a:ln>
         </p:spPr>
       </p:sp>
       <p:pic>
@@ -9123,11 +9166,11 @@
             <a:r>
               <a:rPr lang="en-US" sz="1900" b="1" dirty="0">
                 <a:solidFill>
-                  <a:srgbClr val="EAF1FA"/>
-                </a:solidFill>
-                <a:latin typeface="Bookman Old Style" pitchFamily="34" charset="0"/>
-                <a:ea typeface="Bookman Old Style" pitchFamily="34" charset="-122"/>
-                <a:cs typeface="Bookman Old Style" pitchFamily="34" charset="-120"/>
+                  <a:srgbClr val="33302B"/>
+                </a:solidFill>
+                <a:latin typeface="Georgia" pitchFamily="34" charset="0"/>
+                <a:ea typeface="Georgia" pitchFamily="34" charset="-122"/>
+                <a:cs typeface="Georgia" pitchFamily="34" charset="-120"/>
               </a:rPr>
               <a:t>Prepara as objeções</a:t>
             </a:r>
@@ -9162,7 +9205,7 @@
             <a:r>
               <a:rPr lang="en-US" sz="1300" dirty="0">
                 <a:solidFill>
-                  <a:srgbClr val="9FB2C9"/>
+                  <a:srgbClr val="8A7E72"/>
                 </a:solidFill>
                 <a:latin typeface="Calibri" pitchFamily="34" charset="0"/>
                 <a:ea typeface="Calibri" pitchFamily="34" charset="-122"/>
@@ -9191,7 +9234,7 @@
           <a:noFill/>
           <a:ln w="9525">
             <a:solidFill>
-              <a:srgbClr val="5C708A">
+              <a:srgbClr val="A89A86">
                 <a:alpha val="60000"/>
               </a:srgbClr>
             </a:solidFill>
@@ -9226,7 +9269,7 @@
             <a:r>
               <a:rPr lang="en-US" sz="900" dirty="0">
                 <a:solidFill>
-                  <a:srgbClr val="5C708A"/>
+                  <a:srgbClr val="A89A86"/>
                 </a:solidFill>
                 <a:latin typeface="Calibri" pitchFamily="34" charset="0"/>
                 <a:ea typeface="Calibri" pitchFamily="34" charset="-122"/>
@@ -9265,7 +9308,7 @@
             <a:r>
               <a:rPr lang="en-US" sz="900" dirty="0">
                 <a:solidFill>
-                  <a:srgbClr val="5C708A"/>
+                  <a:srgbClr val="A89A86"/>
                 </a:solidFill>
                 <a:latin typeface="Calibri" pitchFamily="34" charset="0"/>
                 <a:ea typeface="Calibri" pitchFamily="34" charset="-122"/>
@@ -9291,7 +9334,7 @@
     <p:bg>
       <p:bgPr>
         <a:solidFill>
-          <a:srgbClr val="0B1D33"/>
+          <a:srgbClr val="F8F6F3"/>
         </a:solidFill>
       </p:bgPr>
     </p:bg>
@@ -9336,7 +9379,7 @@
             <a:r>
               <a:rPr lang="en-US" sz="1200" b="1" spc="300" kern="0" dirty="0">
                 <a:solidFill>
-                  <a:srgbClr val="4A9EFF"/>
+                  <a:srgbClr val="9A7B66"/>
                 </a:solidFill>
                 <a:latin typeface="Calibri" pitchFamily="34" charset="0"/>
                 <a:ea typeface="Calibri" pitchFamily="34" charset="-122"/>
@@ -9378,11 +9421,11 @@
             <a:r>
               <a:rPr lang="en-US" sz="3600" b="1" dirty="0">
                 <a:solidFill>
-                  <a:srgbClr val="EAF1FA"/>
-                </a:solidFill>
-                <a:latin typeface="Bookman Old Style" pitchFamily="34" charset="0"/>
-                <a:ea typeface="Bookman Old Style" pitchFamily="34" charset="-122"/>
-                <a:cs typeface="Bookman Old Style" pitchFamily="34" charset="-120"/>
+                  <a:srgbClr val="33302B"/>
+                </a:solidFill>
+                <a:latin typeface="Georgia" pitchFamily="34" charset="0"/>
+                <a:ea typeface="Georgia" pitchFamily="34" charset="-122"/>
+                <a:cs typeface="Georgia" pitchFamily="34" charset="-120"/>
               </a:rPr>
               <a:t>Do preço à assinatura</a:t>
             </a:r>
@@ -9407,13 +9450,18 @@
             </a:avLst>
           </a:prstGeom>
           <a:solidFill>
-            <a:srgbClr val="13283F"/>
+            <a:srgbClr val="FFFFFF"/>
           </a:solidFill>
-          <a:ln/>
+          <a:ln w="12700">
+            <a:solidFill>
+              <a:srgbClr val="E3D9CC"/>
+            </a:solidFill>
+            <a:prstDash val="solid"/>
+          </a:ln>
           <a:effectLst>
-            <a:outerShdw sx="100000" sy="100000" kx="0" ky="0" algn="bl" rotWithShape="0" blurRad="127000" dist="38100" dir="5400000">
-              <a:srgbClr val="000000">
-                <a:alpha val="28000"/>
+            <a:outerShdw sx="100000" sy="100000" kx="0" ky="0" algn="bl" rotWithShape="0" blurRad="114300" dist="38100" dir="5400000">
+              <a:srgbClr val="7A6A55">
+                <a:alpha val="12000"/>
               </a:srgbClr>
             </a:outerShdw>
           </a:effectLst>
@@ -9434,9 +9482,14 @@
             <a:avLst/>
           </a:prstGeom>
           <a:solidFill>
-            <a:srgbClr val="16314F"/>
+            <a:srgbClr val="EADFD0"/>
           </a:solidFill>
-          <a:ln/>
+          <a:ln w="9525">
+            <a:solidFill>
+              <a:srgbClr val="E3D9CC"/>
+            </a:solidFill>
+            <a:prstDash val="solid"/>
+          </a:ln>
         </p:spPr>
       </p:sp>
       <p:pic>
@@ -9490,11 +9543,11 @@
             <a:r>
               <a:rPr lang="en-US" sz="2800" b="1" dirty="0">
                 <a:solidFill>
-                  <a:srgbClr val="C9A961"/>
-                </a:solidFill>
-                <a:latin typeface="Bookman Old Style" pitchFamily="34" charset="0"/>
-                <a:ea typeface="Bookman Old Style" pitchFamily="34" charset="-122"/>
-                <a:cs typeface="Bookman Old Style" pitchFamily="34" charset="-120"/>
+                  <a:srgbClr val="B1937E"/>
+                </a:solidFill>
+                <a:latin typeface="Georgia" pitchFamily="34" charset="0"/>
+                <a:ea typeface="Georgia" pitchFamily="34" charset="-122"/>
+                <a:cs typeface="Georgia" pitchFamily="34" charset="-120"/>
               </a:rPr>
               <a:t>01</a:t>
             </a:r>
@@ -9529,7 +9582,7 @@
             <a:r>
               <a:rPr lang="en-US" sz="1800" b="1" dirty="0">
                 <a:solidFill>
-                  <a:srgbClr val="EAF1FA"/>
+                  <a:srgbClr val="33302B"/>
                 </a:solidFill>
                 <a:latin typeface="Calibri" pitchFamily="34" charset="0"/>
                 <a:ea typeface="Calibri" pitchFamily="34" charset="-122"/>
@@ -9568,7 +9621,7 @@
             <a:r>
               <a:rPr lang="en-US" sz="1300" dirty="0">
                 <a:solidFill>
-                  <a:srgbClr val="9FB2C9"/>
+                  <a:srgbClr val="8A7E72"/>
                 </a:solidFill>
                 <a:latin typeface="Calibri" pitchFamily="34" charset="0"/>
                 <a:ea typeface="Calibri" pitchFamily="34" charset="-122"/>
@@ -9597,13 +9650,18 @@
             </a:avLst>
           </a:prstGeom>
           <a:solidFill>
-            <a:srgbClr val="13283F"/>
+            <a:srgbClr val="FFFFFF"/>
           </a:solidFill>
-          <a:ln/>
+          <a:ln w="12700">
+            <a:solidFill>
+              <a:srgbClr val="E3D9CC"/>
+            </a:solidFill>
+            <a:prstDash val="solid"/>
+          </a:ln>
           <a:effectLst>
-            <a:outerShdw sx="100000" sy="100000" kx="0" ky="0" algn="bl" rotWithShape="0" blurRad="127000" dist="38100" dir="5400000">
-              <a:srgbClr val="000000">
-                <a:alpha val="28000"/>
+            <a:outerShdw sx="100000" sy="100000" kx="0" ky="0" algn="bl" rotWithShape="0" blurRad="114300" dist="38100" dir="5400000">
+              <a:srgbClr val="7A6A55">
+                <a:alpha val="12000"/>
               </a:srgbClr>
             </a:outerShdw>
           </a:effectLst>
@@ -9624,9 +9682,14 @@
             <a:avLst/>
           </a:prstGeom>
           <a:solidFill>
-            <a:srgbClr val="16314F"/>
+            <a:srgbClr val="EADFD0"/>
           </a:solidFill>
-          <a:ln/>
+          <a:ln w="9525">
+            <a:solidFill>
+              <a:srgbClr val="E3D9CC"/>
+            </a:solidFill>
+            <a:prstDash val="solid"/>
+          </a:ln>
         </p:spPr>
       </p:sp>
       <p:pic>
@@ -9680,11 +9743,11 @@
             <a:r>
               <a:rPr lang="en-US" sz="2800" b="1" dirty="0">
                 <a:solidFill>
-                  <a:srgbClr val="C9A961"/>
-                </a:solidFill>
-                <a:latin typeface="Bookman Old Style" pitchFamily="34" charset="0"/>
-                <a:ea typeface="Bookman Old Style" pitchFamily="34" charset="-122"/>
-                <a:cs typeface="Bookman Old Style" pitchFamily="34" charset="-120"/>
+                  <a:srgbClr val="B1937E"/>
+                </a:solidFill>
+                <a:latin typeface="Georgia" pitchFamily="34" charset="0"/>
+                <a:ea typeface="Georgia" pitchFamily="34" charset="-122"/>
+                <a:cs typeface="Georgia" pitchFamily="34" charset="-120"/>
               </a:rPr>
               <a:t>02</a:t>
             </a:r>
@@ -9719,7 +9782,7 @@
             <a:r>
               <a:rPr lang="en-US" sz="1800" b="1" dirty="0">
                 <a:solidFill>
-                  <a:srgbClr val="EAF1FA"/>
+                  <a:srgbClr val="33302B"/>
                 </a:solidFill>
                 <a:latin typeface="Calibri" pitchFamily="34" charset="0"/>
                 <a:ea typeface="Calibri" pitchFamily="34" charset="-122"/>
@@ -9758,7 +9821,7 @@
             <a:r>
               <a:rPr lang="en-US" sz="1300" dirty="0">
                 <a:solidFill>
-                  <a:srgbClr val="9FB2C9"/>
+                  <a:srgbClr val="8A7E72"/>
                 </a:solidFill>
                 <a:latin typeface="Calibri" pitchFamily="34" charset="0"/>
                 <a:ea typeface="Calibri" pitchFamily="34" charset="-122"/>
@@ -9787,13 +9850,18 @@
             </a:avLst>
           </a:prstGeom>
           <a:solidFill>
-            <a:srgbClr val="13283F"/>
+            <a:srgbClr val="FFFFFF"/>
           </a:solidFill>
-          <a:ln/>
+          <a:ln w="12700">
+            <a:solidFill>
+              <a:srgbClr val="E3D9CC"/>
+            </a:solidFill>
+            <a:prstDash val="solid"/>
+          </a:ln>
           <a:effectLst>
-            <a:outerShdw sx="100000" sy="100000" kx="0" ky="0" algn="bl" rotWithShape="0" blurRad="127000" dist="38100" dir="5400000">
-              <a:srgbClr val="000000">
-                <a:alpha val="28000"/>
+            <a:outerShdw sx="100000" sy="100000" kx="0" ky="0" algn="bl" rotWithShape="0" blurRad="114300" dist="38100" dir="5400000">
+              <a:srgbClr val="7A6A55">
+                <a:alpha val="12000"/>
               </a:srgbClr>
             </a:outerShdw>
           </a:effectLst>
@@ -9814,9 +9882,14 @@
             <a:avLst/>
           </a:prstGeom>
           <a:solidFill>
-            <a:srgbClr val="16314F"/>
+            <a:srgbClr val="EADFD0"/>
           </a:solidFill>
-          <a:ln/>
+          <a:ln w="9525">
+            <a:solidFill>
+              <a:srgbClr val="E3D9CC"/>
+            </a:solidFill>
+            <a:prstDash val="solid"/>
+          </a:ln>
         </p:spPr>
       </p:sp>
       <p:pic>
@@ -9870,11 +9943,11 @@
             <a:r>
               <a:rPr lang="en-US" sz="2800" b="1" dirty="0">
                 <a:solidFill>
-                  <a:srgbClr val="C9A961"/>
-                </a:solidFill>
-                <a:latin typeface="Bookman Old Style" pitchFamily="34" charset="0"/>
-                <a:ea typeface="Bookman Old Style" pitchFamily="34" charset="-122"/>
-                <a:cs typeface="Bookman Old Style" pitchFamily="34" charset="-120"/>
+                  <a:srgbClr val="B1937E"/>
+                </a:solidFill>
+                <a:latin typeface="Georgia" pitchFamily="34" charset="0"/>
+                <a:ea typeface="Georgia" pitchFamily="34" charset="-122"/>
+                <a:cs typeface="Georgia" pitchFamily="34" charset="-120"/>
               </a:rPr>
               <a:t>03</a:t>
             </a:r>
@@ -9909,7 +9982,7 @@
             <a:r>
               <a:rPr lang="en-US" sz="1800" b="1" dirty="0">
                 <a:solidFill>
-                  <a:srgbClr val="EAF1FA"/>
+                  <a:srgbClr val="33302B"/>
                 </a:solidFill>
                 <a:latin typeface="Calibri" pitchFamily="34" charset="0"/>
                 <a:ea typeface="Calibri" pitchFamily="34" charset="-122"/>
@@ -9948,7 +10021,7 @@
             <a:r>
               <a:rPr lang="en-US" sz="1300" dirty="0">
                 <a:solidFill>
-                  <a:srgbClr val="9FB2C9"/>
+                  <a:srgbClr val="8A7E72"/>
                 </a:solidFill>
                 <a:latin typeface="Calibri" pitchFamily="34" charset="0"/>
                 <a:ea typeface="Calibri" pitchFamily="34" charset="-122"/>
@@ -9977,13 +10050,18 @@
             </a:avLst>
           </a:prstGeom>
           <a:solidFill>
-            <a:srgbClr val="13283F"/>
+            <a:srgbClr val="FFFFFF"/>
           </a:solidFill>
-          <a:ln/>
+          <a:ln w="12700">
+            <a:solidFill>
+              <a:srgbClr val="E3D9CC"/>
+            </a:solidFill>
+            <a:prstDash val="solid"/>
+          </a:ln>
           <a:effectLst>
-            <a:outerShdw sx="100000" sy="100000" kx="0" ky="0" algn="bl" rotWithShape="0" blurRad="127000" dist="38100" dir="5400000">
-              <a:srgbClr val="000000">
-                <a:alpha val="28000"/>
+            <a:outerShdw sx="100000" sy="100000" kx="0" ky="0" algn="bl" rotWithShape="0" blurRad="114300" dist="38100" dir="5400000">
+              <a:srgbClr val="7A6A55">
+                <a:alpha val="12000"/>
               </a:srgbClr>
             </a:outerShdw>
           </a:effectLst>
@@ -10004,9 +10082,14 @@
             <a:avLst/>
           </a:prstGeom>
           <a:solidFill>
-            <a:srgbClr val="16314F"/>
+            <a:srgbClr val="EADFD0"/>
           </a:solidFill>
-          <a:ln/>
+          <a:ln w="9525">
+            <a:solidFill>
+              <a:srgbClr val="E3D9CC"/>
+            </a:solidFill>
+            <a:prstDash val="solid"/>
+          </a:ln>
         </p:spPr>
       </p:sp>
       <p:pic>
@@ -10060,11 +10143,11 @@
             <a:r>
               <a:rPr lang="en-US" sz="2800" b="1" dirty="0">
                 <a:solidFill>
-                  <a:srgbClr val="C9A961"/>
-                </a:solidFill>
-                <a:latin typeface="Bookman Old Style" pitchFamily="34" charset="0"/>
-                <a:ea typeface="Bookman Old Style" pitchFamily="34" charset="-122"/>
-                <a:cs typeface="Bookman Old Style" pitchFamily="34" charset="-120"/>
+                  <a:srgbClr val="B1937E"/>
+                </a:solidFill>
+                <a:latin typeface="Georgia" pitchFamily="34" charset="0"/>
+                <a:ea typeface="Georgia" pitchFamily="34" charset="-122"/>
+                <a:cs typeface="Georgia" pitchFamily="34" charset="-120"/>
               </a:rPr>
               <a:t>04</a:t>
             </a:r>
@@ -10099,7 +10182,7 @@
             <a:r>
               <a:rPr lang="en-US" sz="1800" b="1" dirty="0">
                 <a:solidFill>
-                  <a:srgbClr val="EAF1FA"/>
+                  <a:srgbClr val="33302B"/>
                 </a:solidFill>
                 <a:latin typeface="Calibri" pitchFamily="34" charset="0"/>
                 <a:ea typeface="Calibri" pitchFamily="34" charset="-122"/>
@@ -10138,7 +10221,7 @@
             <a:r>
               <a:rPr lang="en-US" sz="1300" dirty="0">
                 <a:solidFill>
-                  <a:srgbClr val="9FB2C9"/>
+                  <a:srgbClr val="8A7E72"/>
                 </a:solidFill>
                 <a:latin typeface="Calibri" pitchFamily="34" charset="0"/>
                 <a:ea typeface="Calibri" pitchFamily="34" charset="-122"/>
@@ -10167,7 +10250,7 @@
           <a:noFill/>
           <a:ln w="9525">
             <a:solidFill>
-              <a:srgbClr val="5C708A">
+              <a:srgbClr val="A89A86">
                 <a:alpha val="60000"/>
               </a:srgbClr>
             </a:solidFill>
@@ -10202,7 +10285,7 @@
             <a:r>
               <a:rPr lang="en-US" sz="900" dirty="0">
                 <a:solidFill>
-                  <a:srgbClr val="5C708A"/>
+                  <a:srgbClr val="A89A86"/>
                 </a:solidFill>
                 <a:latin typeface="Calibri" pitchFamily="34" charset="0"/>
                 <a:ea typeface="Calibri" pitchFamily="34" charset="-122"/>
@@ -10241,7 +10324,7 @@
             <a:r>
               <a:rPr lang="en-US" sz="900" dirty="0">
                 <a:solidFill>
-                  <a:srgbClr val="5C708A"/>
+                  <a:srgbClr val="A89A86"/>
                 </a:solidFill>
                 <a:latin typeface="Calibri" pitchFamily="34" charset="0"/>
                 <a:ea typeface="Calibri" pitchFamily="34" charset="-122"/>
@@ -10267,7 +10350,7 @@
     <p:bg>
       <p:bgPr>
         <a:solidFill>
-          <a:srgbClr val="102844"/>
+          <a:srgbClr val="EFE7DE"/>
         </a:solidFill>
       </p:bgPr>
     </p:bg>
@@ -10312,7 +10395,7 @@
             <a:r>
               <a:rPr lang="en-US" sz="1200" b="1" spc="300" kern="0" dirty="0">
                 <a:solidFill>
-                  <a:srgbClr val="C9A961"/>
+                  <a:srgbClr val="B1937E"/>
                 </a:solidFill>
                 <a:latin typeface="Calibri" pitchFamily="34" charset="0"/>
                 <a:ea typeface="Calibri" pitchFamily="34" charset="-122"/>
@@ -10354,11 +10437,11 @@
             <a:r>
               <a:rPr lang="en-US" sz="3200" b="1" dirty="0">
                 <a:solidFill>
-                  <a:srgbClr val="EAF1FA"/>
-                </a:solidFill>
-                <a:latin typeface="Bookman Old Style" pitchFamily="34" charset="0"/>
-                <a:ea typeface="Bookman Old Style" pitchFamily="34" charset="-122"/>
-                <a:cs typeface="Bookman Old Style" pitchFamily="34" charset="-120"/>
+                  <a:srgbClr val="33302B"/>
+                </a:solidFill>
+                <a:latin typeface="Georgia" pitchFamily="34" charset="0"/>
+                <a:ea typeface="Georgia" pitchFamily="34" charset="-122"/>
+                <a:cs typeface="Georgia" pitchFamily="34" charset="-120"/>
               </a:rPr>
               <a:t>O que trazes à próxima sessão</a:t>
             </a:r>
@@ -10383,18 +10466,18 @@
             </a:avLst>
           </a:prstGeom>
           <a:solidFill>
-            <a:srgbClr val="13283F"/>
+            <a:srgbClr val="FFFFFF"/>
           </a:solidFill>
           <a:ln w="19050">
             <a:solidFill>
-              <a:srgbClr val="C9A961"/>
+              <a:srgbClr val="B1937E"/>
             </a:solidFill>
             <a:prstDash val="solid"/>
           </a:ln>
           <a:effectLst>
-            <a:outerShdw sx="100000" sy="100000" kx="0" ky="0" algn="bl" rotWithShape="0" blurRad="127000" dist="38100" dir="5400000">
-              <a:srgbClr val="000000">
-                <a:alpha val="28000"/>
+            <a:outerShdw sx="100000" sy="100000" kx="0" ky="0" algn="bl" rotWithShape="0" blurRad="114300" dist="38100" dir="5400000">
+              <a:srgbClr val="7A6A55">
+                <a:alpha val="12000"/>
               </a:srgbClr>
             </a:outerShdw>
           </a:effectLst>
@@ -10427,11 +10510,11 @@
             <a:r>
               <a:rPr lang="en-US" sz="2300" b="1" dirty="0">
                 <a:solidFill>
-                  <a:srgbClr val="C9A961"/>
-                </a:solidFill>
-                <a:latin typeface="Bookman Old Style" pitchFamily="34" charset="0"/>
-                <a:ea typeface="Bookman Old Style" pitchFamily="34" charset="-122"/>
-                <a:cs typeface="Bookman Old Style" pitchFamily="34" charset="-120"/>
+                  <a:srgbClr val="B1937E"/>
+                </a:solidFill>
+                <a:latin typeface="Georgia" pitchFamily="34" charset="0"/>
+                <a:ea typeface="Georgia" pitchFamily="34" charset="-122"/>
+                <a:cs typeface="Georgia" pitchFamily="34" charset="-120"/>
               </a:rPr>
               <a:t>Sistema de Proposta e Pricing</a:t>
             </a:r>
@@ -10490,7 +10573,7 @@
             <a:r>
               <a:rPr lang="en-US" sz="1550" dirty="0">
                 <a:solidFill>
-                  <a:srgbClr val="EAF1FA"/>
+                  <a:srgbClr val="33302B"/>
                 </a:solidFill>
                 <a:latin typeface="Calibri" pitchFamily="34" charset="0"/>
                 <a:ea typeface="Calibri" pitchFamily="34" charset="-122"/>
@@ -10553,7 +10636,7 @@
             <a:r>
               <a:rPr lang="en-US" sz="1550" dirty="0">
                 <a:solidFill>
-                  <a:srgbClr val="EAF1FA"/>
+                  <a:srgbClr val="33302B"/>
                 </a:solidFill>
                 <a:latin typeface="Calibri" pitchFamily="34" charset="0"/>
                 <a:ea typeface="Calibri" pitchFamily="34" charset="-122"/>
@@ -10616,7 +10699,7 @@
             <a:r>
               <a:rPr lang="en-US" sz="1550" dirty="0">
                 <a:solidFill>
-                  <a:srgbClr val="EAF1FA"/>
+                  <a:srgbClr val="33302B"/>
                 </a:solidFill>
                 <a:latin typeface="Calibri" pitchFamily="34" charset="0"/>
                 <a:ea typeface="Calibri" pitchFamily="34" charset="-122"/>
@@ -10655,7 +10738,7 @@
             <a:r>
               <a:rPr lang="en-US" sz="1500" i="1" dirty="0">
                 <a:solidFill>
-                  <a:srgbClr val="9FB2C9"/>
+                  <a:srgbClr val="8A7E72"/>
                 </a:solidFill>
                 <a:latin typeface="Calibri" pitchFamily="34" charset="0"/>
                 <a:ea typeface="Calibri" pitchFamily="34" charset="-122"/>
@@ -10684,7 +10767,7 @@
           <a:noFill/>
           <a:ln w="9525">
             <a:solidFill>
-              <a:srgbClr val="5C708A">
+              <a:srgbClr val="A89A86">
                 <a:alpha val="60000"/>
               </a:srgbClr>
             </a:solidFill>
@@ -10719,7 +10802,7 @@
             <a:r>
               <a:rPr lang="en-US" sz="900" dirty="0">
                 <a:solidFill>
-                  <a:srgbClr val="5C708A"/>
+                  <a:srgbClr val="A89A86"/>
                 </a:solidFill>
                 <a:latin typeface="Calibri" pitchFamily="34" charset="0"/>
                 <a:ea typeface="Calibri" pitchFamily="34" charset="-122"/>
@@ -10758,7 +10841,7 @@
             <a:r>
               <a:rPr lang="en-US" sz="900" dirty="0">
                 <a:solidFill>
-                  <a:srgbClr val="5C708A"/>
+                  <a:srgbClr val="A89A86"/>
                 </a:solidFill>
                 <a:latin typeface="Calibri" pitchFamily="34" charset="0"/>
                 <a:ea typeface="Calibri" pitchFamily="34" charset="-122"/>
@@ -10784,7 +10867,7 @@
     <p:bg>
       <p:bgPr>
         <a:solidFill>
-          <a:srgbClr val="0B1D33"/>
+          <a:srgbClr val="F8F6F3"/>
         </a:solidFill>
       </p:bgPr>
     </p:bg>
@@ -10804,51 +10887,7 @@
       </p:grpSpPr>
       <p:sp>
         <p:nvSpPr>
-          <p:cNvPr id="2" name="Shape 0"/>
-          <p:cNvSpPr/>
-          <p:nvPr/>
-        </p:nvSpPr>
-        <p:spPr>
-          <a:xfrm>
-            <a:off x="8046720" y="-1645920"/>
-            <a:ext cx="5943600" cy="5943600"/>
-          </a:xfrm>
-          <a:prstGeom prst="ellipse">
-            <a:avLst/>
-          </a:prstGeom>
-          <a:solidFill>
-            <a:srgbClr val="4A9EFF">
-              <a:alpha val="14000"/>
-            </a:srgbClr>
-          </a:solidFill>
-          <a:ln/>
-        </p:spPr>
-      </p:sp>
-      <p:sp>
-        <p:nvSpPr>
-          <p:cNvPr id="3" name="Shape 1"/>
-          <p:cNvSpPr/>
-          <p:nvPr/>
-        </p:nvSpPr>
-        <p:spPr>
-          <a:xfrm>
-            <a:off x="-1828800" y="4389120"/>
-            <a:ext cx="5029200" cy="5029200"/>
-          </a:xfrm>
-          <a:prstGeom prst="ellipse">
-            <a:avLst/>
-          </a:prstGeom>
-          <a:solidFill>
-            <a:srgbClr val="C9A961">
-              <a:alpha val="10000"/>
-            </a:srgbClr>
-          </a:solidFill>
-          <a:ln/>
-        </p:spPr>
-      </p:sp>
-      <p:sp>
-        <p:nvSpPr>
-          <p:cNvPr id="4" name="Text 2"/>
+          <p:cNvPr id="2" name="Text 0"/>
           <p:cNvSpPr/>
           <p:nvPr/>
         </p:nvSpPr>
@@ -10873,7 +10912,7 @@
             <a:r>
               <a:rPr lang="en-US" sz="1400" b="1" spc="500" kern="0" dirty="0">
                 <a:solidFill>
-                  <a:srgbClr val="C9A961"/>
+                  <a:srgbClr val="B1937E"/>
                 </a:solidFill>
                 <a:latin typeface="Calibri" pitchFamily="34" charset="0"/>
                 <a:ea typeface="Calibri" pitchFamily="34" charset="-122"/>
@@ -10887,7 +10926,7 @@
       </p:sp>
       <p:sp>
         <p:nvSpPr>
-          <p:cNvPr id="5" name="Text 3"/>
+          <p:cNvPr id="3" name="Text 1"/>
           <p:cNvSpPr/>
           <p:nvPr/>
         </p:nvSpPr>
@@ -10913,17 +10952,17 @@
               <a:buNone/>
             </a:pPr>
             <a:r>
-              <a:rPr lang="en-US" sz="4200" b="1" dirty="0">
-                <a:solidFill>
-                  <a:srgbClr val="EAF1FA"/>
-                </a:solidFill>
-                <a:latin typeface="Bookman Old Style" pitchFamily="34" charset="0"/>
-                <a:ea typeface="Bookman Old Style" pitchFamily="34" charset="-122"/>
-                <a:cs typeface="Bookman Old Style" pitchFamily="34" charset="-120"/>
+              <a:rPr lang="en-US" sz="3800" b="1" dirty="0">
+                <a:solidFill>
+                  <a:srgbClr val="33302B"/>
+                </a:solidFill>
+                <a:latin typeface="Georgia" pitchFamily="34" charset="0"/>
+                <a:ea typeface="Georgia" pitchFamily="34" charset="-122"/>
+                <a:cs typeface="Georgia" pitchFamily="34" charset="-120"/>
               </a:rPr>
               <a:t>Sessão 06: Experiência</a:t>
             </a:r>
-            <a:endParaRPr lang="en-US" sz="4200" dirty="0"/>
+            <a:endParaRPr lang="en-US" sz="3800" dirty="0"/>
           </a:p>
           <a:p>
             <a:pPr indent="0" marL="0">
@@ -10933,23 +10972,23 @@
               <a:buNone/>
             </a:pPr>
             <a:r>
-              <a:rPr lang="en-US" sz="4200" b="1" dirty="0">
-                <a:solidFill>
-                  <a:srgbClr val="EAF1FA"/>
-                </a:solidFill>
-                <a:latin typeface="Bookman Old Style" pitchFamily="34" charset="0"/>
-                <a:ea typeface="Bookman Old Style" pitchFamily="34" charset="-122"/>
-                <a:cs typeface="Bookman Old Style" pitchFamily="34" charset="-120"/>
+              <a:rPr lang="en-US" sz="3800" b="1" dirty="0">
+                <a:solidFill>
+                  <a:srgbClr val="33302B"/>
+                </a:solidFill>
+                <a:latin typeface="Georgia" pitchFamily="34" charset="0"/>
+                <a:ea typeface="Georgia" pitchFamily="34" charset="-122"/>
+                <a:cs typeface="Georgia" pitchFamily="34" charset="-120"/>
               </a:rPr>
               <a:t>e Portal de Cliente</a:t>
             </a:r>
-            <a:endParaRPr lang="en-US" sz="4200" dirty="0"/>
-          </a:p>
-        </p:txBody>
-      </p:sp>
-      <p:sp>
-        <p:nvSpPr>
-          <p:cNvPr id="6" name="Text 4"/>
+            <a:endParaRPr lang="en-US" sz="3800" dirty="0"/>
+          </a:p>
+        </p:txBody>
+      </p:sp>
+      <p:sp>
+        <p:nvSpPr>
+          <p:cNvPr id="4" name="Text 2"/>
           <p:cNvSpPr/>
           <p:nvPr/>
         </p:nvSpPr>
@@ -10974,7 +11013,7 @@
             <a:r>
               <a:rPr lang="en-US" sz="1700" dirty="0">
                 <a:solidFill>
-                  <a:srgbClr val="9FB2C9"/>
+                  <a:srgbClr val="8A7E72"/>
                 </a:solidFill>
                 <a:latin typeface="Calibri" pitchFamily="34" charset="0"/>
                 <a:ea typeface="Calibri" pitchFamily="34" charset="-122"/>
@@ -10988,7 +11027,7 @@
       </p:sp>
       <p:sp>
         <p:nvSpPr>
-          <p:cNvPr id="7" name="Shape 5"/>
+          <p:cNvPr id="5" name="Shape 3"/>
           <p:cNvSpPr/>
           <p:nvPr/>
         </p:nvSpPr>
@@ -11003,51 +11042,36 @@
           <a:noFill/>
           <a:ln w="31750">
             <a:solidFill>
-              <a:srgbClr val="C9A961"/>
+              <a:srgbClr val="B1937E"/>
             </a:solidFill>
             <a:prstDash val="solid"/>
           </a:ln>
         </p:spPr>
       </p:sp>
-      <p:sp>
-        <p:nvSpPr>
-          <p:cNvPr id="8" name="Text 6"/>
-          <p:cNvSpPr/>
-          <p:nvPr/>
-        </p:nvSpPr>
-        <p:spPr>
-          <a:xfrm>
-            <a:off x="640080" y="5943600"/>
-            <a:ext cx="7315200" cy="365760"/>
-          </a:xfrm>
-          <a:prstGeom prst="rect">
-            <a:avLst/>
-          </a:prstGeom>
-          <a:noFill/>
-          <a:ln/>
-        </p:spPr>
-        <p:txBody>
-          <a:bodyPr wrap="square" lIns="0" tIns="0" rIns="0" bIns="0" rtlCol="0" anchor="ctr"/>
-          <a:lstStyle/>
-          <a:p>
-            <a:pPr indent="0" marL="0">
-              <a:buNone/>
-            </a:pPr>
-            <a:r>
-              <a:rPr lang="en-US" sz="1200" spc="400" kern="0" dirty="0">
-                <a:solidFill>
-                  <a:srgbClr val="5C708A"/>
-                </a:solidFill>
-                <a:latin typeface="Calibri" pitchFamily="34" charset="0"/>
-                <a:ea typeface="Calibri" pitchFamily="34" charset="-122"/>
-                <a:cs typeface="Calibri" pitchFamily="34" charset="-120"/>
-              </a:rPr>
-              <a:t>MENTORIA · RL</a:t>
-            </a:r>
-            <a:endParaRPr lang="en-US" sz="1200" dirty="0"/>
-          </a:p>
-        </p:txBody>
-      </p:sp>
+      <p:pic>
+        <p:nvPicPr>
+          <p:cNvPr id="6" name="Image 0" descr="preencoded.png">    </p:cNvPr>
+          <p:cNvPicPr>
+            <a:picLocks noChangeAspect="1"/>
+          </p:cNvPicPr>
+          <p:nvPr/>
+        </p:nvPicPr>
+        <p:blipFill>
+          <a:blip r:embed="rId1"/>
+          <a:stretch>
+            <a:fillRect/>
+          </a:stretch>
+        </p:blipFill>
+        <p:spPr>
+          <a:xfrm>
+            <a:off x="640080" y="502920"/>
+            <a:ext cx="1280160" cy="1320800"/>
+          </a:xfrm>
+          <a:prstGeom prst="rect">
+            <a:avLst/>
+          </a:prstGeom>
+        </p:spPr>
+      </p:pic>
     </p:spTree>
   </p:cSld>
   <p:clrMapOvr>
@@ -11062,7 +11086,7 @@
     <p:bg>
       <p:bgPr>
         <a:solidFill>
-          <a:srgbClr val="0B1D33"/>
+          <a:srgbClr val="F8F6F3"/>
         </a:solidFill>
       </p:bgPr>
     </p:bg>
@@ -11082,51 +11106,7 @@
       </p:grpSpPr>
       <p:sp>
         <p:nvSpPr>
-          <p:cNvPr id="2" name="Shape 0"/>
-          <p:cNvSpPr/>
-          <p:nvPr/>
-        </p:nvSpPr>
-        <p:spPr>
-          <a:xfrm>
-            <a:off x="7772400" y="-1371600"/>
-            <a:ext cx="5486400" cy="5486400"/>
-          </a:xfrm>
-          <a:prstGeom prst="ellipse">
-            <a:avLst/>
-          </a:prstGeom>
-          <a:solidFill>
-            <a:srgbClr val="4A9EFF">
-              <a:alpha val="10000"/>
-            </a:srgbClr>
-          </a:solidFill>
-          <a:ln/>
-        </p:spPr>
-      </p:sp>
-      <p:sp>
-        <p:nvSpPr>
-          <p:cNvPr id="3" name="Shape 1"/>
-          <p:cNvSpPr/>
-          <p:nvPr/>
-        </p:nvSpPr>
-        <p:spPr>
-          <a:xfrm>
-            <a:off x="-1371600" y="4114800"/>
-            <a:ext cx="4572000" cy="4572000"/>
-          </a:xfrm>
-          <a:prstGeom prst="ellipse">
-            <a:avLst/>
-          </a:prstGeom>
-          <a:solidFill>
-            <a:srgbClr val="C9A961">
-              <a:alpha val="8000"/>
-            </a:srgbClr>
-          </a:solidFill>
-          <a:ln/>
-        </p:spPr>
-      </p:sp>
-      <p:sp>
-        <p:nvSpPr>
-          <p:cNvPr id="4" name="Text 2"/>
+          <p:cNvPr id="2" name="Text 0"/>
           <p:cNvSpPr/>
           <p:nvPr/>
         </p:nvSpPr>
@@ -11151,11 +11131,11 @@
             <a:r>
               <a:rPr lang="en-US" sz="15000" b="1" dirty="0">
                 <a:solidFill>
-                  <a:srgbClr val="16314F"/>
-                </a:solidFill>
-                <a:latin typeface="Bookman Old Style" pitchFamily="34" charset="0"/>
-                <a:ea typeface="Bookman Old Style" pitchFamily="34" charset="-122"/>
-                <a:cs typeface="Bookman Old Style" pitchFamily="34" charset="-120"/>
+                  <a:srgbClr val="EADFD0"/>
+                </a:solidFill>
+                <a:latin typeface="Georgia" pitchFamily="34" charset="0"/>
+                <a:ea typeface="Georgia" pitchFamily="34" charset="-122"/>
+                <a:cs typeface="Georgia" pitchFamily="34" charset="-120"/>
               </a:rPr>
               <a:t>A</a:t>
             </a:r>
@@ -11165,7 +11145,7 @@
       </p:sp>
       <p:sp>
         <p:nvSpPr>
-          <p:cNvPr id="5" name="Text 3"/>
+          <p:cNvPr id="3" name="Text 1"/>
           <p:cNvSpPr/>
           <p:nvPr/>
         </p:nvSpPr>
@@ -11190,7 +11170,7 @@
             <a:r>
               <a:rPr lang="en-US" sz="1300" b="1" spc="400" kern="0" dirty="0">
                 <a:solidFill>
-                  <a:srgbClr val="C9A961"/>
+                  <a:srgbClr val="B1937E"/>
                 </a:solidFill>
                 <a:latin typeface="Calibri" pitchFamily="34" charset="0"/>
                 <a:ea typeface="Calibri" pitchFamily="34" charset="-122"/>
@@ -11204,7 +11184,7 @@
       </p:sp>
       <p:sp>
         <p:nvSpPr>
-          <p:cNvPr id="6" name="Text 4"/>
+          <p:cNvPr id="4" name="Text 2"/>
           <p:cNvSpPr/>
           <p:nvPr/>
         </p:nvSpPr>
@@ -11230,23 +11210,23 @@
               <a:buNone/>
             </a:pPr>
             <a:r>
-              <a:rPr lang="en-US" sz="4400" b="1" dirty="0">
-                <a:solidFill>
-                  <a:srgbClr val="EAF1FA"/>
-                </a:solidFill>
-                <a:latin typeface="Bookman Old Style" pitchFamily="34" charset="0"/>
-                <a:ea typeface="Bookman Old Style" pitchFamily="34" charset="-122"/>
-                <a:cs typeface="Bookman Old Style" pitchFamily="34" charset="-120"/>
+              <a:rPr lang="en-US" sz="4000" b="1" dirty="0">
+                <a:solidFill>
+                  <a:srgbClr val="33302B"/>
+                </a:solidFill>
+                <a:latin typeface="Georgia" pitchFamily="34" charset="0"/>
+                <a:ea typeface="Georgia" pitchFamily="34" charset="-122"/>
+                <a:cs typeface="Georgia" pitchFamily="34" charset="-120"/>
               </a:rPr>
               <a:t>A Arquitetura do Preço</a:t>
             </a:r>
-            <a:endParaRPr lang="en-US" sz="4400" dirty="0"/>
-          </a:p>
-        </p:txBody>
-      </p:sp>
-      <p:sp>
-        <p:nvSpPr>
-          <p:cNvPr id="7" name="Text 5"/>
+            <a:endParaRPr lang="en-US" sz="4000" dirty="0"/>
+          </a:p>
+        </p:txBody>
+      </p:sp>
+      <p:sp>
+        <p:nvSpPr>
+          <p:cNvPr id="5" name="Text 3"/>
           <p:cNvSpPr/>
           <p:nvPr/>
         </p:nvSpPr>
@@ -11271,7 +11251,7 @@
             <a:r>
               <a:rPr lang="en-US" sz="1600" dirty="0">
                 <a:solidFill>
-                  <a:srgbClr val="9FB2C9"/>
+                  <a:srgbClr val="8A7E72"/>
                 </a:solidFill>
                 <a:latin typeface="Calibri" pitchFamily="34" charset="0"/>
                 <a:ea typeface="Calibri" pitchFamily="34" charset="-122"/>
@@ -11285,7 +11265,7 @@
       </p:sp>
       <p:sp>
         <p:nvSpPr>
-          <p:cNvPr id="8" name="Shape 6"/>
+          <p:cNvPr id="6" name="Shape 4"/>
           <p:cNvSpPr/>
           <p:nvPr/>
         </p:nvSpPr>
@@ -11300,7 +11280,7 @@
           <a:noFill/>
           <a:ln w="9525">
             <a:solidFill>
-              <a:srgbClr val="5C708A">
+              <a:srgbClr val="A89A86">
                 <a:alpha val="60000"/>
               </a:srgbClr>
             </a:solidFill>
@@ -11310,7 +11290,7 @@
       </p:sp>
       <p:sp>
         <p:nvSpPr>
-          <p:cNvPr id="9" name="Text 7"/>
+          <p:cNvPr id="7" name="Text 5"/>
           <p:cNvSpPr/>
           <p:nvPr/>
         </p:nvSpPr>
@@ -11335,7 +11315,7 @@
             <a:r>
               <a:rPr lang="en-US" sz="900" dirty="0">
                 <a:solidFill>
-                  <a:srgbClr val="5C708A"/>
+                  <a:srgbClr val="A89A86"/>
                 </a:solidFill>
                 <a:latin typeface="Calibri" pitchFamily="34" charset="0"/>
                 <a:ea typeface="Calibri" pitchFamily="34" charset="-122"/>
@@ -11349,7 +11329,7 @@
       </p:sp>
       <p:sp>
         <p:nvSpPr>
-          <p:cNvPr id="10" name="Text 8"/>
+          <p:cNvPr id="8" name="Text 6"/>
           <p:cNvSpPr/>
           <p:nvPr/>
         </p:nvSpPr>
@@ -11374,7 +11354,7 @@
             <a:r>
               <a:rPr lang="en-US" sz="900" dirty="0">
                 <a:solidFill>
-                  <a:srgbClr val="5C708A"/>
+                  <a:srgbClr val="A89A86"/>
                 </a:solidFill>
                 <a:latin typeface="Calibri" pitchFamily="34" charset="0"/>
                 <a:ea typeface="Calibri" pitchFamily="34" charset="-122"/>
@@ -11400,7 +11380,7 @@
     <p:bg>
       <p:bgPr>
         <a:solidFill>
-          <a:srgbClr val="0B1D33"/>
+          <a:srgbClr val="F8F6F3"/>
         </a:solidFill>
       </p:bgPr>
     </p:bg>
@@ -11420,51 +11400,7 @@
       </p:grpSpPr>
       <p:sp>
         <p:nvSpPr>
-          <p:cNvPr id="2" name="Shape 0"/>
-          <p:cNvSpPr/>
-          <p:nvPr/>
-        </p:nvSpPr>
-        <p:spPr>
-          <a:xfrm>
-            <a:off x="8229600" y="-1463040"/>
-            <a:ext cx="5486400" cy="5486400"/>
-          </a:xfrm>
-          <a:prstGeom prst="ellipse">
-            <a:avLst/>
-          </a:prstGeom>
-          <a:solidFill>
-            <a:srgbClr val="4A9EFF">
-              <a:alpha val="10000"/>
-            </a:srgbClr>
-          </a:solidFill>
-          <a:ln/>
-        </p:spPr>
-      </p:sp>
-      <p:sp>
-        <p:nvSpPr>
-          <p:cNvPr id="3" name="Shape 1"/>
-          <p:cNvSpPr/>
-          <p:nvPr/>
-        </p:nvSpPr>
-        <p:spPr>
-          <a:xfrm>
-            <a:off x="-1463040" y="4206240"/>
-            <a:ext cx="4572000" cy="4572000"/>
-          </a:xfrm>
-          <a:prstGeom prst="ellipse">
-            <a:avLst/>
-          </a:prstGeom>
-          <a:solidFill>
-            <a:srgbClr val="C9A961">
-              <a:alpha val="8000"/>
-            </a:srgbClr>
-          </a:solidFill>
-          <a:ln/>
-        </p:spPr>
-      </p:sp>
-      <p:sp>
-        <p:nvSpPr>
-          <p:cNvPr id="4" name="Text 2"/>
+          <p:cNvPr id="2" name="Text 0"/>
           <p:cNvSpPr/>
           <p:nvPr/>
         </p:nvSpPr>
@@ -11489,7 +11425,7 @@
             <a:r>
               <a:rPr lang="en-US" sz="1200" b="1" spc="300" kern="0" dirty="0">
                 <a:solidFill>
-                  <a:srgbClr val="4A9EFF"/>
+                  <a:srgbClr val="9A7B66"/>
                 </a:solidFill>
                 <a:latin typeface="Calibri" pitchFamily="34" charset="0"/>
                 <a:ea typeface="Calibri" pitchFamily="34" charset="-122"/>
@@ -11503,7 +11439,7 @@
       </p:sp>
       <p:sp>
         <p:nvSpPr>
-          <p:cNvPr id="5" name="Shape 3"/>
+          <p:cNvPr id="3" name="Shape 1"/>
           <p:cNvSpPr/>
           <p:nvPr/>
         </p:nvSpPr>
@@ -11516,14 +11452,19 @@
             <a:avLst/>
           </a:prstGeom>
           <a:solidFill>
-            <a:srgbClr val="16314F"/>
+            <a:srgbClr val="EADFD0"/>
           </a:solidFill>
-          <a:ln/>
+          <a:ln w="9525">
+            <a:solidFill>
+              <a:srgbClr val="E3D9CC"/>
+            </a:solidFill>
+            <a:prstDash val="solid"/>
+          </a:ln>
         </p:spPr>
       </p:sp>
       <p:pic>
         <p:nvPicPr>
-          <p:cNvPr id="6" name="Image 0" descr="preencoded.png">    </p:cNvPr>
+          <p:cNvPr id="4" name="Image 0" descr="preencoded.png">    </p:cNvPr>
           <p:cNvPicPr>
             <a:picLocks noChangeAspect="1"/>
           </p:cNvPicPr>
@@ -11547,7 +11488,7 @@
       </p:pic>
       <p:sp>
         <p:nvSpPr>
-          <p:cNvPr id="7" name="Text 4"/>
+          <p:cNvPr id="5" name="Text 2"/>
           <p:cNvSpPr/>
           <p:nvPr/>
         </p:nvSpPr>
@@ -11575,11 +11516,11 @@
             <a:r>
               <a:rPr lang="en-US" sz="3000" b="1" i="1" dirty="0">
                 <a:solidFill>
-                  <a:srgbClr val="EAF1FA"/>
-                </a:solidFill>
-                <a:latin typeface="Bookman Old Style" pitchFamily="34" charset="0"/>
-                <a:ea typeface="Bookman Old Style" pitchFamily="34" charset="-122"/>
-                <a:cs typeface="Bookman Old Style" pitchFamily="34" charset="-120"/>
+                  <a:srgbClr val="33302B"/>
+                </a:solidFill>
+                <a:latin typeface="Georgia" pitchFamily="34" charset="0"/>
+                <a:ea typeface="Georgia" pitchFamily="34" charset="-122"/>
+                <a:cs typeface="Georgia" pitchFamily="34" charset="-120"/>
               </a:rPr>
               <a:t>Um preço único deixa o casal sem ponto de referência.</a:t>
             </a:r>
@@ -11589,7 +11530,7 @@
       </p:sp>
       <p:sp>
         <p:nvSpPr>
-          <p:cNvPr id="8" name="Text 5"/>
+          <p:cNvPr id="6" name="Text 3"/>
           <p:cNvSpPr/>
           <p:nvPr/>
         </p:nvSpPr>
@@ -11614,7 +11555,7 @@
             <a:r>
               <a:rPr lang="en-US" sz="1600" dirty="0">
                 <a:solidFill>
-                  <a:srgbClr val="9FB2C9"/>
+                  <a:srgbClr val="8A7E72"/>
                 </a:solidFill>
                 <a:latin typeface="Calibri" pitchFamily="34" charset="0"/>
                 <a:ea typeface="Calibri" pitchFamily="34" charset="-122"/>
@@ -11628,7 +11569,7 @@
       </p:sp>
       <p:sp>
         <p:nvSpPr>
-          <p:cNvPr id="9" name="Shape 6"/>
+          <p:cNvPr id="7" name="Shape 4"/>
           <p:cNvSpPr/>
           <p:nvPr/>
         </p:nvSpPr>
@@ -11643,7 +11584,7 @@
           <a:noFill/>
           <a:ln w="9525">
             <a:solidFill>
-              <a:srgbClr val="5C708A">
+              <a:srgbClr val="A89A86">
                 <a:alpha val="60000"/>
               </a:srgbClr>
             </a:solidFill>
@@ -11653,7 +11594,7 @@
       </p:sp>
       <p:sp>
         <p:nvSpPr>
-          <p:cNvPr id="10" name="Text 7"/>
+          <p:cNvPr id="8" name="Text 5"/>
           <p:cNvSpPr/>
           <p:nvPr/>
         </p:nvSpPr>
@@ -11678,7 +11619,7 @@
             <a:r>
               <a:rPr lang="en-US" sz="900" dirty="0">
                 <a:solidFill>
-                  <a:srgbClr val="5C708A"/>
+                  <a:srgbClr val="A89A86"/>
                 </a:solidFill>
                 <a:latin typeface="Calibri" pitchFamily="34" charset="0"/>
                 <a:ea typeface="Calibri" pitchFamily="34" charset="-122"/>
@@ -11692,7 +11633,7 @@
       </p:sp>
       <p:sp>
         <p:nvSpPr>
-          <p:cNvPr id="11" name="Text 8"/>
+          <p:cNvPr id="9" name="Text 6"/>
           <p:cNvSpPr/>
           <p:nvPr/>
         </p:nvSpPr>
@@ -11717,7 +11658,7 @@
             <a:r>
               <a:rPr lang="en-US" sz="900" dirty="0">
                 <a:solidFill>
-                  <a:srgbClr val="5C708A"/>
+                  <a:srgbClr val="A89A86"/>
                 </a:solidFill>
                 <a:latin typeface="Calibri" pitchFamily="34" charset="0"/>
                 <a:ea typeface="Calibri" pitchFamily="34" charset="-122"/>
@@ -11743,7 +11684,7 @@
     <p:bg>
       <p:bgPr>
         <a:solidFill>
-          <a:srgbClr val="0B1D33"/>
+          <a:srgbClr val="F8F6F3"/>
         </a:solidFill>
       </p:bgPr>
     </p:bg>
@@ -11788,7 +11729,7 @@
             <a:r>
               <a:rPr lang="en-US" sz="1200" b="1" spc="300" kern="0" dirty="0">
                 <a:solidFill>
-                  <a:srgbClr val="4A9EFF"/>
+                  <a:srgbClr val="9A7B66"/>
                 </a:solidFill>
                 <a:latin typeface="Calibri" pitchFamily="34" charset="0"/>
                 <a:ea typeface="Calibri" pitchFamily="34" charset="-122"/>
@@ -11830,11 +11771,11 @@
             <a:r>
               <a:rPr lang="en-US" sz="3000" b="1" dirty="0">
                 <a:solidFill>
-                  <a:srgbClr val="EAF1FA"/>
-                </a:solidFill>
-                <a:latin typeface="Bookman Old Style" pitchFamily="34" charset="0"/>
-                <a:ea typeface="Bookman Old Style" pitchFamily="34" charset="-122"/>
-                <a:cs typeface="Bookman Old Style" pitchFamily="34" charset="-120"/>
+                  <a:srgbClr val="33302B"/>
+                </a:solidFill>
+                <a:latin typeface="Georgia" pitchFamily="34" charset="0"/>
+                <a:ea typeface="Georgia" pitchFamily="34" charset="-122"/>
+                <a:cs typeface="Georgia" pitchFamily="34" charset="-120"/>
               </a:rPr>
               <a:t>Três níveis</a:t>
             </a:r>
@@ -11859,13 +11800,18 @@
             </a:avLst>
           </a:prstGeom>
           <a:solidFill>
-            <a:srgbClr val="13283F"/>
+            <a:srgbClr val="FFFFFF"/>
           </a:solidFill>
-          <a:ln/>
+          <a:ln w="12700">
+            <a:solidFill>
+              <a:srgbClr val="E3D9CC"/>
+            </a:solidFill>
+            <a:prstDash val="solid"/>
+          </a:ln>
           <a:effectLst>
-            <a:outerShdw sx="100000" sy="100000" kx="0" ky="0" algn="bl" rotWithShape="0" blurRad="127000" dist="38100" dir="5400000">
-              <a:srgbClr val="000000">
-                <a:alpha val="28000"/>
+            <a:outerShdw sx="100000" sy="100000" kx="0" ky="0" algn="bl" rotWithShape="0" blurRad="114300" dist="38100" dir="5400000">
+              <a:srgbClr val="7A6A55">
+                <a:alpha val="12000"/>
               </a:srgbClr>
             </a:outerShdw>
           </a:effectLst>
@@ -11886,9 +11832,14 @@
             <a:avLst/>
           </a:prstGeom>
           <a:solidFill>
-            <a:srgbClr val="16314F"/>
+            <a:srgbClr val="EADFD0"/>
           </a:solidFill>
-          <a:ln/>
+          <a:ln w="9525">
+            <a:solidFill>
+              <a:srgbClr val="E3D9CC"/>
+            </a:solidFill>
+            <a:prstDash val="solid"/>
+          </a:ln>
         </p:spPr>
       </p:sp>
       <p:pic>
@@ -11942,11 +11893,11 @@
             <a:r>
               <a:rPr lang="en-US" sz="1700" b="1" dirty="0">
                 <a:solidFill>
-                  <a:srgbClr val="EAF1FA"/>
-                </a:solidFill>
-                <a:latin typeface="Bookman Old Style" pitchFamily="34" charset="0"/>
-                <a:ea typeface="Bookman Old Style" pitchFamily="34" charset="-122"/>
-                <a:cs typeface="Bookman Old Style" pitchFamily="34" charset="-120"/>
+                  <a:srgbClr val="33302B"/>
+                </a:solidFill>
+                <a:latin typeface="Georgia" pitchFamily="34" charset="0"/>
+                <a:ea typeface="Georgia" pitchFamily="34" charset="-122"/>
+                <a:cs typeface="Georgia" pitchFamily="34" charset="-120"/>
               </a:rPr>
               <a:t>Essencial</a:t>
             </a:r>
@@ -11981,7 +11932,7 @@
             <a:r>
               <a:rPr lang="en-US" sz="1250" dirty="0">
                 <a:solidFill>
-                  <a:srgbClr val="9FB2C9"/>
+                  <a:srgbClr val="8A7E72"/>
                 </a:solidFill>
                 <a:latin typeface="Calibri" pitchFamily="34" charset="0"/>
                 <a:ea typeface="Calibri" pitchFamily="34" charset="-122"/>
@@ -12034,13 +11985,18 @@
             </a:avLst>
           </a:prstGeom>
           <a:solidFill>
-            <a:srgbClr val="13283F"/>
+            <a:srgbClr val="FFFFFF"/>
           </a:solidFill>
-          <a:ln/>
+          <a:ln w="12700">
+            <a:solidFill>
+              <a:srgbClr val="E3D9CC"/>
+            </a:solidFill>
+            <a:prstDash val="solid"/>
+          </a:ln>
           <a:effectLst>
-            <a:outerShdw sx="100000" sy="100000" kx="0" ky="0" algn="bl" rotWithShape="0" blurRad="127000" dist="38100" dir="5400000">
-              <a:srgbClr val="000000">
-                <a:alpha val="28000"/>
+            <a:outerShdw sx="100000" sy="100000" kx="0" ky="0" algn="bl" rotWithShape="0" blurRad="114300" dist="38100" dir="5400000">
+              <a:srgbClr val="7A6A55">
+                <a:alpha val="12000"/>
               </a:srgbClr>
             </a:outerShdw>
           </a:effectLst>
@@ -12061,9 +12017,14 @@
             <a:avLst/>
           </a:prstGeom>
           <a:solidFill>
-            <a:srgbClr val="16314F"/>
+            <a:srgbClr val="EADFD0"/>
           </a:solidFill>
-          <a:ln/>
+          <a:ln w="9525">
+            <a:solidFill>
+              <a:srgbClr val="E3D9CC"/>
+            </a:solidFill>
+            <a:prstDash val="solid"/>
+          </a:ln>
         </p:spPr>
       </p:sp>
       <p:pic>
@@ -12117,11 +12078,11 @@
             <a:r>
               <a:rPr lang="en-US" sz="1700" b="1" dirty="0">
                 <a:solidFill>
-                  <a:srgbClr val="EAF1FA"/>
-                </a:solidFill>
-                <a:latin typeface="Bookman Old Style" pitchFamily="34" charset="0"/>
-                <a:ea typeface="Bookman Old Style" pitchFamily="34" charset="-122"/>
-                <a:cs typeface="Bookman Old Style" pitchFamily="34" charset="-120"/>
+                  <a:srgbClr val="33302B"/>
+                </a:solidFill>
+                <a:latin typeface="Georgia" pitchFamily="34" charset="0"/>
+                <a:ea typeface="Georgia" pitchFamily="34" charset="-122"/>
+                <a:cs typeface="Georgia" pitchFamily="34" charset="-120"/>
               </a:rPr>
               <a:t>Completo</a:t>
             </a:r>
@@ -12156,7 +12117,7 @@
             <a:r>
               <a:rPr lang="en-US" sz="1250" dirty="0">
                 <a:solidFill>
-                  <a:srgbClr val="9FB2C9"/>
+                  <a:srgbClr val="8A7E72"/>
                 </a:solidFill>
                 <a:latin typeface="Calibri" pitchFamily="34" charset="0"/>
                 <a:ea typeface="Calibri" pitchFamily="34" charset="-122"/>
@@ -12209,13 +12170,18 @@
             </a:avLst>
           </a:prstGeom>
           <a:solidFill>
-            <a:srgbClr val="13283F"/>
+            <a:srgbClr val="FFFFFF"/>
           </a:solidFill>
-          <a:ln/>
+          <a:ln w="12700">
+            <a:solidFill>
+              <a:srgbClr val="E3D9CC"/>
+            </a:solidFill>
+            <a:prstDash val="solid"/>
+          </a:ln>
           <a:effectLst>
-            <a:outerShdw sx="100000" sy="100000" kx="0" ky="0" algn="bl" rotWithShape="0" blurRad="127000" dist="38100" dir="5400000">
-              <a:srgbClr val="000000">
-                <a:alpha val="28000"/>
+            <a:outerShdw sx="100000" sy="100000" kx="0" ky="0" algn="bl" rotWithShape="0" blurRad="114300" dist="38100" dir="5400000">
+              <a:srgbClr val="7A6A55">
+                <a:alpha val="12000"/>
               </a:srgbClr>
             </a:outerShdw>
           </a:effectLst>
@@ -12236,9 +12202,14 @@
             <a:avLst/>
           </a:prstGeom>
           <a:solidFill>
-            <a:srgbClr val="16314F"/>
+            <a:srgbClr val="EADFD0"/>
           </a:solidFill>
-          <a:ln/>
+          <a:ln w="9525">
+            <a:solidFill>
+              <a:srgbClr val="E3D9CC"/>
+            </a:solidFill>
+            <a:prstDash val="solid"/>
+          </a:ln>
         </p:spPr>
       </p:sp>
       <p:pic>
@@ -12292,11 +12263,11 @@
             <a:r>
               <a:rPr lang="en-US" sz="1700" b="1" dirty="0">
                 <a:solidFill>
-                  <a:srgbClr val="EAF1FA"/>
-                </a:solidFill>
-                <a:latin typeface="Bookman Old Style" pitchFamily="34" charset="0"/>
-                <a:ea typeface="Bookman Old Style" pitchFamily="34" charset="-122"/>
-                <a:cs typeface="Bookman Old Style" pitchFamily="34" charset="-120"/>
+                  <a:srgbClr val="33302B"/>
+                </a:solidFill>
+                <a:latin typeface="Georgia" pitchFamily="34" charset="0"/>
+                <a:ea typeface="Georgia" pitchFamily="34" charset="-122"/>
+                <a:cs typeface="Georgia" pitchFamily="34" charset="-120"/>
               </a:rPr>
               <a:t>Premium</a:t>
             </a:r>
@@ -12331,7 +12302,7 @@
             <a:r>
               <a:rPr lang="en-US" sz="1250" dirty="0">
                 <a:solidFill>
-                  <a:srgbClr val="9FB2C9"/>
+                  <a:srgbClr val="8A7E72"/>
                 </a:solidFill>
                 <a:latin typeface="Calibri" pitchFamily="34" charset="0"/>
                 <a:ea typeface="Calibri" pitchFamily="34" charset="-122"/>
@@ -12370,7 +12341,7 @@
             <a:r>
               <a:rPr lang="en-US" sz="1500" i="1" dirty="0">
                 <a:solidFill>
-                  <a:srgbClr val="C9A961"/>
+                  <a:srgbClr val="B1937E"/>
                 </a:solidFill>
                 <a:latin typeface="Calibri" pitchFamily="34" charset="0"/>
                 <a:ea typeface="Calibri" pitchFamily="34" charset="-122"/>
@@ -12399,7 +12370,7 @@
           <a:noFill/>
           <a:ln w="9525">
             <a:solidFill>
-              <a:srgbClr val="5C708A">
+              <a:srgbClr val="A89A86">
                 <a:alpha val="60000"/>
               </a:srgbClr>
             </a:solidFill>
@@ -12434,7 +12405,7 @@
             <a:r>
               <a:rPr lang="en-US" sz="900" dirty="0">
                 <a:solidFill>
-                  <a:srgbClr val="5C708A"/>
+                  <a:srgbClr val="A89A86"/>
                 </a:solidFill>
                 <a:latin typeface="Calibri" pitchFamily="34" charset="0"/>
                 <a:ea typeface="Calibri" pitchFamily="34" charset="-122"/>
@@ -12473,7 +12444,7 @@
             <a:r>
               <a:rPr lang="en-US" sz="900" dirty="0">
                 <a:solidFill>
-                  <a:srgbClr val="5C708A"/>
+                  <a:srgbClr val="A89A86"/>
                 </a:solidFill>
                 <a:latin typeface="Calibri" pitchFamily="34" charset="0"/>
                 <a:ea typeface="Calibri" pitchFamily="34" charset="-122"/>
@@ -12499,7 +12470,7 @@
     <p:bg>
       <p:bgPr>
         <a:solidFill>
-          <a:srgbClr val="0B1D33"/>
+          <a:srgbClr val="F8F6F3"/>
         </a:solidFill>
       </p:bgPr>
     </p:bg>
@@ -12544,7 +12515,7 @@
             <a:r>
               <a:rPr lang="en-US" sz="1200" b="1" spc="300" kern="0" dirty="0">
                 <a:solidFill>
-                  <a:srgbClr val="4A9EFF"/>
+                  <a:srgbClr val="9A7B66"/>
                 </a:solidFill>
                 <a:latin typeface="Calibri" pitchFamily="34" charset="0"/>
                 <a:ea typeface="Calibri" pitchFamily="34" charset="-122"/>
@@ -12586,11 +12557,11 @@
             <a:r>
               <a:rPr lang="en-US" sz="3200" b="1" dirty="0">
                 <a:solidFill>
-                  <a:srgbClr val="EAF1FA"/>
-                </a:solidFill>
-                <a:latin typeface="Bookman Old Style" pitchFamily="34" charset="0"/>
-                <a:ea typeface="Bookman Old Style" pitchFamily="34" charset="-122"/>
-                <a:cs typeface="Bookman Old Style" pitchFamily="34" charset="-120"/>
+                  <a:srgbClr val="33302B"/>
+                </a:solidFill>
+                <a:latin typeface="Georgia" pitchFamily="34" charset="0"/>
+                <a:ea typeface="Georgia" pitchFamily="34" charset="-122"/>
+                <a:cs typeface="Georgia" pitchFamily="34" charset="-120"/>
               </a:rPr>
               <a:t>Desenhar o pack do meio para vencer</a:t>
             </a:r>
@@ -12615,13 +12586,18 @@
             </a:avLst>
           </a:prstGeom>
           <a:solidFill>
-            <a:srgbClr val="13283F"/>
+            <a:srgbClr val="FFFFFF"/>
           </a:solidFill>
-          <a:ln/>
+          <a:ln w="12700">
+            <a:solidFill>
+              <a:srgbClr val="E3D9CC"/>
+            </a:solidFill>
+            <a:prstDash val="solid"/>
+          </a:ln>
           <a:effectLst>
-            <a:outerShdw sx="100000" sy="100000" kx="0" ky="0" algn="bl" rotWithShape="0" blurRad="127000" dist="38100" dir="5400000">
-              <a:srgbClr val="000000">
-                <a:alpha val="28000"/>
+            <a:outerShdw sx="100000" sy="100000" kx="0" ky="0" algn="bl" rotWithShape="0" blurRad="114300" dist="38100" dir="5400000">
+              <a:srgbClr val="7A6A55">
+                <a:alpha val="12000"/>
               </a:srgbClr>
             </a:outerShdw>
           </a:effectLst>
@@ -12642,9 +12618,14 @@
             <a:avLst/>
           </a:prstGeom>
           <a:solidFill>
-            <a:srgbClr val="16314F"/>
+            <a:srgbClr val="EADFD0"/>
           </a:solidFill>
-          <a:ln/>
+          <a:ln w="9525">
+            <a:solidFill>
+              <a:srgbClr val="E3D9CC"/>
+            </a:solidFill>
+            <a:prstDash val="solid"/>
+          </a:ln>
         </p:spPr>
       </p:sp>
       <p:pic>
@@ -12698,11 +12679,11 @@
             <a:r>
               <a:rPr lang="en-US" sz="1900" b="1" dirty="0">
                 <a:solidFill>
-                  <a:srgbClr val="C9A961"/>
-                </a:solidFill>
-                <a:latin typeface="Bookman Old Style" pitchFamily="34" charset="0"/>
-                <a:ea typeface="Bookman Old Style" pitchFamily="34" charset="-122"/>
-                <a:cs typeface="Bookman Old Style" pitchFamily="34" charset="-120"/>
+                  <a:srgbClr val="B1937E"/>
+                </a:solidFill>
+                <a:latin typeface="Georgia" pitchFamily="34" charset="0"/>
+                <a:ea typeface="Georgia" pitchFamily="34" charset="-122"/>
+                <a:cs typeface="Georgia" pitchFamily="34" charset="-120"/>
               </a:rPr>
               <a:t>Põe lá o que mais valorizam</a:t>
             </a:r>
@@ -12737,7 +12718,7 @@
             <a:r>
               <a:rPr lang="en-US" sz="1400" dirty="0">
                 <a:solidFill>
-                  <a:srgbClr val="9FB2C9"/>
+                  <a:srgbClr val="8A7E72"/>
                 </a:solidFill>
                 <a:latin typeface="Calibri" pitchFamily="34" charset="0"/>
                 <a:ea typeface="Calibri" pitchFamily="34" charset="-122"/>
@@ -12766,13 +12747,18 @@
             </a:avLst>
           </a:prstGeom>
           <a:solidFill>
-            <a:srgbClr val="13283F"/>
+            <a:srgbClr val="FFFFFF"/>
           </a:solidFill>
-          <a:ln/>
+          <a:ln w="12700">
+            <a:solidFill>
+              <a:srgbClr val="E3D9CC"/>
+            </a:solidFill>
+            <a:prstDash val="solid"/>
+          </a:ln>
           <a:effectLst>
-            <a:outerShdw sx="100000" sy="100000" kx="0" ky="0" algn="bl" rotWithShape="0" blurRad="127000" dist="38100" dir="5400000">
-              <a:srgbClr val="000000">
-                <a:alpha val="28000"/>
+            <a:outerShdw sx="100000" sy="100000" kx="0" ky="0" algn="bl" rotWithShape="0" blurRad="114300" dist="38100" dir="5400000">
+              <a:srgbClr val="7A6A55">
+                <a:alpha val="12000"/>
               </a:srgbClr>
             </a:outerShdw>
           </a:effectLst>
@@ -12793,9 +12779,14 @@
             <a:avLst/>
           </a:prstGeom>
           <a:solidFill>
-            <a:srgbClr val="16314F"/>
+            <a:srgbClr val="EADFD0"/>
           </a:solidFill>
-          <a:ln/>
+          <a:ln w="9525">
+            <a:solidFill>
+              <a:srgbClr val="E3D9CC"/>
+            </a:solidFill>
+            <a:prstDash val="solid"/>
+          </a:ln>
         </p:spPr>
       </p:sp>
       <p:pic>
@@ -12849,11 +12840,11 @@
             <a:r>
               <a:rPr lang="en-US" sz="1900" b="1" dirty="0">
                 <a:solidFill>
-                  <a:srgbClr val="C9A961"/>
-                </a:solidFill>
-                <a:latin typeface="Bookman Old Style" pitchFamily="34" charset="0"/>
-                <a:ea typeface="Bookman Old Style" pitchFamily="34" charset="-122"/>
-                <a:cs typeface="Bookman Old Style" pitchFamily="34" charset="-120"/>
+                  <a:srgbClr val="B1937E"/>
+                </a:solidFill>
+                <a:latin typeface="Georgia" pitchFamily="34" charset="0"/>
+                <a:ea typeface="Georgia" pitchFamily="34" charset="-122"/>
+                <a:cs typeface="Georgia" pitchFamily="34" charset="-120"/>
               </a:rPr>
               <a:t>Preço que parece generoso</a:t>
             </a:r>
@@ -12888,7 +12879,7 @@
             <a:r>
               <a:rPr lang="en-US" sz="1400" dirty="0">
                 <a:solidFill>
-                  <a:srgbClr val="9FB2C9"/>
+                  <a:srgbClr val="8A7E72"/>
                 </a:solidFill>
                 <a:latin typeface="Calibri" pitchFamily="34" charset="0"/>
                 <a:ea typeface="Calibri" pitchFamily="34" charset="-122"/>
@@ -12917,13 +12908,18 @@
             </a:avLst>
           </a:prstGeom>
           <a:solidFill>
-            <a:srgbClr val="13283F"/>
+            <a:srgbClr val="FFFFFF"/>
           </a:solidFill>
-          <a:ln/>
+          <a:ln w="12700">
+            <a:solidFill>
+              <a:srgbClr val="E3D9CC"/>
+            </a:solidFill>
+            <a:prstDash val="solid"/>
+          </a:ln>
           <a:effectLst>
-            <a:outerShdw sx="100000" sy="100000" kx="0" ky="0" algn="bl" rotWithShape="0" blurRad="127000" dist="38100" dir="5400000">
-              <a:srgbClr val="000000">
-                <a:alpha val="28000"/>
+            <a:outerShdw sx="100000" sy="100000" kx="0" ky="0" algn="bl" rotWithShape="0" blurRad="114300" dist="38100" dir="5400000">
+              <a:srgbClr val="7A6A55">
+                <a:alpha val="12000"/>
               </a:srgbClr>
             </a:outerShdw>
           </a:effectLst>
@@ -12944,9 +12940,14 @@
             <a:avLst/>
           </a:prstGeom>
           <a:solidFill>
-            <a:srgbClr val="16314F"/>
+            <a:srgbClr val="EADFD0"/>
           </a:solidFill>
-          <a:ln/>
+          <a:ln w="9525">
+            <a:solidFill>
+              <a:srgbClr val="E3D9CC"/>
+            </a:solidFill>
+            <a:prstDash val="solid"/>
+          </a:ln>
         </p:spPr>
       </p:sp>
       <p:pic>
@@ -13000,11 +13001,11 @@
             <a:r>
               <a:rPr lang="en-US" sz="1900" b="1" dirty="0">
                 <a:solidFill>
-                  <a:srgbClr val="C9A961"/>
-                </a:solidFill>
-                <a:latin typeface="Bookman Old Style" pitchFamily="34" charset="0"/>
-                <a:ea typeface="Bookman Old Style" pitchFamily="34" charset="-122"/>
-                <a:cs typeface="Bookman Old Style" pitchFamily="34" charset="-120"/>
+                  <a:srgbClr val="B1937E"/>
+                </a:solidFill>
+                <a:latin typeface="Georgia" pitchFamily="34" charset="0"/>
+                <a:ea typeface="Georgia" pitchFamily="34" charset="-122"/>
+                <a:cs typeface="Georgia" pitchFamily="34" charset="-120"/>
               </a:rPr>
               <a:t>A escolha óbvia</a:t>
             </a:r>
@@ -13039,7 +13040,7 @@
             <a:r>
               <a:rPr lang="en-US" sz="1400" dirty="0">
                 <a:solidFill>
-                  <a:srgbClr val="9FB2C9"/>
+                  <a:srgbClr val="8A7E72"/>
                 </a:solidFill>
                 <a:latin typeface="Calibri" pitchFamily="34" charset="0"/>
                 <a:ea typeface="Calibri" pitchFamily="34" charset="-122"/>
@@ -13068,7 +13069,7 @@
           <a:noFill/>
           <a:ln w="9525">
             <a:solidFill>
-              <a:srgbClr val="5C708A">
+              <a:srgbClr val="A89A86">
                 <a:alpha val="60000"/>
               </a:srgbClr>
             </a:solidFill>
@@ -13103,7 +13104,7 @@
             <a:r>
               <a:rPr lang="en-US" sz="900" dirty="0">
                 <a:solidFill>
-                  <a:srgbClr val="5C708A"/>
+                  <a:srgbClr val="A89A86"/>
                 </a:solidFill>
                 <a:latin typeface="Calibri" pitchFamily="34" charset="0"/>
                 <a:ea typeface="Calibri" pitchFamily="34" charset="-122"/>
@@ -13142,7 +13143,7 @@
             <a:r>
               <a:rPr lang="en-US" sz="900" dirty="0">
                 <a:solidFill>
-                  <a:srgbClr val="5C708A"/>
+                  <a:srgbClr val="A89A86"/>
                 </a:solidFill>
                 <a:latin typeface="Calibri" pitchFamily="34" charset="0"/>
                 <a:ea typeface="Calibri" pitchFamily="34" charset="-122"/>
@@ -13168,7 +13169,7 @@
     <p:bg>
       <p:bgPr>
         <a:solidFill>
-          <a:srgbClr val="102844"/>
+          <a:srgbClr val="EFE7DE"/>
         </a:solidFill>
       </p:bgPr>
     </p:bg>
@@ -13213,7 +13214,7 @@
             <a:r>
               <a:rPr lang="en-US" sz="1200" b="1" spc="300" kern="0" dirty="0">
                 <a:solidFill>
-                  <a:srgbClr val="C9A961"/>
+                  <a:srgbClr val="B1937E"/>
                 </a:solidFill>
                 <a:latin typeface="Calibri" pitchFamily="34" charset="0"/>
                 <a:ea typeface="Calibri" pitchFamily="34" charset="-122"/>
@@ -13255,11 +13256,11 @@
             <a:r>
               <a:rPr lang="en-US" sz="3400" b="1" dirty="0">
                 <a:solidFill>
-                  <a:srgbClr val="EAF1FA"/>
-                </a:solidFill>
-                <a:latin typeface="Bookman Old Style" pitchFamily="34" charset="0"/>
-                <a:ea typeface="Bookman Old Style" pitchFamily="34" charset="-122"/>
-                <a:cs typeface="Bookman Old Style" pitchFamily="34" charset="-120"/>
+                  <a:srgbClr val="33302B"/>
+                </a:solidFill>
+                <a:latin typeface="Georgia" pitchFamily="34" charset="0"/>
+                <a:ea typeface="Georgia" pitchFamily="34" charset="-122"/>
+                <a:cs typeface="Georgia" pitchFamily="34" charset="-120"/>
               </a:rPr>
               <a:t>O efeito do pack premium</a:t>
             </a:r>
@@ -13284,20 +13285,20 @@
             </a:avLst>
           </a:prstGeom>
           <a:solidFill>
-            <a:srgbClr val="13283F"/>
+            <a:srgbClr val="FFFFFF"/>
           </a:solidFill>
           <a:ln w="9525">
             <a:solidFill>
-              <a:srgbClr val="9FB2C9">
+              <a:srgbClr val="8A7E72">
                 <a:alpha val="50000"/>
               </a:srgbClr>
             </a:solidFill>
             <a:prstDash val="solid"/>
           </a:ln>
           <a:effectLst>
-            <a:outerShdw sx="100000" sy="100000" kx="0" ky="0" algn="bl" rotWithShape="0" blurRad="127000" dist="38100" dir="5400000">
-              <a:srgbClr val="000000">
-                <a:alpha val="28000"/>
+            <a:outerShdw sx="100000" sy="100000" kx="0" ky="0" algn="bl" rotWithShape="0" blurRad="114300" dist="38100" dir="5400000">
+              <a:srgbClr val="7A6A55">
+                <a:alpha val="12000"/>
               </a:srgbClr>
             </a:outerShdw>
           </a:effectLst>
@@ -13330,7 +13331,7 @@
             <a:r>
               <a:rPr lang="en-US" sz="1300" b="1" spc="300" kern="0" dirty="0">
                 <a:solidFill>
-                  <a:srgbClr val="9FB2C9"/>
+                  <a:srgbClr val="8A7E72"/>
                 </a:solidFill>
                 <a:latin typeface="Calibri" pitchFamily="34" charset="0"/>
                 <a:ea typeface="Calibri" pitchFamily="34" charset="-122"/>
@@ -13372,7 +13373,7 @@
             <a:r>
               <a:rPr lang="en-US" sz="1600" b="1" dirty="0">
                 <a:solidFill>
-                  <a:srgbClr val="9FB2C9"/>
+                  <a:srgbClr val="8A7E72"/>
                 </a:solidFill>
                 <a:latin typeface="Calibri" pitchFamily="34" charset="0"/>
                 <a:ea typeface="Calibri" pitchFamily="34" charset="-122"/>
@@ -13392,7 +13393,7 @@
             <a:r>
               <a:rPr lang="en-US" sz="1500" dirty="0">
                 <a:solidFill>
-                  <a:srgbClr val="9FB2C9"/>
+                  <a:srgbClr val="8A7E72"/>
                 </a:solidFill>
                 <a:latin typeface="Calibri" pitchFamily="34" charset="0"/>
                 <a:ea typeface="Calibri" pitchFamily="34" charset="-122"/>
@@ -13412,7 +13413,7 @@
             <a:r>
               <a:rPr lang="en-US" sz="1500" dirty="0">
                 <a:solidFill>
-                  <a:srgbClr val="9FB2C9"/>
+                  <a:srgbClr val="8A7E72"/>
                 </a:solidFill>
                 <a:latin typeface="Calibri" pitchFamily="34" charset="0"/>
                 <a:ea typeface="Calibri" pitchFamily="34" charset="-122"/>
@@ -13429,7 +13430,7 @@
             <a:r>
               <a:rPr lang="en-US" sz="1400" i="1" dirty="0">
                 <a:solidFill>
-                  <a:srgbClr val="9FB2C9"/>
+                  <a:srgbClr val="8A7E72"/>
                 </a:solidFill>
                 <a:latin typeface="Calibri" pitchFamily="34" charset="0"/>
                 <a:ea typeface="Calibri" pitchFamily="34" charset="-122"/>
@@ -13458,18 +13459,18 @@
             </a:avLst>
           </a:prstGeom>
           <a:solidFill>
-            <a:srgbClr val="16314F"/>
+            <a:srgbClr val="EADFD0"/>
           </a:solidFill>
           <a:ln w="19050">
             <a:solidFill>
-              <a:srgbClr val="C9A961"/>
+              <a:srgbClr val="B1937E"/>
             </a:solidFill>
             <a:prstDash val="solid"/>
           </a:ln>
           <a:effectLst>
-            <a:outerShdw sx="100000" sy="100000" kx="0" ky="0" algn="bl" rotWithShape="0" blurRad="127000" dist="38100" dir="5400000">
-              <a:srgbClr val="000000">
-                <a:alpha val="28000"/>
+            <a:outerShdw sx="100000" sy="100000" kx="0" ky="0" algn="bl" rotWithShape="0" blurRad="114300" dist="38100" dir="5400000">
+              <a:srgbClr val="7A6A55">
+                <a:alpha val="12000"/>
               </a:srgbClr>
             </a:outerShdw>
           </a:effectLst>
@@ -13502,7 +13503,7 @@
             <a:r>
               <a:rPr lang="en-US" sz="1300" b="1" spc="300" kern="0" dirty="0">
                 <a:solidFill>
-                  <a:srgbClr val="C9A961"/>
+                  <a:srgbClr val="B1937E"/>
                 </a:solidFill>
                 <a:latin typeface="Calibri" pitchFamily="34" charset="0"/>
                 <a:ea typeface="Calibri" pitchFamily="34" charset="-122"/>
@@ -13544,7 +13545,7 @@
             <a:r>
               <a:rPr lang="en-US" sz="1600" b="1" dirty="0">
                 <a:solidFill>
-                  <a:srgbClr val="EAF1FA"/>
+                  <a:srgbClr val="33302B"/>
                 </a:solidFill>
                 <a:latin typeface="Calibri" pitchFamily="34" charset="0"/>
                 <a:ea typeface="Calibri" pitchFamily="34" charset="-122"/>
@@ -13564,7 +13565,7 @@
             <a:r>
               <a:rPr lang="en-US" sz="1500" dirty="0">
                 <a:solidFill>
-                  <a:srgbClr val="EAF1FA"/>
+                  <a:srgbClr val="33302B"/>
                 </a:solidFill>
                 <a:latin typeface="Calibri" pitchFamily="34" charset="0"/>
                 <a:ea typeface="Calibri" pitchFamily="34" charset="-122"/>
@@ -13584,7 +13585,7 @@
             <a:r>
               <a:rPr lang="en-US" sz="1500" dirty="0">
                 <a:solidFill>
-                  <a:srgbClr val="EAF1FA"/>
+                  <a:srgbClr val="33302B"/>
                 </a:solidFill>
                 <a:latin typeface="Calibri" pitchFamily="34" charset="0"/>
                 <a:ea typeface="Calibri" pitchFamily="34" charset="-122"/>
@@ -13601,7 +13602,7 @@
             <a:r>
               <a:rPr lang="en-US" sz="1400" i="1" dirty="0">
                 <a:solidFill>
-                  <a:srgbClr val="C9A961"/>
+                  <a:srgbClr val="B1937E"/>
                 </a:solidFill>
                 <a:latin typeface="Calibri" pitchFamily="34" charset="0"/>
                 <a:ea typeface="Calibri" pitchFamily="34" charset="-122"/>
@@ -13630,7 +13631,7 @@
           <a:noFill/>
           <a:ln w="9525">
             <a:solidFill>
-              <a:srgbClr val="5C708A">
+              <a:srgbClr val="A89A86">
                 <a:alpha val="60000"/>
               </a:srgbClr>
             </a:solidFill>
@@ -13665,7 +13666,7 @@
             <a:r>
               <a:rPr lang="en-US" sz="900" dirty="0">
                 <a:solidFill>
-                  <a:srgbClr val="5C708A"/>
+                  <a:srgbClr val="A89A86"/>
                 </a:solidFill>
                 <a:latin typeface="Calibri" pitchFamily="34" charset="0"/>
                 <a:ea typeface="Calibri" pitchFamily="34" charset="-122"/>
@@ -13704,7 +13705,7 @@
             <a:r>
               <a:rPr lang="en-US" sz="900" dirty="0">
                 <a:solidFill>
-                  <a:srgbClr val="5C708A"/>
+                  <a:srgbClr val="A89A86"/>
                 </a:solidFill>
                 <a:latin typeface="Calibri" pitchFamily="34" charset="0"/>
                 <a:ea typeface="Calibri" pitchFamily="34" charset="-122"/>
@@ -13730,7 +13731,7 @@
     <p:bg>
       <p:bgPr>
         <a:solidFill>
-          <a:srgbClr val="0B1D33"/>
+          <a:srgbClr val="F8F6F3"/>
         </a:solidFill>
       </p:bgPr>
     </p:bg>
@@ -13775,7 +13776,7 @@
             <a:r>
               <a:rPr lang="en-US" sz="1200" b="1" spc="300" kern="0" dirty="0">
                 <a:solidFill>
-                  <a:srgbClr val="4A9EFF"/>
+                  <a:srgbClr val="9A7B66"/>
                 </a:solidFill>
                 <a:latin typeface="Calibri" pitchFamily="34" charset="0"/>
                 <a:ea typeface="Calibri" pitchFamily="34" charset="-122"/>
@@ -13817,11 +13818,11 @@
             <a:r>
               <a:rPr lang="en-US" sz="3200" b="1" dirty="0">
                 <a:solidFill>
-                  <a:srgbClr val="EAF1FA"/>
-                </a:solidFill>
-                <a:latin typeface="Bookman Old Style" pitchFamily="34" charset="0"/>
-                <a:ea typeface="Bookman Old Style" pitchFamily="34" charset="-122"/>
-                <a:cs typeface="Bookman Old Style" pitchFamily="34" charset="-120"/>
+                  <a:srgbClr val="33302B"/>
+                </a:solidFill>
+                <a:latin typeface="Georgia" pitchFamily="34" charset="0"/>
+                <a:ea typeface="Georgia" pitchFamily="34" charset="-122"/>
+                <a:cs typeface="Georgia" pitchFamily="34" charset="-120"/>
               </a:rPr>
               <a:t>Três packs bem desenhados</a:t>
             </a:r>
@@ -13846,13 +13847,18 @@
             </a:avLst>
           </a:prstGeom>
           <a:solidFill>
-            <a:srgbClr val="13283F"/>
+            <a:srgbClr val="FFFFFF"/>
           </a:solidFill>
-          <a:ln/>
+          <a:ln w="12700">
+            <a:solidFill>
+              <a:srgbClr val="E3D9CC"/>
+            </a:solidFill>
+            <a:prstDash val="solid"/>
+          </a:ln>
           <a:effectLst>
-            <a:outerShdw sx="100000" sy="100000" kx="0" ky="0" algn="bl" rotWithShape="0" blurRad="127000" dist="38100" dir="5400000">
-              <a:srgbClr val="000000">
-                <a:alpha val="28000"/>
+            <a:outerShdw sx="100000" sy="100000" kx="0" ky="0" algn="bl" rotWithShape="0" blurRad="114300" dist="38100" dir="5400000">
+              <a:srgbClr val="7A6A55">
+                <a:alpha val="12000"/>
               </a:srgbClr>
             </a:outerShdw>
           </a:effectLst>
@@ -13873,9 +13879,14 @@
             <a:avLst/>
           </a:prstGeom>
           <a:solidFill>
-            <a:srgbClr val="16314F"/>
+            <a:srgbClr val="EADFD0"/>
           </a:solidFill>
-          <a:ln/>
+          <a:ln w="9525">
+            <a:solidFill>
+              <a:srgbClr val="E3D9CC"/>
+            </a:solidFill>
+            <a:prstDash val="solid"/>
+          </a:ln>
         </p:spPr>
       </p:sp>
       <p:pic>
@@ -13929,11 +13940,11 @@
             <a:r>
               <a:rPr lang="en-US" sz="1800" b="1" dirty="0">
                 <a:solidFill>
-                  <a:srgbClr val="C9A961"/>
-                </a:solidFill>
-                <a:latin typeface="Bookman Old Style" pitchFamily="34" charset="0"/>
-                <a:ea typeface="Bookman Old Style" pitchFamily="34" charset="-122"/>
-                <a:cs typeface="Bookman Old Style" pitchFamily="34" charset="-120"/>
+                  <a:srgbClr val="B1937E"/>
+                </a:solidFill>
+                <a:latin typeface="Georgia" pitchFamily="34" charset="0"/>
+                <a:ea typeface="Georgia" pitchFamily="34" charset="-122"/>
+                <a:cs typeface="Georgia" pitchFamily="34" charset="-120"/>
               </a:rPr>
               <a:t>Essencial · 2.500€</a:t>
             </a:r>
@@ -13968,7 +13979,7 @@
             <a:r>
               <a:rPr lang="en-US" sz="1350" dirty="0">
                 <a:solidFill>
-                  <a:srgbClr val="9FB2C9"/>
+                  <a:srgbClr val="8A7E72"/>
                 </a:solidFill>
                 <a:latin typeface="Calibri" pitchFamily="34" charset="0"/>
                 <a:ea typeface="Calibri" pitchFamily="34" charset="-122"/>
@@ -13997,13 +14008,18 @@
             </a:avLst>
           </a:prstGeom>
           <a:solidFill>
-            <a:srgbClr val="13283F"/>
+            <a:srgbClr val="FFFFFF"/>
           </a:solidFill>
-          <a:ln/>
+          <a:ln w="12700">
+            <a:solidFill>
+              <a:srgbClr val="E3D9CC"/>
+            </a:solidFill>
+            <a:prstDash val="solid"/>
+          </a:ln>
           <a:effectLst>
-            <a:outerShdw sx="100000" sy="100000" kx="0" ky="0" algn="bl" rotWithShape="0" blurRad="127000" dist="38100" dir="5400000">
-              <a:srgbClr val="000000">
-                <a:alpha val="28000"/>
+            <a:outerShdw sx="100000" sy="100000" kx="0" ky="0" algn="bl" rotWithShape="0" blurRad="114300" dist="38100" dir="5400000">
+              <a:srgbClr val="7A6A55">
+                <a:alpha val="12000"/>
               </a:srgbClr>
             </a:outerShdw>
           </a:effectLst>
@@ -14024,9 +14040,14 @@
             <a:avLst/>
           </a:prstGeom>
           <a:solidFill>
-            <a:srgbClr val="16314F"/>
+            <a:srgbClr val="EADFD0"/>
           </a:solidFill>
-          <a:ln/>
+          <a:ln w="9525">
+            <a:solidFill>
+              <a:srgbClr val="E3D9CC"/>
+            </a:solidFill>
+            <a:prstDash val="solid"/>
+          </a:ln>
         </p:spPr>
       </p:sp>
       <p:pic>
@@ -14080,11 +14101,11 @@
             <a:r>
               <a:rPr lang="en-US" sz="1800" b="1" dirty="0">
                 <a:solidFill>
-                  <a:srgbClr val="C9A961"/>
-                </a:solidFill>
-                <a:latin typeface="Bookman Old Style" pitchFamily="34" charset="0"/>
-                <a:ea typeface="Bookman Old Style" pitchFamily="34" charset="-122"/>
-                <a:cs typeface="Bookman Old Style" pitchFamily="34" charset="-120"/>
+                  <a:srgbClr val="B1937E"/>
+                </a:solidFill>
+                <a:latin typeface="Georgia" pitchFamily="34" charset="0"/>
+                <a:ea typeface="Georgia" pitchFamily="34" charset="-122"/>
+                <a:cs typeface="Georgia" pitchFamily="34" charset="-120"/>
               </a:rPr>
               <a:t>Completo · 3.500€</a:t>
             </a:r>
@@ -14119,7 +14140,7 @@
             <a:r>
               <a:rPr lang="en-US" sz="1350" dirty="0">
                 <a:solidFill>
-                  <a:srgbClr val="9FB2C9"/>
+                  <a:srgbClr val="8A7E72"/>
                 </a:solidFill>
                 <a:latin typeface="Calibri" pitchFamily="34" charset="0"/>
                 <a:ea typeface="Calibri" pitchFamily="34" charset="-122"/>
@@ -14148,13 +14169,18 @@
             </a:avLst>
           </a:prstGeom>
           <a:solidFill>
-            <a:srgbClr val="13283F"/>
+            <a:srgbClr val="FFFFFF"/>
           </a:solidFill>
-          <a:ln/>
+          <a:ln w="12700">
+            <a:solidFill>
+              <a:srgbClr val="E3D9CC"/>
+            </a:solidFill>
+            <a:prstDash val="solid"/>
+          </a:ln>
           <a:effectLst>
-            <a:outerShdw sx="100000" sy="100000" kx="0" ky="0" algn="bl" rotWithShape="0" blurRad="127000" dist="38100" dir="5400000">
-              <a:srgbClr val="000000">
-                <a:alpha val="28000"/>
+            <a:outerShdw sx="100000" sy="100000" kx="0" ky="0" algn="bl" rotWithShape="0" blurRad="114300" dist="38100" dir="5400000">
+              <a:srgbClr val="7A6A55">
+                <a:alpha val="12000"/>
               </a:srgbClr>
             </a:outerShdw>
           </a:effectLst>
@@ -14175,9 +14201,14 @@
             <a:avLst/>
           </a:prstGeom>
           <a:solidFill>
-            <a:srgbClr val="16314F"/>
+            <a:srgbClr val="EADFD0"/>
           </a:solidFill>
-          <a:ln/>
+          <a:ln w="9525">
+            <a:solidFill>
+              <a:srgbClr val="E3D9CC"/>
+            </a:solidFill>
+            <a:prstDash val="solid"/>
+          </a:ln>
         </p:spPr>
       </p:sp>
       <p:pic>
@@ -14231,11 +14262,11 @@
             <a:r>
               <a:rPr lang="en-US" sz="1800" b="1" dirty="0">
                 <a:solidFill>
-                  <a:srgbClr val="C9A961"/>
-                </a:solidFill>
-                <a:latin typeface="Bookman Old Style" pitchFamily="34" charset="0"/>
-                <a:ea typeface="Bookman Old Style" pitchFamily="34" charset="-122"/>
-                <a:cs typeface="Bookman Old Style" pitchFamily="34" charset="-120"/>
+                  <a:srgbClr val="B1937E"/>
+                </a:solidFill>
+                <a:latin typeface="Georgia" pitchFamily="34" charset="0"/>
+                <a:ea typeface="Georgia" pitchFamily="34" charset="-122"/>
+                <a:cs typeface="Georgia" pitchFamily="34" charset="-120"/>
               </a:rPr>
               <a:t>Premium · 5.500€</a:t>
             </a:r>
@@ -14270,7 +14301,7 @@
             <a:r>
               <a:rPr lang="en-US" sz="1350" dirty="0">
                 <a:solidFill>
-                  <a:srgbClr val="9FB2C9"/>
+                  <a:srgbClr val="8A7E72"/>
                 </a:solidFill>
                 <a:latin typeface="Calibri" pitchFamily="34" charset="0"/>
                 <a:ea typeface="Calibri" pitchFamily="34" charset="-122"/>
@@ -14299,13 +14330,18 @@
             </a:avLst>
           </a:prstGeom>
           <a:solidFill>
-            <a:srgbClr val="13283F"/>
+            <a:srgbClr val="FFFFFF"/>
           </a:solidFill>
-          <a:ln/>
+          <a:ln w="12700">
+            <a:solidFill>
+              <a:srgbClr val="E3D9CC"/>
+            </a:solidFill>
+            <a:prstDash val="solid"/>
+          </a:ln>
           <a:effectLst>
-            <a:outerShdw sx="100000" sy="100000" kx="0" ky="0" algn="bl" rotWithShape="0" blurRad="127000" dist="38100" dir="5400000">
-              <a:srgbClr val="000000">
-                <a:alpha val="28000"/>
+            <a:outerShdw sx="100000" sy="100000" kx="0" ky="0" algn="bl" rotWithShape="0" blurRad="114300" dist="38100" dir="5400000">
+              <a:srgbClr val="7A6A55">
+                <a:alpha val="12000"/>
               </a:srgbClr>
             </a:outerShdw>
           </a:effectLst>
@@ -14326,9 +14362,14 @@
             <a:avLst/>
           </a:prstGeom>
           <a:solidFill>
-            <a:srgbClr val="16314F"/>
+            <a:srgbClr val="EADFD0"/>
           </a:solidFill>
-          <a:ln/>
+          <a:ln w="9525">
+            <a:solidFill>
+              <a:srgbClr val="E3D9CC"/>
+            </a:solidFill>
+            <a:prstDash val="solid"/>
+          </a:ln>
         </p:spPr>
       </p:sp>
       <p:pic>
@@ -14382,11 +14423,11 @@
             <a:r>
               <a:rPr lang="en-US" sz="1800" b="1" dirty="0">
                 <a:solidFill>
-                  <a:srgbClr val="C9A961"/>
-                </a:solidFill>
-                <a:latin typeface="Bookman Old Style" pitchFamily="34" charset="0"/>
-                <a:ea typeface="Bookman Old Style" pitchFamily="34" charset="-122"/>
-                <a:cs typeface="Bookman Old Style" pitchFamily="34" charset="-120"/>
+                  <a:srgbClr val="B1937E"/>
+                </a:solidFill>
+                <a:latin typeface="Georgia" pitchFamily="34" charset="0"/>
+                <a:ea typeface="Georgia" pitchFamily="34" charset="-122"/>
+                <a:cs typeface="Georgia" pitchFamily="34" charset="-120"/>
               </a:rPr>
               <a:t>Extras à parte</a:t>
             </a:r>
@@ -14421,7 +14462,7 @@
             <a:r>
               <a:rPr lang="en-US" sz="1350" dirty="0">
                 <a:solidFill>
-                  <a:srgbClr val="9FB2C9"/>
+                  <a:srgbClr val="8A7E72"/>
                 </a:solidFill>
                 <a:latin typeface="Calibri" pitchFamily="34" charset="0"/>
                 <a:ea typeface="Calibri" pitchFamily="34" charset="-122"/>
@@ -14450,7 +14491,7 @@
           <a:noFill/>
           <a:ln w="9525">
             <a:solidFill>
-              <a:srgbClr val="5C708A">
+              <a:srgbClr val="A89A86">
                 <a:alpha val="60000"/>
               </a:srgbClr>
             </a:solidFill>
@@ -14485,7 +14526,7 @@
             <a:r>
               <a:rPr lang="en-US" sz="900" dirty="0">
                 <a:solidFill>
-                  <a:srgbClr val="5C708A"/>
+                  <a:srgbClr val="A89A86"/>
                 </a:solidFill>
                 <a:latin typeface="Calibri" pitchFamily="34" charset="0"/>
                 <a:ea typeface="Calibri" pitchFamily="34" charset="-122"/>
@@ -14524,7 +14565,7 @@
             <a:r>
               <a:rPr lang="en-US" sz="900" dirty="0">
                 <a:solidFill>
-                  <a:srgbClr val="5C708A"/>
+                  <a:srgbClr val="A89A86"/>
                 </a:solidFill>
                 <a:latin typeface="Calibri" pitchFamily="34" charset="0"/>
                 <a:ea typeface="Calibri" pitchFamily="34" charset="-122"/>
@@ -14550,7 +14591,7 @@
     <p:bg>
       <p:bgPr>
         <a:solidFill>
-          <a:srgbClr val="0B1D33"/>
+          <a:srgbClr val="F8F6F3"/>
         </a:solidFill>
       </p:bgPr>
     </p:bg>
@@ -14570,51 +14611,7 @@
       </p:grpSpPr>
       <p:sp>
         <p:nvSpPr>
-          <p:cNvPr id="2" name="Shape 0"/>
-          <p:cNvSpPr/>
-          <p:nvPr/>
-        </p:nvSpPr>
-        <p:spPr>
-          <a:xfrm>
-            <a:off x="7772400" y="-1371600"/>
-            <a:ext cx="5486400" cy="5486400"/>
-          </a:xfrm>
-          <a:prstGeom prst="ellipse">
-            <a:avLst/>
-          </a:prstGeom>
-          <a:solidFill>
-            <a:srgbClr val="4A9EFF">
-              <a:alpha val="10000"/>
-            </a:srgbClr>
-          </a:solidFill>
-          <a:ln/>
-        </p:spPr>
-      </p:sp>
-      <p:sp>
-        <p:nvSpPr>
-          <p:cNvPr id="3" name="Shape 1"/>
-          <p:cNvSpPr/>
-          <p:nvPr/>
-        </p:nvSpPr>
-        <p:spPr>
-          <a:xfrm>
-            <a:off x="-1371600" y="4114800"/>
-            <a:ext cx="4572000" cy="4572000"/>
-          </a:xfrm>
-          <a:prstGeom prst="ellipse">
-            <a:avLst/>
-          </a:prstGeom>
-          <a:solidFill>
-            <a:srgbClr val="C9A961">
-              <a:alpha val="8000"/>
-            </a:srgbClr>
-          </a:solidFill>
-          <a:ln/>
-        </p:spPr>
-      </p:sp>
-      <p:sp>
-        <p:nvSpPr>
-          <p:cNvPr id="4" name="Text 2"/>
+          <p:cNvPr id="2" name="Text 0"/>
           <p:cNvSpPr/>
           <p:nvPr/>
         </p:nvSpPr>
@@ -14639,11 +14636,11 @@
             <a:r>
               <a:rPr lang="en-US" sz="15000" b="1" dirty="0">
                 <a:solidFill>
-                  <a:srgbClr val="16314F"/>
-                </a:solidFill>
-                <a:latin typeface="Bookman Old Style" pitchFamily="34" charset="0"/>
-                <a:ea typeface="Bookman Old Style" pitchFamily="34" charset="-122"/>
-                <a:cs typeface="Bookman Old Style" pitchFamily="34" charset="-120"/>
+                  <a:srgbClr val="EADFD0"/>
+                </a:solidFill>
+                <a:latin typeface="Georgia" pitchFamily="34" charset="0"/>
+                <a:ea typeface="Georgia" pitchFamily="34" charset="-122"/>
+                <a:cs typeface="Georgia" pitchFamily="34" charset="-120"/>
               </a:rPr>
               <a:t>B</a:t>
             </a:r>
@@ -14653,7 +14650,7 @@
       </p:sp>
       <p:sp>
         <p:nvSpPr>
-          <p:cNvPr id="5" name="Text 3"/>
+          <p:cNvPr id="3" name="Text 1"/>
           <p:cNvSpPr/>
           <p:nvPr/>
         </p:nvSpPr>
@@ -14678,7 +14675,7 @@
             <a:r>
               <a:rPr lang="en-US" sz="1300" b="1" spc="400" kern="0" dirty="0">
                 <a:solidFill>
-                  <a:srgbClr val="C9A961"/>
+                  <a:srgbClr val="B1937E"/>
                 </a:solidFill>
                 <a:latin typeface="Calibri" pitchFamily="34" charset="0"/>
                 <a:ea typeface="Calibri" pitchFamily="34" charset="-122"/>
@@ -14692,7 +14689,7 @@
       </p:sp>
       <p:sp>
         <p:nvSpPr>
-          <p:cNvPr id="6" name="Text 4"/>
+          <p:cNvPr id="4" name="Text 2"/>
           <p:cNvSpPr/>
           <p:nvPr/>
         </p:nvSpPr>
@@ -14718,23 +14715,23 @@
               <a:buNone/>
             </a:pPr>
             <a:r>
-              <a:rPr lang="en-US" sz="4400" b="1" dirty="0">
-                <a:solidFill>
-                  <a:srgbClr val="EAF1FA"/>
-                </a:solidFill>
-                <a:latin typeface="Bookman Old Style" pitchFamily="34" charset="0"/>
-                <a:ea typeface="Bookman Old Style" pitchFamily="34" charset="-122"/>
-                <a:cs typeface="Bookman Old Style" pitchFamily="34" charset="-120"/>
+              <a:rPr lang="en-US" sz="4000" b="1" dirty="0">
+                <a:solidFill>
+                  <a:srgbClr val="33302B"/>
+                </a:solidFill>
+                <a:latin typeface="Georgia" pitchFamily="34" charset="0"/>
+                <a:ea typeface="Georgia" pitchFamily="34" charset="-122"/>
+                <a:cs typeface="Georgia" pitchFamily="34" charset="-120"/>
               </a:rPr>
               <a:t>Apresentar &amp; Fechar</a:t>
             </a:r>
-            <a:endParaRPr lang="en-US" sz="4400" dirty="0"/>
-          </a:p>
-        </p:txBody>
-      </p:sp>
-      <p:sp>
-        <p:nvSpPr>
-          <p:cNvPr id="7" name="Text 5"/>
+            <a:endParaRPr lang="en-US" sz="4000" dirty="0"/>
+          </a:p>
+        </p:txBody>
+      </p:sp>
+      <p:sp>
+        <p:nvSpPr>
+          <p:cNvPr id="5" name="Text 3"/>
           <p:cNvSpPr/>
           <p:nvPr/>
         </p:nvSpPr>
@@ -14759,7 +14756,7 @@
             <a:r>
               <a:rPr lang="en-US" sz="1600" dirty="0">
                 <a:solidFill>
-                  <a:srgbClr val="9FB2C9"/>
+                  <a:srgbClr val="8A7E72"/>
                 </a:solidFill>
                 <a:latin typeface="Calibri" pitchFamily="34" charset="0"/>
                 <a:ea typeface="Calibri" pitchFamily="34" charset="-122"/>
@@ -14773,7 +14770,7 @@
       </p:sp>
       <p:sp>
         <p:nvSpPr>
-          <p:cNvPr id="8" name="Shape 6"/>
+          <p:cNvPr id="6" name="Shape 4"/>
           <p:cNvSpPr/>
           <p:nvPr/>
         </p:nvSpPr>
@@ -14788,7 +14785,7 @@
           <a:noFill/>
           <a:ln w="9525">
             <a:solidFill>
-              <a:srgbClr val="5C708A">
+              <a:srgbClr val="A89A86">
                 <a:alpha val="60000"/>
               </a:srgbClr>
             </a:solidFill>
@@ -14798,7 +14795,7 @@
       </p:sp>
       <p:sp>
         <p:nvSpPr>
-          <p:cNvPr id="9" name="Text 7"/>
+          <p:cNvPr id="7" name="Text 5"/>
           <p:cNvSpPr/>
           <p:nvPr/>
         </p:nvSpPr>
@@ -14823,7 +14820,7 @@
             <a:r>
               <a:rPr lang="en-US" sz="900" dirty="0">
                 <a:solidFill>
-                  <a:srgbClr val="5C708A"/>
+                  <a:srgbClr val="A89A86"/>
                 </a:solidFill>
                 <a:latin typeface="Calibri" pitchFamily="34" charset="0"/>
                 <a:ea typeface="Calibri" pitchFamily="34" charset="-122"/>
@@ -14837,7 +14834,7 @@
       </p:sp>
       <p:sp>
         <p:nvSpPr>
-          <p:cNvPr id="10" name="Text 8"/>
+          <p:cNvPr id="8" name="Text 6"/>
           <p:cNvSpPr/>
           <p:nvPr/>
         </p:nvSpPr>
@@ -14862,7 +14859,7 @@
             <a:r>
               <a:rPr lang="en-US" sz="900" dirty="0">
                 <a:solidFill>
-                  <a:srgbClr val="5C708A"/>
+                  <a:srgbClr val="A89A86"/>
                 </a:solidFill>
                 <a:latin typeface="Calibri" pitchFamily="34" charset="0"/>
                 <a:ea typeface="Calibri" pitchFamily="34" charset="-122"/>
